--- a/assets/designs/bao-cao-nghiem-thu-giao-trinh-dien-tu/bao-cao-nghiem-thu-giao-trinh-dien-tu.pptx
+++ b/assets/designs/bao-cao-nghiem-thu-giao-trinh-dien-tu/bao-cao-nghiem-thu-giao-trinh-dien-tu.pptx
@@ -5,7 +5,7 @@
     <p:sldMasterId id="2147483648" r:id="rId1"/>
   </p:sldMasterIdLst>
   <p:notesMasterIdLst>
-    <p:notesMasterId r:id="rId21"/>
+    <p:notesMasterId r:id="rId25"/>
   </p:notesMasterIdLst>
   <p:sldIdLst>
     <p:sldId id="256" r:id="rId2"/>
@@ -27,6 +27,10 @@
     <p:sldId id="272" r:id="rId18"/>
     <p:sldId id="273" r:id="rId19"/>
     <p:sldId id="274" r:id="rId20"/>
+    <p:sldId id="275" r:id="rId21"/>
+    <p:sldId id="276" r:id="rId22"/>
+    <p:sldId id="277" r:id="rId23"/>
+    <p:sldId id="278" r:id="rId24"/>
   </p:sldIdLst>
   <p:sldSz cx="12192000" cy="6858000"/>
   <p:notesSz cx="6858000" cy="12192000"/>
@@ -305,6 +309,8 @@
 Nhóm tác giả báo cáo kết quả xây dựng Giáo trình điện tử Cơ học lý thuyết.
 Nội dung tập trung vào hiện vật đã xây dựng, cách tổ chức học tập, ba ca đối chiếu khoa học và những điểm cần Hội đồng góp ý.
 Nguồn:
+- BaoCao_KhoaHoc_GiaoTrinhDienTu_CoHocLyThuyet_DaChinhSua.docx#1.3–1.4
+- DeCuongChiTietNop_DaChinhSua.docx#QC.8
 - README.md
 - data/content-manifest.json</a:t>
             </a:r>
@@ -394,17 +400,18 @@
             <a:r>
               <a:rPr lang="en-US" dirty="0"/>
               <a:t>SLIDE 10 · 0:55 · Bùi Thanh Xuân
-Hội đồng có thể kiểm tra trực tiếp bốn nhóm căn cứ: nội dung, khoa học, cách tổ chức học và khả năng truy vết.
-Các số liệu chỉ cho biết quy mô hiện vật, không tự chứng minh chất lượng hoặc hiệu quả học tập.
+Sơ đồ gom quy trình thành năm nhóm việc, không xác nhận mọi bước đã hoàn tất: chủ biên chốt phạm vi, chuyên gia duyệt mô hình, kỹ thuật tạo hiện vật và QA lưu bằng chứng đúng gói.
+Pipeline kỹ thuật bắt đầu từ nguồn và dữ liệu có thẩm quyền: nội dung Word được trích xuất rồi đối chiếu; câu hỏi, GIF và mô phỏng được biên soạn hoặc sản xuất riêng, không tự sinh hết từ Word.
+Phụ lục 20–23 giải thích mô phỏng, đa phương tiện, đóng gói và tra cứu/tự đánh giá. Sau kiểm tra còn phải thử người học theo kế hoạch, tiếp thu chỉnh sửa và trình đơn vị có thẩm quyền; demo không thay các bước này.
 Nguồn:
-- data/content-manifest.json
-- data/equation_mapping.json
+- BaoCao_KhoaHoc_GiaoTrinhDienTu_CoHocLyThuyet_DaChinhSua.docx#1.3–1.5; 2.5–2.8; 3.1–3.3
+- DeCuongChiTietNop_DaChinhSua.docx#QC.1–QC.9
+- data/simulation-specifications.json
+- data/sim3-pedagogical-reviews.json
 - data/quiz-ch1.json
 - data/quiz-ch2.json
 - data/quiz-ch3.json
-- data/academic_signoffs.json
-- data/simulation-specifications.json
-- CoHocLyThuyet_Full_New.docx</a:t>
+- release/2026.09.02-candidate/package/release-manifest.json</a:t>
             </a:r>
           </a:p>
         </p:txBody>
@@ -495,6 +502,8 @@
 Báo cáo phân biệt hiện vật đã được xây dựng ở mức ứng viên với những nội dung chưa đủ bằng chứng.
 Ba ca chỉ là ví dụ để Hội đồng đối chiếu, chưa phải bằng chứng chấp nhận học thuật; trạng thái phát hành được trình bày tại phụ lục.
 Nguồn:
+- BaoCao_KhoaHoc_GiaoTrinhDienTu_CoHocLyThuyet_DaChinhSua.docx#1.4; 5.2; 6.3
+- DeCuongChiTietNop_DaChinhSua.docx#QC.7–QC.8
 - data/academic_signoffs.json
 - data/learning-outcomes.json
 - data/acceptance-report.json</a:t>
@@ -588,6 +597,8 @@
 Nhóm tác giả xin góp ý theo bốn nhóm để việc tiếp thu rõ ràng và có thể kiểm tra lại.
 Điều kiện và tiêu chí của bốn đầu ra nằm tại Phụ lục 14; ba câu hỏi đại diện chỉ là mẫu để góp ý, không chứng minh mức đạt chuẩn đầu ra.
 Nguồn:
+- BaoCao_KhoaHoc_GiaoTrinhDienTu_CoHocLyThuyet_DaChinhSua.docx#1.3; 2.3; 6.2
+- DeCuongChiTietNop_DaChinhSua.docx#QC.3; QC.5; QC.7
 - data/learning-outcomes.json
 - data/quiz-ch1.json
 - data/quiz-ch2.json
@@ -683,6 +694,8 @@
 Nhóm tác giả kính đề nghị Hội đồng ghi nhận việc đã xây dựng hiện vật giáo trình điện tử và cho ý kiến cụ thể để tiếp tục hoàn thiện.
 Phiên này không đề nghị chấp thuận học thuật, nghiệm thu cuối cùng hoặc phát hành sản phẩm.
 Nguồn:
+- BaoCao_KhoaHoc_GiaoTrinhDienTu_CoHocLyThuyet_DaChinhSua.docx#1.4–1.5; 6.5
+- DeCuongChiTietNop_DaChinhSua.docx#QC.7–QC.9
 - data/academic_signoffs.json
 - data/learning-outcomes.json
 - data/acceptance-report.json</a:t>
@@ -776,6 +789,8 @@
 Dùng khi Hội đồng cần xem nội dung và trạng thái của từng chuẩn đầu ra dự kiến.
 Hồ sơ hiện hành có 0 ký xác nhận; cả bốn chuẩn còn sơ bộ và không có ngoại lệ đánh giá được khai báo.
 Nguồn:
+- BaoCao_KhoaHoc_GiaoTrinhDienTu_CoHocLyThuyet_DaChinhSua.docx#Ma trận chuẩn đầu ra
+- DeCuongChiTietNop_DaChinhSua.docx#QC.5; QC.8
 - data/learning-outcomes.json
 - data/academic_signoffs.json</a:t>
             </a:r>
@@ -868,6 +883,8 @@
 Dùng để ngăn suy rộng quá mức từ ba ca minh họa.
 Mọi kết luận phải ghi rõ phạm vi đã xem và những phần chưa được lấy mẫu.
 Nguồn:
+- BaoCao_KhoaHoc_GiaoTrinhDienTu_CoHocLyThuyet_DaChinhSua.docx#3.4
+- DeCuongChiTietNop_DaChinhSua.docx#QC.3; QC.7
 - data/simulation-specifications.json
 - data/academic_signoffs.json</a:t>
             </a:r>
@@ -960,6 +977,8 @@
 Dùng như checklist hồ sơ còn phải tạo hoặc hoàn tất.
 Không đánh dấu hoàn tất nếu chỉ có kiểm thử tự động hoặc trình diễn hiện vật.
 Nguồn:
+- BaoCao_KhoaHoc_GiaoTrinhDienTu_CoHocLyThuyet_DaChinhSua.docx#Ma trận chuẩn đầu ra; 6.2
+- DeCuongChiTietNop_DaChinhSua.docx#QC.7–QC.8
 - data/academic_signoffs.json
 - data/learning-outcomes.json
 - data/acceptance-report.json</a:t>
@@ -1050,9 +1069,11 @@
             <a:r>
               <a:rPr lang="en-US" dirty="0"/>
               <a:t>SLIDE 17 · backup · Nhóm tác giả
-Phụ lục này chỉ dùng khi Hội đồng hỏi về trạng thái kỹ thuật và phát hành.
+Phụ lục này chỉ dùng khi Hội đồng hỏi về trạng thái kỹ thuật và phát hành; đây là snapshot lịch sử, quyết định hiện hành vẫn không chấp thuận phát hành.
 Snapshot nền ngày 2026-09-21 ghi 11 điều kiện đạt, 9 không đạt và 4 chưa thể thực hiện; bằng chứng mô phỏng được làm mới ngày 2026-09-25, không đồng nghĩa toàn bộ 24 cổng đã chạy lại.
 Nguồn:
+- BaoCao_KhoaHoc_GiaoTrinhDienTu_CoHocLyThuyet_DaChinhSua.docx#1.4; 2.8; 5.1–5.2
+- DeCuongChiTietNop_DaChinhSua.docx#QC.6; QC.8
 - data/acceptance-report.json
 - data/release-candidate.json
 - evidence/command-captures</a:t>
@@ -1146,6 +1167,8 @@
 Dùng khi cần giải thích đầy đủ chín trạng thái không đạt và bốn nội dung chưa thể thực hiện.
 Phân biệt lỗi môi trường chạy kiểm thử với thất bại của phép kiểm tra; không coi việc trình diễn là bằng chứng thay thế.
 Nguồn:
+- BaoCao_KhoaHoc_GiaoTrinhDienTu_CoHocLyThuyet_DaChinhSua.docx#1.4; 5.2; 6.2
+- DeCuongChiTietNop_DaChinhSua.docx#QC.7–QC.8
 - data/acceptance-report.json</a:t>
             </a:r>
           </a:p>
@@ -1235,8 +1258,10 @@
               <a:rPr lang="en-US" dirty="0"/>
               <a:t>SLIDE 19 · backup · Nhóm tác giả
 Dùng khi cần trả lời nhanh mà không vượt quá dữ liệu.
-Nếu câu hỏi đòi kết luận ngoài phạm vi ba nguồn, ghi nhận để Hội đồng yêu cầu thêm minh chứng.
+Nếu câu hỏi đòi kết luận ngoài phạm vi nguồn đã dẫn, ghi nhận để Hội đồng yêu cầu thêm minh chứng.
 Nguồn:
+- BaoCao_KhoaHoc_GiaoTrinhDienTu_CoHocLyThuyet_DaChinhSua.docx#1.4; 6.2–6.5
+- DeCuongChiTietNop_DaChinhSua.docx#QC.7–QC.8
 - data/academic_signoffs.json
 - data/learning-outcomes.json
 - data/acceptance-report.json</a:t>
@@ -1330,6 +1355,8 @@
 Bốn điểm này là nhu cầu mà nhóm tác giả dùng để định hướng thiết kế học liệu.
 Đây là cơ sở thiết kế, không phải tuyên bố rằng hiệu quả học tập đã được chứng minh.
 Nguồn:
+- BaoCao_KhoaHoc_GiaoTrinhDienTu_CoHocLyThuyet_DaChinhSua.docx#1.3
+- DeCuongChiTietNop_DaChinhSua.docx#QC.1–QC.5
 - README.md
 - data/content-manifest.json
 - data/simulation-specifications.json</a:t>
@@ -1355,6 +1382,389 @@
             <a:fld id="{F7021451-1387-4CA6-816F-3879F97B5CBC}" type="slidenum">
               <a:rPr lang="en-US"/>
               <a:t>2</a:t>
+            </a:fld>
+            <a:endParaRPr lang="en-US"/>
+          </a:p>
+        </p:txBody>
+      </p:sp>
+    </p:spTree>
+    <p:extLst>
+      <p:ext uri="{BB962C8B-B14F-4D97-AF65-F5344CB8AC3E}">
+        <p14:creationId xmlns:p14="http://schemas.microsoft.com/office/powerpoint/2010/main" val="1024086991"/>
+      </p:ext>
+    </p:extLst>
+  </p:cSld>
+  <p:clrMapOvr>
+    <a:masterClrMapping/>
+  </p:clrMapOvr>
+</p:notes>
+</file>
+
+<file path=ppt/notesSlides/notesSlide20.xml><?xml version="1.0" encoding="utf-8"?>
+<p:notes xmlns:a="http://schemas.openxmlformats.org/drawingml/2006/main" xmlns:r="http://schemas.openxmlformats.org/officeDocument/2006/relationships" xmlns:p="http://schemas.openxmlformats.org/presentationml/2006/main">
+  <p:cSld>
+    <p:spTree>
+      <p:nvGrpSpPr>
+        <p:cNvPr id="1" name=""/>
+        <p:cNvGrpSpPr/>
+        <p:nvPr/>
+      </p:nvGrpSpPr>
+      <p:grpSpPr>
+        <a:xfrm>
+          <a:off x="0" y="0"/>
+          <a:ext cx="0" cy="0"/>
+          <a:chOff x="0" y="0"/>
+          <a:chExt cx="0" cy="0"/>
+        </a:xfrm>
+      </p:grpSpPr>
+      <p:sp>
+        <p:nvSpPr>
+          <p:cNvPr id="2" name="Slide Image Placeholder 1"/>
+          <p:cNvSpPr>
+            <a:spLocks noGrp="1" noRot="1" noChangeAspect="1"/>
+          </p:cNvSpPr>
+          <p:nvPr>
+            <p:ph type="sldImg"/>
+          </p:nvPr>
+        </p:nvSpPr>
+        <p:spPr/>
+      </p:sp>
+      <p:sp>
+        <p:nvSpPr>
+          <p:cNvPr id="3" name="Notes Placeholder 2"/>
+          <p:cNvSpPr>
+            <a:spLocks noGrp="1"/>
+          </p:cNvSpPr>
+          <p:nvPr>
+            <p:ph type="body" idx="1"/>
+          </p:nvPr>
+        </p:nvSpPr>
+        <p:spPr/>
+        <p:txBody>
+          <a:bodyPr/>
+          <a:lstStyle/>
+          <a:p>
+            <a:r>
+              <a:rPr lang="en-US" dirty="0"/>
+              <a:t>SLIDE 20 · backup · Nhóm tác giả
+Chuyên gia nêu bài toán, giả thiết, hệ quy chiếu, tham số và miền áp dụng trước khi kỹ thuật nối hàm tính/trạng thái với hình học, điều khiển và giá trị hiển thị.
+Sim2 là đường cơ sở. Sim3 dựng trục, vật thể, quỹ đạo và vectơ bằng Three.js từ trạng thái bài toán; không có căn cứ nói đã dùng Blender, Unity, Unreal hay nguồn glTF.
+Đồng hồ fixed-step 1/60 s là nhịp cập nhật, không phải phương pháp tính áp dụng chung. RK4 chỉ dùng cho bài toán ODE phù hợp. Chỉ gọi 3D+t khi có chuỗi trạng thái theo thời gian; thử nghiệm 3D chưa được phê duyệt sư phạm độc lập.
+Nguồn:
+- BaoCao_KhoaHoc_GiaoTrinhDienTu_CoHocLyThuyet_DaChinhSua.docx#1.3–1.5; 3.1–3.3
+- DeCuongChiTietNop_DaChinhSua.docx#QC.3; QC.8–QC.9
+- data/simulation-specifications.json
+- data/sim3-pedagogical-reviews.json</a:t>
+            </a:r>
+          </a:p>
+        </p:txBody>
+      </p:sp>
+      <p:sp>
+        <p:nvSpPr>
+          <p:cNvPr id="4" name="Slide Number Placeholder 3"/>
+          <p:cNvSpPr>
+            <a:spLocks noGrp="1"/>
+          </p:cNvSpPr>
+          <p:nvPr>
+            <p:ph type="sldNum" sz="quarter" idx="10"/>
+          </p:nvPr>
+        </p:nvSpPr>
+        <p:spPr/>
+        <p:txBody>
+          <a:bodyPr/>
+          <a:lstStyle/>
+          <a:p>
+            <a:fld id="{F7021451-1387-4CA6-816F-3879F97B5CBC}" type="slidenum">
+              <a:rPr lang="en-US"/>
+              <a:t>20</a:t>
+            </a:fld>
+            <a:endParaRPr lang="en-US"/>
+          </a:p>
+        </p:txBody>
+      </p:sp>
+    </p:spTree>
+    <p:extLst>
+      <p:ext uri="{BB962C8B-B14F-4D97-AF65-F5344CB8AC3E}">
+        <p14:creationId xmlns:p14="http://schemas.microsoft.com/office/powerpoint/2010/main" val="1024086991"/>
+      </p:ext>
+    </p:extLst>
+  </p:cSld>
+  <p:clrMapOvr>
+    <a:masterClrMapping/>
+  </p:clrMapOvr>
+</p:notes>
+</file>
+
+<file path=ppt/notesSlides/notesSlide21.xml><?xml version="1.0" encoding="utf-8"?>
+<p:notes xmlns:a="http://schemas.openxmlformats.org/drawingml/2006/main" xmlns:r="http://schemas.openxmlformats.org/officeDocument/2006/relationships" xmlns:p="http://schemas.openxmlformats.org/presentationml/2006/main">
+  <p:cSld>
+    <p:spTree>
+      <p:nvGrpSpPr>
+        <p:cNvPr id="1" name=""/>
+        <p:cNvGrpSpPr/>
+        <p:nvPr/>
+      </p:nvGrpSpPr>
+      <p:grpSpPr>
+        <a:xfrm>
+          <a:off x="0" y="0"/>
+          <a:ext cx="0" cy="0"/>
+          <a:chOff x="0" y="0"/>
+          <a:chExt cx="0" cy="0"/>
+        </a:xfrm>
+      </p:grpSpPr>
+      <p:sp>
+        <p:nvSpPr>
+          <p:cNvPr id="2" name="Slide Image Placeholder 1"/>
+          <p:cNvSpPr>
+            <a:spLocks noGrp="1" noRot="1" noChangeAspect="1"/>
+          </p:cNvSpPr>
+          <p:nvPr>
+            <p:ph type="sldImg"/>
+          </p:nvPr>
+        </p:nvSpPr>
+        <p:spPr/>
+      </p:sp>
+      <p:sp>
+        <p:nvSpPr>
+          <p:cNvPr id="3" name="Notes Placeholder 2"/>
+          <p:cNvSpPr>
+            <a:spLocks noGrp="1"/>
+          </p:cNvSpPr>
+          <p:nvPr>
+            <p:ph type="body" idx="1"/>
+          </p:nvPr>
+        </p:nvSpPr>
+        <p:spPr/>
+        <p:txBody>
+          <a:bodyPr/>
+          <a:lstStyle/>
+          <a:p>
+            <a:r>
+              <a:rPr lang="en-US" dirty="0"/>
+              <a:t>SLIDE 21 · backup · Nhóm tác giả
+Kiểm kê chỉ bao phủ danh mục gói ứng viên và 19 đuôi: .aac, .aif, .aiff, .avi, .flac, .m4a, .m4v, .mkv, .mov, .mp3, .mp4, .mpeg, .mpg, .ogg, .ogv, .opus, .wav, .webm, .wma; không kết luận về mọi định dạng hoặc tệp ngoài danh mục.
+GIF dùng PNG tham chiếu rồi dựng lại hình học/chuyển động bằng generate-gifs.py, xem contact sheet, duyệt vật lý/nhãn/trình tự rồi publish-gifs.py. Tài nguyên hiện diện không có nghĩa cổng GIF đã đạt.
+Video và âm thanh là nhánh đề xuất riêng. Ghi màn hình một mô phỏng đã kiểm đúng chỉ lưu một diễn biến được chọn, không thay thao tác đổi tham số. Phụ đề tự sinh phải được kiểm; xuất tệp và thử player trên thiết bị đích sau duyệt, không tính bốn prototype Chương 1 thành video.
+Nguồn:
+- BaoCao_KhoaHoc_GiaoTrinhDienTu_CoHocLyThuyet_DaChinhSua.docx#1.3–1.5; 2.2; 2.5
+- DeCuongChiTietNop_DaChinhSua.docx#QC.2; QC.8–QC.9
+- release/2026.09.02-candidate/package/release-manifest.json
+- data/media-pilot-manifest.json</a:t>
+            </a:r>
+          </a:p>
+        </p:txBody>
+      </p:sp>
+      <p:sp>
+        <p:nvSpPr>
+          <p:cNvPr id="4" name="Slide Number Placeholder 3"/>
+          <p:cNvSpPr>
+            <a:spLocks noGrp="1"/>
+          </p:cNvSpPr>
+          <p:nvPr>
+            <p:ph type="sldNum" sz="quarter" idx="10"/>
+          </p:nvPr>
+        </p:nvSpPr>
+        <p:spPr/>
+        <p:txBody>
+          <a:bodyPr/>
+          <a:lstStyle/>
+          <a:p>
+            <a:fld id="{F7021451-1387-4CA6-816F-3879F97B5CBC}" type="slidenum">
+              <a:rPr lang="en-US"/>
+              <a:t>21</a:t>
+            </a:fld>
+            <a:endParaRPr lang="en-US"/>
+          </a:p>
+        </p:txBody>
+      </p:sp>
+    </p:spTree>
+    <p:extLst>
+      <p:ext uri="{BB962C8B-B14F-4D97-AF65-F5344CB8AC3E}">
+        <p14:creationId xmlns:p14="http://schemas.microsoft.com/office/powerpoint/2010/main" val="1024086991"/>
+      </p:ext>
+    </p:extLst>
+  </p:cSld>
+  <p:clrMapOvr>
+    <a:masterClrMapping/>
+  </p:clrMapOvr>
+</p:notes>
+</file>
+
+<file path=ppt/notesSlides/notesSlide22.xml><?xml version="1.0" encoding="utf-8"?>
+<p:notes xmlns:a="http://schemas.openxmlformats.org/drawingml/2006/main" xmlns:r="http://schemas.openxmlformats.org/officeDocument/2006/relationships" xmlns:p="http://schemas.openxmlformats.org/presentationml/2006/main">
+  <p:cSld>
+    <p:spTree>
+      <p:nvGrpSpPr>
+        <p:cNvPr id="1" name=""/>
+        <p:cNvGrpSpPr/>
+        <p:nvPr/>
+      </p:nvGrpSpPr>
+      <p:grpSpPr>
+        <a:xfrm>
+          <a:off x="0" y="0"/>
+          <a:ext cx="0" cy="0"/>
+          <a:chOff x="0" y="0"/>
+          <a:chExt cx="0" cy="0"/>
+        </a:xfrm>
+      </p:grpSpPr>
+      <p:sp>
+        <p:nvSpPr>
+          <p:cNvPr id="2" name="Slide Image Placeholder 1"/>
+          <p:cNvSpPr>
+            <a:spLocks noGrp="1" noRot="1" noChangeAspect="1"/>
+          </p:cNvSpPr>
+          <p:nvPr>
+            <p:ph type="sldImg"/>
+          </p:nvPr>
+        </p:nvSpPr>
+        <p:spPr/>
+      </p:sp>
+      <p:sp>
+        <p:nvSpPr>
+          <p:cNvPr id="3" name="Notes Placeholder 2"/>
+          <p:cNvSpPr>
+            <a:spLocks noGrp="1"/>
+          </p:cNvSpPr>
+          <p:nvPr>
+            <p:ph type="body" idx="1"/>
+          </p:nvPr>
+        </p:nvSpPr>
+        <p:spPr/>
+        <p:txBody>
+          <a:bodyPr/>
+          <a:lstStyle/>
+          <a:p>
+            <a:r>
+              <a:rPr lang="en-US" dirty="0"/>
+              <a:t>SLIDE 22 · backup · Nhóm tác giả
+tools/release/release.py sở hữu staging, danh mục, SHA-256, thông tin thư viện, kiểm staging và ZIP. Web tĩnh là nền tảng; ZIP là phương tiện phân phối, không tự tạo giao tiếp runtime với LMS.
+QTI 3 và Common Cartridge 1.4 ở mức adapter-validated; trạng thái liên thông là not-executed, chưa có LMS đích hay bằng chứng nhập/chạy. QTI chỉ kiểm tối đa 10 câu một lựa chọn, không tuyên bố chuyển đủ 300 câu.
+Nếu cần SCORM phải chọn edition theo LMS và yêu cầu completion/score/resume, xây manifest và runtime API rồi kiểm nhập–mở–học–lưu–mở lại. xAPI là trao đổi sự kiện; cmi5 là profile dùng trong LMS, không gọi xAPI là định dạng ZIP thay SCORM. Không bắt buộc triển khai mọi chuẩn khi nhu cầu không yêu cầu.
+Nguồn:
+- BaoCao_KhoaHoc_GiaoTrinhDienTu_CoHocLyThuyet_DaChinhSua.docx#1.4–1.5; 2.3; 2.8
+- DeCuongChiTietNop_DaChinhSua.docx#QC.6; QC.8–QC.9
+- data/lms-targets.json
+- data/release-candidate.json
+- data/acceptance-report.json</a:t>
+            </a:r>
+          </a:p>
+        </p:txBody>
+      </p:sp>
+      <p:sp>
+        <p:nvSpPr>
+          <p:cNvPr id="4" name="Slide Number Placeholder 3"/>
+          <p:cNvSpPr>
+            <a:spLocks noGrp="1"/>
+          </p:cNvSpPr>
+          <p:nvPr>
+            <p:ph type="sldNum" sz="quarter" idx="10"/>
+          </p:nvPr>
+        </p:nvSpPr>
+        <p:spPr/>
+        <p:txBody>
+          <a:bodyPr/>
+          <a:lstStyle/>
+          <a:p>
+            <a:fld id="{F7021451-1387-4CA6-816F-3879F97B5CBC}" type="slidenum">
+              <a:rPr lang="en-US"/>
+              <a:t>22</a:t>
+            </a:fld>
+            <a:endParaRPr lang="en-US"/>
+          </a:p>
+        </p:txBody>
+      </p:sp>
+    </p:spTree>
+    <p:extLst>
+      <p:ext uri="{BB962C8B-B14F-4D97-AF65-F5344CB8AC3E}">
+        <p14:creationId xmlns:p14="http://schemas.microsoft.com/office/powerpoint/2010/main" val="1024086991"/>
+      </p:ext>
+    </p:extLst>
+  </p:cSld>
+  <p:clrMapOvr>
+    <a:masterClrMapping/>
+  </p:clrMapOvr>
+</p:notes>
+</file>
+
+<file path=ppt/notesSlides/notesSlide23.xml><?xml version="1.0" encoding="utf-8"?>
+<p:notes xmlns:a="http://schemas.openxmlformats.org/drawingml/2006/main" xmlns:r="http://schemas.openxmlformats.org/officeDocument/2006/relationships" xmlns:p="http://schemas.openxmlformats.org/presentationml/2006/main">
+  <p:cSld>
+    <p:spTree>
+      <p:nvGrpSpPr>
+        <p:cNvPr id="1" name=""/>
+        <p:cNvGrpSpPr/>
+        <p:nvPr/>
+      </p:nvGrpSpPr>
+      <p:grpSpPr>
+        <a:xfrm>
+          <a:off x="0" y="0"/>
+          <a:ext cx="0" cy="0"/>
+          <a:chOff x="0" y="0"/>
+          <a:chExt cx="0" cy="0"/>
+        </a:xfrm>
+      </p:grpSpPr>
+      <p:sp>
+        <p:nvSpPr>
+          <p:cNvPr id="2" name="Slide Image Placeholder 1"/>
+          <p:cNvSpPr>
+            <a:spLocks noGrp="1" noRot="1" noChangeAspect="1"/>
+          </p:cNvSpPr>
+          <p:nvPr>
+            <p:ph type="sldImg"/>
+          </p:nvPr>
+        </p:nvSpPr>
+        <p:spPr/>
+      </p:sp>
+      <p:sp>
+        <p:nvSpPr>
+          <p:cNvPr id="3" name="Notes Placeholder 2"/>
+          <p:cNvSpPr>
+            <a:spLocks noGrp="1"/>
+          </p:cNvSpPr>
+          <p:nvPr>
+            <p:ph type="body" idx="1"/>
+          </p:nvPr>
+        </p:nvSpPr>
+        <p:spPr/>
+        <p:txBody>
+          <a:bodyPr/>
+          <a:lstStyle/>
+          <a:p>
+            <a:r>
+              <a:rPr lang="en-US" dirty="0"/>
+              <a:t>SLIDE 23 · backup · Nhóm tác giả
+tools/build_search_index.py tạo chỉ mục, js/search.js xử lý truy vấn và route/anchor; khi chỉ mục không khả dụng có thông báo tìm theo mục lục. Sửa nội dung phải tái tạo chỉ mục và kiểm liên kết, không tự xóa finding của gói lịch sử.
+Câu hỏi được biên soạn riêng, có mục tiêu, đáp án và phản hồi; cần phản biện chuyên môn và thử người học trước kết luận chất lượng ngân hàng. Ngưỡng 70% trong dữ liệu là quy tắc kỹ thuật tự đánh giá, không phải chuẩn đạt học phần.
+Hoạt động mô phỏng có thể đi theo dự đoán → đổi tham số → quan sát → giải thích. Nếu chấm phải dùng rubric đã duyệt; localStorage và tiến độ mở trang không thay danh tính, điểm tin cậy hoặc dữ liệu nghiên cứu hiệu quả học tập.
+Nguồn:
+- BaoCao_KhoaHoc_GiaoTrinhDienTu_CoHocLyThuyet_DaChinhSua.docx#1.3–1.5; 2.3; 2.6–2.7
+- DeCuongChiTietNop_DaChinhSua.docx#QC.4–QC.5; QC.8–QC.9
+- data/quiz-ch1.json
+- data/quiz-ch2.json
+- data/quiz-ch3.json
+- data/learning-outcomes.json</a:t>
+            </a:r>
+          </a:p>
+        </p:txBody>
+      </p:sp>
+      <p:sp>
+        <p:nvSpPr>
+          <p:cNvPr id="4" name="Slide Number Placeholder 3"/>
+          <p:cNvSpPr>
+            <a:spLocks noGrp="1"/>
+          </p:cNvSpPr>
+          <p:nvPr>
+            <p:ph type="sldNum" sz="quarter" idx="10"/>
+          </p:nvPr>
+        </p:nvSpPr>
+        <p:spPr/>
+        <p:txBody>
+          <a:bodyPr/>
+          <a:lstStyle/>
+          <a:p>
+            <a:fld id="{F7021451-1387-4CA6-816F-3879F97B5CBC}" type="slidenum">
+              <a:rPr lang="en-US"/>
+              <a:t>23</a:t>
             </a:fld>
             <a:endParaRPr lang="en-US"/>
           </a:p>
@@ -1423,6 +1833,8 @@
 Kết quả tổng thể là một học liệu số gồm các mục và trang hiển thị cho ba mạch kiến thức chính của học phần.
 Manifest ghi 108 mục/trang hiển thị: 45 thuộc Chương 1, 29 thuộc Chương 2, 31 thuộc Chương 3 và 3 mục bổ trợ.
 Nguồn:
+- BaoCao_KhoaHoc_GiaoTrinhDienTu_CoHocLyThuyet_DaChinhSua.docx#1.2–1.4
+- DeCuongChiTietNop_DaChinhSua.docx#QC.1; QC.8
 - data/content-manifest.json
 - data/quiz-ch1.json
 - data/quiz-ch2.json
@@ -1517,6 +1929,8 @@
 Thiết kế hướng tới một vòng học thay vì chỉ trình bày nội dung theo tuyến.
 Khả năng vận hành xuyên suốt và hiệu quả đối với người học chưa được xác nhận; câu hỏi tự kiểm tra không phải phép đo chính thức về mức đạt chuẩn đầu ra.
 Nguồn:
+- BaoCao_KhoaHoc_GiaoTrinhDienTu_CoHocLyThuyet_DaChinhSua.docx#1.3; 2.3; 2.6
+- DeCuongChiTietNop_DaChinhSua.docx#QC.4–QC.5
 - data/learning-outcomes.json
 - data/content-learning-map.json
 - data/quiz-learning-map.json
@@ -1611,6 +2025,8 @@
 Kính mời Hội đồng quét mã để xem bản web dùng cho trình diễn.
 Bản web chưa được chứng minh đồng nhất với ứng viên đang kiểm tra; việc trình diễn không thay thế kiểm tra gói ứng viên qua file hoặc HTTP.
 Nguồn:
+- BaoCao_KhoaHoc_GiaoTrinhDienTu_CoHocLyThuyet_DaChinhSua.docx#1.4; 4.1
+- DeCuongChiTietNop_DaChinhSua.docx#QC.8
 - README.md
 - data/content-manifest.json</a:t>
             </a:r>
@@ -1703,6 +2119,8 @@
 Ca Tĩnh học đặt sơ đồ, công thức và giá trị hiển thị cạnh nhau; ca này chưa thẩm định độc lập.
 Hội đồng có thể đối chiếu bằng tính đối xứng, giới hạn tọa độ và phép cộng diện tích có dấu của hình cụ thể.
 Nguồn:
+- BaoCao_KhoaHoc_GiaoTrinhDienTu_CoHocLyThuyet_DaChinhSua.docx#3.2–3.4
+- DeCuongChiTietNop_DaChinhSua.docx#QC.3
 - data/simulation-specifications.json
 - tests/sim2-ch1-physics.test.js</a:t>
             </a:r>
@@ -1795,6 +2213,8 @@
 Ca Động học cho phép đối chiếu chiều của omega, vận tốc tương đối và tích có hướng; ca này chưa thẩm định độc lập.
 Trong mô hình phẳng đang xét, omega vuông góc với vận tốc tương đối nên độ lớn là 2ω|vrel|; trường hợp tổng quát phải nhân thêm sin của góc giữa hai vectơ. Đây là thành phần Coriolis, không phải toàn bộ gia tốc.
 Nguồn:
+- BaoCao_KhoaHoc_GiaoTrinhDienTu_CoHocLyThuyet_DaChinhSua.docx#3.2–3.4
+- DeCuongChiTietNop_DaChinhSua.docx#QC.3
 - data/simulation-specifications.json
 - tests/sim2-ch2-physics.test.js</a:t>
             </a:r>
@@ -1887,6 +2307,8 @@
 Ca Động lực học đặt tổng động lượng, vận tốc có dấu và hệ số phục hồi trong cùng một tình huống; ca này chưa thẩm định độc lập.
 Phát biểu chỉ áp dụng cho mô hình va chạm thẳng một chiều thụ động với xung lực ngoài theo phương va chạm không đáng kể.
 Nguồn:
+- BaoCao_KhoaHoc_GiaoTrinhDienTu_CoHocLyThuyet_DaChinhSua.docx#3.2–3.4
+- DeCuongChiTietNop_DaChinhSua.docx#QC.3
 - data/simulation-specifications.json
 - tests/sim2-ch3-physics.test.js</a:t>
             </a:r>
@@ -1979,6 +2401,8 @@
 Điểm O và phương lực được giữ cố định; đặt F bằng 50 N rồi kéo điểm đặt lực đến d vuông góc bằng 4 mét để đọc mô men dương 200 N·m.
 Mở PDF cục bộ để đối chiếu công thức rồi quay lại bài; mô phỏng không minh họa đổi θ hoặc đổi dấu mô men.
 Nguồn:
+- BaoCao_KhoaHoc_GiaoTrinhDienTu_CoHocLyThuyet_DaChinhSua.docx#3.2; 4.1
+- DeCuongChiTietNop_DaChinhSua.docx#QC.3
 - assets/designs/bao-cao-nghiem-thu-giao-trinh-dien-tu/assets/img-04-mo-men-ch1-1-4-1440x1000.png
 - js/sim2/sims/ch1/ch1-1-4.js
 - data/simulation-specifications.json
@@ -3468,7 +3892,7 @@
                 <a:ea typeface="Georgia" pitchFamily="34" charset="-122"/>
                 <a:cs typeface="Georgia" pitchFamily="34" charset="-120"/>
               </a:rPr>
-              <a:t>Căn cứ Hội đồng có thể kiểm tra</a:t>
+              <a:t>Từ nguồn chuẩn đến gói có thể kiểm tra</a:t>
             </a:r>
             <a:endParaRPr lang="en-US" sz="3600" dirty="0"/>
           </a:p>
@@ -3575,7 +3999,7 @@
                 <a:ea typeface="Arial" pitchFamily="34" charset="-122"/>
                 <a:cs typeface="Arial" pitchFamily="34" charset="-120"/>
               </a:rPr>
-              <a:t>108 mục/trang hiển thị (45 Chương 1 · 29 Chương 2 · 31 Chương 3 · 3 mục bổ trợ) là số liệu phạm vi, không phải điểm chất lượng.</a:t>
+              <a:t>Tạo hiện vật → kiểm chứng → phê duyệt: ba việc riêng, có đầu ra để đối chiếu.</a:t>
             </a:r>
             <a:endParaRPr lang="en-US" sz="1700" dirty="0"/>
           </a:p>
@@ -3680,7 +4104,7 @@
                 <a:ea typeface="Arial" pitchFamily="34" charset="-122"/>
                 <a:cs typeface="Arial" pitchFamily="34" charset="-120"/>
               </a:rPr>
-              <a:t>KQ-CAN-CU</a:t>
+              <a:t>KQ-PHUONG-PHAP</a:t>
             </a:r>
             <a:endParaRPr lang="en-US" sz="760" dirty="0"/>
           </a:p>
@@ -3729,124 +4153,18 @@
       </p:sp>
       <p:sp>
         <p:nvSpPr>
-          <p:cNvPr id="13" name="Text 10"/>
-          <p:cNvSpPr txBox="1"/>
-          <p:nvPr/>
-        </p:nvSpPr>
-        <p:spPr>
-          <a:xfrm>
-            <a:off x="768096" y="2029968"/>
-            <a:ext cx="3657600" cy="237744"/>
-          </a:xfrm>
-          <a:prstGeom prst="rect">
-            <a:avLst/>
-          </a:prstGeom>
-          <a:noFill/>
-          <a:ln/>
-        </p:spPr>
-        <p:txBody>
-          <a:bodyPr wrap="square" lIns="0" tIns="0" rIns="0" bIns="0" rtlCol="0" anchor="t">
-            <a:normAutofit/>
-          </a:bodyPr>
-          <a:lstStyle/>
-          <a:p>
-            <a:pPr marL="0" indent="0" algn="l">
-              <a:buNone/>
-            </a:pPr>
-            <a:r>
-              <a:rPr lang="en-US" sz="1300" b="1" dirty="0">
-                <a:solidFill>
-                  <a:srgbClr val="15355F"/>
-                </a:solidFill>
-                <a:latin typeface="Arial" pitchFamily="34" charset="0"/>
-                <a:ea typeface="Arial" pitchFamily="34" charset="-122"/>
-                <a:cs typeface="Arial" pitchFamily="34" charset="-120"/>
-              </a:rPr>
-              <a:t>NGUỒN CÓ THỂ MỞ</a:t>
-            </a:r>
-            <a:endParaRPr lang="en-US" sz="1300" dirty="0"/>
-          </a:p>
-        </p:txBody>
-      </p:sp>
-      <p:sp>
-        <p:nvSpPr>
-          <p:cNvPr id="14" name="Text 11"/>
-          <p:cNvSpPr txBox="1"/>
-          <p:nvPr/>
-        </p:nvSpPr>
-        <p:spPr>
-          <a:xfrm>
-            <a:off x="5010912" y="2029968"/>
-            <a:ext cx="6309360" cy="237744"/>
-          </a:xfrm>
-          <a:prstGeom prst="rect">
-            <a:avLst/>
-          </a:prstGeom>
-          <a:noFill/>
-          <a:ln/>
-        </p:spPr>
-        <p:txBody>
-          <a:bodyPr wrap="square" lIns="0" tIns="0" rIns="0" bIns="0" rtlCol="0" anchor="t">
-            <a:normAutofit/>
-          </a:bodyPr>
-          <a:lstStyle/>
-          <a:p>
-            <a:pPr marL="0" indent="0" algn="l">
-              <a:buNone/>
-            </a:pPr>
-            <a:r>
-              <a:rPr lang="en-US" sz="1300" b="1" dirty="0">
-                <a:solidFill>
-                  <a:srgbClr val="15355F"/>
-                </a:solidFill>
-                <a:latin typeface="Arial" pitchFamily="34" charset="0"/>
-                <a:ea typeface="Arial" pitchFamily="34" charset="-122"/>
-                <a:cs typeface="Arial" pitchFamily="34" charset="-120"/>
-              </a:rPr>
-              <a:t>NHÓM CĂN CỨ CÓ THỂ ĐỐI CHIẾU</a:t>
-            </a:r>
-            <a:endParaRPr lang="en-US" sz="1300" dirty="0"/>
-          </a:p>
-        </p:txBody>
-      </p:sp>
-      <p:sp>
-        <p:nvSpPr>
-          <p:cNvPr id="15" name="Shape 12"/>
+          <p:cNvPr id="13" name="Shape 10"/>
           <p:cNvSpPr/>
           <p:nvPr/>
         </p:nvSpPr>
         <p:spPr>
           <a:xfrm>
-            <a:off x="4425696" y="2715768"/>
-            <a:ext cx="512064" cy="0"/>
-          </a:xfrm>
-          <a:prstGeom prst="line">
-            <a:avLst/>
-          </a:prstGeom>
-          <a:noFill/>
-          <a:ln w="12700">
-            <a:solidFill>
-              <a:srgbClr val="2980B9"/>
-            </a:solidFill>
-            <a:prstDash val="solid"/>
-            <a:tailEnd type="triangle"/>
-          </a:ln>
-        </p:spPr>
-      </p:sp>
-      <p:sp>
-        <p:nvSpPr>
-          <p:cNvPr id="16" name="Shape 13"/>
-          <p:cNvSpPr/>
-          <p:nvPr/>
-        </p:nvSpPr>
-        <p:spPr>
-          <a:xfrm>
-            <a:off x="713232" y="2395728"/>
-            <a:ext cx="3712464" cy="640080"/>
+            <a:off x="658368" y="1993392"/>
+            <a:ext cx="1920240" cy="676656"/>
           </a:xfrm>
           <a:prstGeom prst="roundRect">
             <a:avLst>
-              <a:gd name="adj" fmla="val 5714"/>
+              <a:gd name="adj" fmla="val 5405"/>
             </a:avLst>
           </a:prstGeom>
           <a:solidFill>
@@ -3854,7 +4172,7 @@
           </a:solidFill>
           <a:ln w="12700">
             <a:solidFill>
-              <a:srgbClr val="D7DEE8"/>
+              <a:srgbClr val="15355F"/>
             </a:solidFill>
             <a:prstDash val="solid"/>
           </a:ln>
@@ -3862,14 +4180,106 @@
       </p:sp>
       <p:sp>
         <p:nvSpPr>
+          <p:cNvPr id="14" name="Text 11"/>
+          <p:cNvSpPr txBox="1"/>
+          <p:nvPr/>
+        </p:nvSpPr>
+        <p:spPr>
+          <a:xfrm>
+            <a:off x="768096" y="2057400"/>
+            <a:ext cx="1700784" cy="548640"/>
+          </a:xfrm>
+          <a:prstGeom prst="rect">
+            <a:avLst/>
+          </a:prstGeom>
+          <a:noFill/>
+          <a:ln/>
+        </p:spPr>
+        <p:txBody>
+          <a:bodyPr wrap="square" lIns="0" tIns="0" rIns="0" bIns="0" rtlCol="0" anchor="ctr">
+            <a:normAutofit/>
+          </a:bodyPr>
+          <a:lstStyle/>
+          <a:p>
+            <a:pPr marL="0" indent="0" algn="ctr">
+              <a:buNone/>
+            </a:pPr>
+            <a:r>
+              <a:rPr lang="en-US" sz="1650" b="1" dirty="0">
+                <a:solidFill>
+                  <a:srgbClr val="07182F"/>
+                </a:solidFill>
+                <a:latin typeface="Arial" pitchFamily="34" charset="0"/>
+                <a:ea typeface="Arial" pitchFamily="34" charset="-122"/>
+                <a:cs typeface="Arial" pitchFamily="34" charset="-120"/>
+              </a:rPr>
+              <a:t>Chốt mục tiêu</a:t>
+            </a:r>
+            <a:endParaRPr lang="en-US" sz="1650" dirty="0"/>
+          </a:p>
+        </p:txBody>
+      </p:sp>
+      <p:sp>
+        <p:nvSpPr>
+          <p:cNvPr id="15" name="Shape 12"/>
+          <p:cNvSpPr/>
+          <p:nvPr/>
+        </p:nvSpPr>
+        <p:spPr>
+          <a:xfrm>
+            <a:off x="2642616" y="2331720"/>
+            <a:ext cx="201168" cy="0"/>
+          </a:xfrm>
+          <a:prstGeom prst="line">
+            <a:avLst/>
+          </a:prstGeom>
+          <a:noFill/>
+          <a:ln w="12700">
+            <a:solidFill>
+              <a:srgbClr val="C9963A"/>
+            </a:solidFill>
+            <a:prstDash val="solid"/>
+            <a:tailEnd type="triangle"/>
+          </a:ln>
+        </p:spPr>
+      </p:sp>
+      <p:sp>
+        <p:nvSpPr>
+          <p:cNvPr id="16" name="Shape 13"/>
+          <p:cNvSpPr/>
+          <p:nvPr/>
+        </p:nvSpPr>
+        <p:spPr>
+          <a:xfrm>
+            <a:off x="2907792" y="1993392"/>
+            <a:ext cx="1920240" cy="676656"/>
+          </a:xfrm>
+          <a:prstGeom prst="roundRect">
+            <a:avLst>
+              <a:gd name="adj" fmla="val 5405"/>
+            </a:avLst>
+          </a:prstGeom>
+          <a:solidFill>
+            <a:srgbClr val="FFFFFF"/>
+          </a:solidFill>
+          <a:ln w="12700">
+            <a:solidFill>
+              <a:srgbClr val="15355F"/>
+            </a:solidFill>
+            <a:prstDash val="solid"/>
+          </a:ln>
+        </p:spPr>
+      </p:sp>
+      <p:sp>
+        <p:nvSpPr>
           <p:cNvPr id="17" name="Text 14"/>
           <p:cNvSpPr txBox="1"/>
           <p:nvPr/>
         </p:nvSpPr>
         <p:spPr>
           <a:xfrm>
-            <a:off x="932688" y="2450592"/>
-            <a:ext cx="3310128" cy="521208"/>
+            <a:off x="3017520" y="2057400"/>
+            <a:ext cx="1700784" cy="548640"/>
           </a:xfrm>
           <a:prstGeom prst="rect">
             <a:avLst/>
@@ -3883,38 +4293,21 @@
           </a:bodyPr>
           <a:lstStyle/>
           <a:p>
-            <a:pPr marL="0" indent="0" algn="l">
-              <a:buNone/>
-            </a:pPr>
-            <a:r>
-              <a:rPr lang="en-US" sz="1340" dirty="0">
-                <a:solidFill>
-                  <a:srgbClr val="243247"/>
-                </a:solidFill>
-                <a:latin typeface="Arial" pitchFamily="34" charset="0"/>
-                <a:ea typeface="Arial" pitchFamily="34" charset="-122"/>
-                <a:cs typeface="Arial" pitchFamily="34" charset="-120"/>
-              </a:rPr>
-              <a:t>Danh mục nội dung</a:t>
-            </a:r>
-            <a:endParaRPr lang="en-US" sz="1340" dirty="0"/>
-          </a:p>
-          <a:p>
-            <a:pPr marL="0" indent="0" algn="l">
-              <a:buNone/>
-            </a:pPr>
-            <a:r>
-              <a:rPr lang="en-US" sz="1340" dirty="0">
-                <a:solidFill>
-                  <a:srgbClr val="243247"/>
-                </a:solidFill>
-                <a:latin typeface="Arial" pitchFamily="34" charset="0"/>
-                <a:ea typeface="Arial" pitchFamily="34" charset="-122"/>
-                <a:cs typeface="Arial" pitchFamily="34" charset="-120"/>
-              </a:rPr>
-              <a:t>Đối chiếu nguồn DOCX</a:t>
-            </a:r>
-            <a:endParaRPr lang="en-US" sz="1340" dirty="0"/>
+            <a:pPr marL="0" indent="0" algn="ctr">
+              <a:buNone/>
+            </a:pPr>
+            <a:r>
+              <a:rPr lang="en-US" sz="1650" b="1" dirty="0">
+                <a:solidFill>
+                  <a:srgbClr val="07182F"/>
+                </a:solidFill>
+                <a:latin typeface="Arial" pitchFamily="34" charset="0"/>
+                <a:ea typeface="Arial" pitchFamily="34" charset="-122"/>
+                <a:cs typeface="Arial" pitchFamily="34" charset="-120"/>
+              </a:rPr>
+              <a:t>Thiết kế mô hình</a:t>
+            </a:r>
+            <a:endParaRPr lang="en-US" sz="1650" dirty="0"/>
           </a:p>
         </p:txBody>
       </p:sp>
@@ -3926,12 +4319,288 @@
         </p:nvSpPr>
         <p:spPr>
           <a:xfrm>
-            <a:off x="4937760" y="2395728"/>
-            <a:ext cx="6565392" cy="640080"/>
+            <a:off x="4892040" y="2331720"/>
+            <a:ext cx="201168" cy="0"/>
+          </a:xfrm>
+          <a:prstGeom prst="line">
+            <a:avLst/>
+          </a:prstGeom>
+          <a:noFill/>
+          <a:ln w="12700">
+            <a:solidFill>
+              <a:srgbClr val="C9963A"/>
+            </a:solidFill>
+            <a:prstDash val="solid"/>
+            <a:tailEnd type="triangle"/>
+          </a:ln>
+        </p:spPr>
+      </p:sp>
+      <p:sp>
+        <p:nvSpPr>
+          <p:cNvPr id="19" name="Shape 16"/>
+          <p:cNvSpPr/>
+          <p:nvPr/>
+        </p:nvSpPr>
+        <p:spPr>
+          <a:xfrm>
+            <a:off x="5157216" y="1993392"/>
+            <a:ext cx="1920240" cy="676656"/>
           </a:xfrm>
           <a:prstGeom prst="roundRect">
             <a:avLst>
-              <a:gd name="adj" fmla="val 5714"/>
+              <a:gd name="adj" fmla="val 5405"/>
+            </a:avLst>
+          </a:prstGeom>
+          <a:solidFill>
+            <a:srgbClr val="FFFFFF"/>
+          </a:solidFill>
+          <a:ln w="12700">
+            <a:solidFill>
+              <a:srgbClr val="15355F"/>
+            </a:solidFill>
+            <a:prstDash val="solid"/>
+          </a:ln>
+        </p:spPr>
+      </p:sp>
+      <p:sp>
+        <p:nvSpPr>
+          <p:cNvPr id="20" name="Text 17"/>
+          <p:cNvSpPr txBox="1"/>
+          <p:nvPr/>
+        </p:nvSpPr>
+        <p:spPr>
+          <a:xfrm>
+            <a:off x="5266944" y="2057400"/>
+            <a:ext cx="1700784" cy="548640"/>
+          </a:xfrm>
+          <a:prstGeom prst="rect">
+            <a:avLst/>
+          </a:prstGeom>
+          <a:noFill/>
+          <a:ln/>
+        </p:spPr>
+        <p:txBody>
+          <a:bodyPr wrap="square" lIns="0" tIns="0" rIns="0" bIns="0" rtlCol="0" anchor="ctr">
+            <a:normAutofit/>
+          </a:bodyPr>
+          <a:lstStyle/>
+          <a:p>
+            <a:pPr marL="0" indent="0" algn="ctr">
+              <a:buNone/>
+            </a:pPr>
+            <a:r>
+              <a:rPr lang="en-US" sz="1650" b="1" dirty="0">
+                <a:solidFill>
+                  <a:srgbClr val="07182F"/>
+                </a:solidFill>
+                <a:latin typeface="Arial" pitchFamily="34" charset="0"/>
+                <a:ea typeface="Arial" pitchFamily="34" charset="-122"/>
+                <a:cs typeface="Arial" pitchFamily="34" charset="-120"/>
+              </a:rPr>
+              <a:t>Sản xuất, tích hợp</a:t>
+            </a:r>
+            <a:endParaRPr lang="en-US" sz="1650" dirty="0"/>
+          </a:p>
+        </p:txBody>
+      </p:sp>
+      <p:sp>
+        <p:nvSpPr>
+          <p:cNvPr id="21" name="Shape 18"/>
+          <p:cNvSpPr/>
+          <p:nvPr/>
+        </p:nvSpPr>
+        <p:spPr>
+          <a:xfrm>
+            <a:off x="7141464" y="2331720"/>
+            <a:ext cx="201168" cy="0"/>
+          </a:xfrm>
+          <a:prstGeom prst="line">
+            <a:avLst/>
+          </a:prstGeom>
+          <a:noFill/>
+          <a:ln w="12700">
+            <a:solidFill>
+              <a:srgbClr val="C9963A"/>
+            </a:solidFill>
+            <a:prstDash val="solid"/>
+            <a:tailEnd type="triangle"/>
+          </a:ln>
+        </p:spPr>
+      </p:sp>
+      <p:sp>
+        <p:nvSpPr>
+          <p:cNvPr id="22" name="Shape 19"/>
+          <p:cNvSpPr/>
+          <p:nvPr/>
+        </p:nvSpPr>
+        <p:spPr>
+          <a:xfrm>
+            <a:off x="7406640" y="1993392"/>
+            <a:ext cx="1920240" cy="676656"/>
+          </a:xfrm>
+          <a:prstGeom prst="roundRect">
+            <a:avLst>
+              <a:gd name="adj" fmla="val 5405"/>
+            </a:avLst>
+          </a:prstGeom>
+          <a:solidFill>
+            <a:srgbClr val="FFFFFF"/>
+          </a:solidFill>
+          <a:ln w="12700">
+            <a:solidFill>
+              <a:srgbClr val="15355F"/>
+            </a:solidFill>
+            <a:prstDash val="solid"/>
+          </a:ln>
+        </p:spPr>
+      </p:sp>
+      <p:sp>
+        <p:nvSpPr>
+          <p:cNvPr id="23" name="Text 20"/>
+          <p:cNvSpPr txBox="1"/>
+          <p:nvPr/>
+        </p:nvSpPr>
+        <p:spPr>
+          <a:xfrm>
+            <a:off x="7516368" y="2057400"/>
+            <a:ext cx="1700784" cy="548640"/>
+          </a:xfrm>
+          <a:prstGeom prst="rect">
+            <a:avLst/>
+          </a:prstGeom>
+          <a:noFill/>
+          <a:ln/>
+        </p:spPr>
+        <p:txBody>
+          <a:bodyPr wrap="square" lIns="0" tIns="0" rIns="0" bIns="0" rtlCol="0" anchor="ctr">
+            <a:normAutofit/>
+          </a:bodyPr>
+          <a:lstStyle/>
+          <a:p>
+            <a:pPr marL="0" indent="0" algn="ctr">
+              <a:buNone/>
+            </a:pPr>
+            <a:r>
+              <a:rPr lang="en-US" sz="1650" b="1" dirty="0">
+                <a:solidFill>
+                  <a:srgbClr val="07182F"/>
+                </a:solidFill>
+                <a:latin typeface="Arial" pitchFamily="34" charset="0"/>
+                <a:ea typeface="Arial" pitchFamily="34" charset="-122"/>
+                <a:cs typeface="Arial" pitchFamily="34" charset="-120"/>
+              </a:rPr>
+              <a:t>Kiểm tra, chỉnh sửa</a:t>
+            </a:r>
+            <a:endParaRPr lang="en-US" sz="1650" dirty="0"/>
+          </a:p>
+        </p:txBody>
+      </p:sp>
+      <p:sp>
+        <p:nvSpPr>
+          <p:cNvPr id="24" name="Shape 21"/>
+          <p:cNvSpPr/>
+          <p:nvPr/>
+        </p:nvSpPr>
+        <p:spPr>
+          <a:xfrm>
+            <a:off x="9390888" y="2331720"/>
+            <a:ext cx="201168" cy="0"/>
+          </a:xfrm>
+          <a:prstGeom prst="line">
+            <a:avLst/>
+          </a:prstGeom>
+          <a:noFill/>
+          <a:ln w="12700">
+            <a:solidFill>
+              <a:srgbClr val="C9963A"/>
+            </a:solidFill>
+            <a:prstDash val="solid"/>
+            <a:tailEnd type="triangle"/>
+          </a:ln>
+        </p:spPr>
+      </p:sp>
+      <p:sp>
+        <p:nvSpPr>
+          <p:cNvPr id="25" name="Shape 22"/>
+          <p:cNvSpPr/>
+          <p:nvPr/>
+        </p:nvSpPr>
+        <p:spPr>
+          <a:xfrm>
+            <a:off x="9656064" y="1993392"/>
+            <a:ext cx="1920240" cy="676656"/>
+          </a:xfrm>
+          <a:prstGeom prst="roundRect">
+            <a:avLst>
+              <a:gd name="adj" fmla="val 5405"/>
+            </a:avLst>
+          </a:prstGeom>
+          <a:solidFill>
+            <a:srgbClr val="07182F"/>
+          </a:solidFill>
+          <a:ln w="12700">
+            <a:solidFill>
+              <a:srgbClr val="15355F"/>
+            </a:solidFill>
+            <a:prstDash val="solid"/>
+          </a:ln>
+        </p:spPr>
+      </p:sp>
+      <p:sp>
+        <p:nvSpPr>
+          <p:cNvPr id="26" name="Text 23"/>
+          <p:cNvSpPr txBox="1"/>
+          <p:nvPr/>
+        </p:nvSpPr>
+        <p:spPr>
+          <a:xfrm>
+            <a:off x="9765792" y="2057400"/>
+            <a:ext cx="1700784" cy="548640"/>
+          </a:xfrm>
+          <a:prstGeom prst="rect">
+            <a:avLst/>
+          </a:prstGeom>
+          <a:noFill/>
+          <a:ln/>
+        </p:spPr>
+        <p:txBody>
+          <a:bodyPr wrap="square" lIns="0" tIns="0" rIns="0" bIns="0" rtlCol="0" anchor="ctr">
+            <a:normAutofit/>
+          </a:bodyPr>
+          <a:lstStyle/>
+          <a:p>
+            <a:pPr marL="0" indent="0" algn="ctr">
+              <a:buNone/>
+            </a:pPr>
+            <a:r>
+              <a:rPr lang="en-US" sz="1650" b="1" dirty="0">
+                <a:solidFill>
+                  <a:srgbClr val="FFFFFF"/>
+                </a:solidFill>
+                <a:latin typeface="Arial" pitchFamily="34" charset="0"/>
+                <a:ea typeface="Arial" pitchFamily="34" charset="-122"/>
+                <a:cs typeface="Arial" pitchFamily="34" charset="-120"/>
+              </a:rPr>
+              <a:t>Đóng gói, xin duyệt</a:t>
+            </a:r>
+            <a:endParaRPr lang="en-US" sz="1650" dirty="0"/>
+          </a:p>
+        </p:txBody>
+      </p:sp>
+      <p:sp>
+        <p:nvSpPr>
+          <p:cNvPr id="27" name="Shape 24"/>
+          <p:cNvSpPr/>
+          <p:nvPr/>
+        </p:nvSpPr>
+        <p:spPr>
+          <a:xfrm>
+            <a:off x="658368" y="2852928"/>
+            <a:ext cx="5303520" cy="1335024"/>
+          </a:xfrm>
+          <a:prstGeom prst="roundRect">
+            <a:avLst>
+              <a:gd name="adj" fmla="val 2740"/>
             </a:avLst>
           </a:prstGeom>
           <a:solidFill>
@@ -3947,14 +4616,14 @@
       </p:sp>
       <p:sp>
         <p:nvSpPr>
-          <p:cNvPr id="19" name="Text 16"/>
-          <p:cNvSpPr txBox="1"/>
-          <p:nvPr/>
-        </p:nvSpPr>
-        <p:spPr>
-          <a:xfrm>
-            <a:off x="5138928" y="2560320"/>
-            <a:ext cx="1152144" cy="283464"/>
+          <p:cNvPr id="28" name="Text 25"/>
+          <p:cNvSpPr txBox="1"/>
+          <p:nvPr/>
+        </p:nvSpPr>
+        <p:spPr>
+          <a:xfrm>
+            <a:off x="859536" y="2971800"/>
+            <a:ext cx="4901184" cy="274320"/>
           </a:xfrm>
           <a:prstGeom prst="rect">
             <a:avLst/>
@@ -3972,39 +4641,39 @@
               <a:buNone/>
             </a:pPr>
             <a:r>
-              <a:rPr lang="en-US" sz="1700" b="1" dirty="0">
+              <a:rPr lang="en-US" sz="1800" b="1" dirty="0">
                 <a:solidFill>
                   <a:srgbClr val="07182F"/>
                 </a:solidFill>
-                <a:latin typeface="Arial" pitchFamily="34" charset="0"/>
-                <a:ea typeface="Arial" pitchFamily="34" charset="-122"/>
-                <a:cs typeface="Arial" pitchFamily="34" charset="-120"/>
-              </a:rPr>
-              <a:t>Nội dung</a:t>
-            </a:r>
-            <a:endParaRPr lang="en-US" sz="1700" dirty="0"/>
-          </a:p>
-        </p:txBody>
-      </p:sp>
-      <p:sp>
-        <p:nvSpPr>
-          <p:cNvPr id="20" name="Text 17"/>
-          <p:cNvSpPr txBox="1"/>
-          <p:nvPr/>
-        </p:nvSpPr>
-        <p:spPr>
-          <a:xfrm>
-            <a:off x="6437376" y="2478024"/>
-            <a:ext cx="4828032" cy="466344"/>
-          </a:xfrm>
-          <a:prstGeom prst="rect">
-            <a:avLst/>
-          </a:prstGeom>
-          <a:noFill/>
-          <a:ln/>
-        </p:spPr>
-        <p:txBody>
-          <a:bodyPr wrap="square" lIns="0" tIns="0" rIns="0" bIns="0" rtlCol="0" anchor="ctr">
+                <a:latin typeface="Georgia" pitchFamily="34" charset="0"/>
+                <a:ea typeface="Georgia" pitchFamily="34" charset="-122"/>
+                <a:cs typeface="Georgia" pitchFamily="34" charset="-120"/>
+              </a:rPr>
+              <a:t>Mô phỏng · Phụ lục 20</a:t>
+            </a:r>
+            <a:endParaRPr lang="en-US" sz="1800" dirty="0"/>
+          </a:p>
+        </p:txBody>
+      </p:sp>
+      <p:sp>
+        <p:nvSpPr>
+          <p:cNvPr id="29" name="Text 26"/>
+          <p:cNvSpPr txBox="1"/>
+          <p:nvPr/>
+        </p:nvSpPr>
+        <p:spPr>
+          <a:xfrm>
+            <a:off x="859536" y="3328416"/>
+            <a:ext cx="4901184" cy="740664"/>
+          </a:xfrm>
+          <a:prstGeom prst="rect">
+            <a:avLst/>
+          </a:prstGeom>
+          <a:noFill/>
+          <a:ln/>
+        </p:spPr>
+        <p:txBody>
+          <a:bodyPr wrap="square" lIns="0" tIns="0" rIns="0" bIns="0" rtlCol="0" anchor="t">
             <a:normAutofit/>
           </a:bodyPr>
           <a:lstStyle/>
@@ -4013,143 +4682,34 @@
               <a:buNone/>
             </a:pPr>
             <a:r>
-              <a:rPr lang="en-US" sz="1540" dirty="0">
-                <a:solidFill>
-                  <a:srgbClr val="5B6B80"/>
-                </a:solidFill>
-                <a:latin typeface="Arial" pitchFamily="34" charset="0"/>
-                <a:ea typeface="Arial" pitchFamily="34" charset="-122"/>
-                <a:cs typeface="Arial" pitchFamily="34" charset="-120"/>
-              </a:rPr>
-              <a:t>Mở từng mục và đối chiếu với nguồn chuẩn</a:t>
-            </a:r>
-            <a:endParaRPr lang="en-US" sz="1540" dirty="0"/>
-          </a:p>
-        </p:txBody>
-      </p:sp>
-      <p:sp>
-        <p:nvSpPr>
-          <p:cNvPr id="21" name="Shape 18"/>
+              <a:rPr lang="en-US" sz="1600" dirty="0">
+                <a:solidFill>
+                  <a:srgbClr val="243247"/>
+                </a:solidFill>
+                <a:latin typeface="Arial" pitchFamily="34" charset="0"/>
+                <a:ea typeface="Arial" pitchFamily="34" charset="-122"/>
+                <a:cs typeface="Arial" pitchFamily="34" charset="-120"/>
+              </a:rPr>
+              <a:t>25 vị trí 2D; 10 trong số đó có 3D thử nghiệm. Mô hình → trạng thái → hình → đối chiếu nghiệm.</a:t>
+            </a:r>
+            <a:endParaRPr lang="en-US" sz="1600" dirty="0"/>
+          </a:p>
+        </p:txBody>
+      </p:sp>
+      <p:sp>
+        <p:nvSpPr>
+          <p:cNvPr id="30" name="Shape 27"/>
           <p:cNvSpPr/>
           <p:nvPr/>
         </p:nvSpPr>
         <p:spPr>
           <a:xfrm>
-            <a:off x="4425696" y="3465576"/>
-            <a:ext cx="512064" cy="0"/>
-          </a:xfrm>
-          <a:prstGeom prst="line">
-            <a:avLst/>
-          </a:prstGeom>
-          <a:noFill/>
-          <a:ln w="12700">
-            <a:solidFill>
-              <a:srgbClr val="27AE60"/>
-            </a:solidFill>
-            <a:prstDash val="solid"/>
-            <a:tailEnd type="triangle"/>
-          </a:ln>
-        </p:spPr>
-      </p:sp>
-      <p:sp>
-        <p:nvSpPr>
-          <p:cNvPr id="22" name="Shape 19"/>
-          <p:cNvSpPr/>
-          <p:nvPr/>
-        </p:nvSpPr>
-        <p:spPr>
-          <a:xfrm>
-            <a:off x="713232" y="3145536"/>
-            <a:ext cx="3712464" cy="640080"/>
+            <a:off x="6236208" y="2852928"/>
+            <a:ext cx="5303520" cy="1335024"/>
           </a:xfrm>
           <a:prstGeom prst="roundRect">
             <a:avLst>
-              <a:gd name="adj" fmla="val 5714"/>
-            </a:avLst>
-          </a:prstGeom>
-          <a:solidFill>
-            <a:srgbClr val="FFFFFF"/>
-          </a:solidFill>
-          <a:ln w="12700">
-            <a:solidFill>
-              <a:srgbClr val="D7DEE8"/>
-            </a:solidFill>
-            <a:prstDash val="solid"/>
-          </a:ln>
-        </p:spPr>
-      </p:sp>
-      <p:sp>
-        <p:nvSpPr>
-          <p:cNvPr id="23" name="Text 20"/>
-          <p:cNvSpPr txBox="1"/>
-          <p:nvPr/>
-        </p:nvSpPr>
-        <p:spPr>
-          <a:xfrm>
-            <a:off x="932688" y="3200400"/>
-            <a:ext cx="3310128" cy="521208"/>
-          </a:xfrm>
-          <a:prstGeom prst="rect">
-            <a:avLst/>
-          </a:prstGeom>
-          <a:noFill/>
-          <a:ln/>
-        </p:spPr>
-        <p:txBody>
-          <a:bodyPr wrap="square" lIns="0" tIns="0" rIns="0" bIns="0" rtlCol="0" anchor="ctr">
-            <a:normAutofit/>
-          </a:bodyPr>
-          <a:lstStyle/>
-          <a:p>
-            <a:pPr marL="0" indent="0" algn="l">
-              <a:buNone/>
-            </a:pPr>
-            <a:r>
-              <a:rPr lang="en-US" sz="1340" dirty="0">
-                <a:solidFill>
-                  <a:srgbClr val="243247"/>
-                </a:solidFill>
-                <a:latin typeface="Arial" pitchFamily="34" charset="0"/>
-                <a:ea typeface="Arial" pitchFamily="34" charset="-122"/>
-                <a:cs typeface="Arial" pitchFamily="34" charset="-120"/>
-              </a:rPr>
-              <a:t>Bản đồ công thức</a:t>
-            </a:r>
-            <a:endParaRPr lang="en-US" sz="1340" dirty="0"/>
-          </a:p>
-          <a:p>
-            <a:pPr marL="0" indent="0" algn="l">
-              <a:buNone/>
-            </a:pPr>
-            <a:r>
-              <a:rPr lang="en-US" sz="1340" dirty="0">
-                <a:solidFill>
-                  <a:srgbClr val="243247"/>
-                </a:solidFill>
-                <a:latin typeface="Arial" pitchFamily="34" charset="0"/>
-                <a:ea typeface="Arial" pitchFamily="34" charset="-122"/>
-                <a:cs typeface="Arial" pitchFamily="34" charset="-120"/>
-              </a:rPr>
-              <a:t>Đặc tả mô phỏng</a:t>
-            </a:r>
-            <a:endParaRPr lang="en-US" sz="1340" dirty="0"/>
-          </a:p>
-        </p:txBody>
-      </p:sp>
-      <p:sp>
-        <p:nvSpPr>
-          <p:cNvPr id="24" name="Shape 21"/>
-          <p:cNvSpPr/>
-          <p:nvPr/>
-        </p:nvSpPr>
-        <p:spPr>
-          <a:xfrm>
-            <a:off x="4937760" y="3145536"/>
-            <a:ext cx="6565392" cy="640080"/>
-          </a:xfrm>
-          <a:prstGeom prst="roundRect">
-            <a:avLst>
-              <a:gd name="adj" fmla="val 5714"/>
+              <a:gd name="adj" fmla="val 2740"/>
             </a:avLst>
           </a:prstGeom>
           <a:solidFill>
@@ -4165,14 +4725,14 @@
       </p:sp>
       <p:sp>
         <p:nvSpPr>
-          <p:cNvPr id="25" name="Text 22"/>
-          <p:cNvSpPr txBox="1"/>
-          <p:nvPr/>
-        </p:nvSpPr>
-        <p:spPr>
-          <a:xfrm>
-            <a:off x="5138928" y="3310128"/>
-            <a:ext cx="1152144" cy="283464"/>
+          <p:cNvPr id="31" name="Text 28"/>
+          <p:cNvSpPr txBox="1"/>
+          <p:nvPr/>
+        </p:nvSpPr>
+        <p:spPr>
+          <a:xfrm>
+            <a:off x="6437376" y="2971800"/>
+            <a:ext cx="4901184" cy="274320"/>
           </a:xfrm>
           <a:prstGeom prst="rect">
             <a:avLst/>
@@ -4190,39 +4750,39 @@
               <a:buNone/>
             </a:pPr>
             <a:r>
-              <a:rPr lang="en-US" sz="1700" b="1" dirty="0">
+              <a:rPr lang="en-US" sz="1800" b="1" dirty="0">
                 <a:solidFill>
                   <a:srgbClr val="07182F"/>
                 </a:solidFill>
-                <a:latin typeface="Arial" pitchFamily="34" charset="0"/>
-                <a:ea typeface="Arial" pitchFamily="34" charset="-122"/>
-                <a:cs typeface="Arial" pitchFamily="34" charset="-120"/>
-              </a:rPr>
-              <a:t>Khoa học</a:t>
-            </a:r>
-            <a:endParaRPr lang="en-US" sz="1700" dirty="0"/>
-          </a:p>
-        </p:txBody>
-      </p:sp>
-      <p:sp>
-        <p:nvSpPr>
-          <p:cNvPr id="26" name="Text 23"/>
-          <p:cNvSpPr txBox="1"/>
-          <p:nvPr/>
-        </p:nvSpPr>
-        <p:spPr>
-          <a:xfrm>
-            <a:off x="6437376" y="3227832"/>
-            <a:ext cx="4828032" cy="466344"/>
-          </a:xfrm>
-          <a:prstGeom prst="rect">
-            <a:avLst/>
-          </a:prstGeom>
-          <a:noFill/>
-          <a:ln/>
-        </p:spPr>
-        <p:txBody>
-          <a:bodyPr wrap="square" lIns="0" tIns="0" rIns="0" bIns="0" rtlCol="0" anchor="ctr">
+                <a:latin typeface="Georgia" pitchFamily="34" charset="0"/>
+                <a:ea typeface="Georgia" pitchFamily="34" charset="-122"/>
+                <a:cs typeface="Georgia" pitchFamily="34" charset="-120"/>
+              </a:rPr>
+              <a:t>Đa phương tiện · Phụ lục 21</a:t>
+            </a:r>
+            <a:endParaRPr lang="en-US" sz="1800" dirty="0"/>
+          </a:p>
+        </p:txBody>
+      </p:sp>
+      <p:sp>
+        <p:nvSpPr>
+          <p:cNvPr id="32" name="Text 29"/>
+          <p:cNvSpPr txBox="1"/>
+          <p:nvPr/>
+        </p:nvSpPr>
+        <p:spPr>
+          <a:xfrm>
+            <a:off x="6437376" y="3328416"/>
+            <a:ext cx="4901184" cy="740664"/>
+          </a:xfrm>
+          <a:prstGeom prst="rect">
+            <a:avLst/>
+          </a:prstGeom>
+          <a:noFill/>
+          <a:ln/>
+        </p:spPr>
+        <p:txBody>
+          <a:bodyPr wrap="square" lIns="0" tIns="0" rIns="0" bIns="0" rtlCol="0" anchor="t">
             <a:normAutofit/>
           </a:bodyPr>
           <a:lstStyle/>
@@ -4231,143 +4791,34 @@
               <a:buNone/>
             </a:pPr>
             <a:r>
-              <a:rPr lang="en-US" sz="1540" dirty="0">
-                <a:solidFill>
-                  <a:srgbClr val="5B6B80"/>
-                </a:solidFill>
-                <a:latin typeface="Arial" pitchFamily="34" charset="0"/>
-                <a:ea typeface="Arial" pitchFamily="34" charset="-122"/>
-                <a:cs typeface="Arial" pitchFamily="34" charset="-120"/>
-              </a:rPr>
-              <a:t>Xem công thức, giả thiết và ba ca đối chiếu</a:t>
-            </a:r>
-            <a:endParaRPr lang="en-US" sz="1540" dirty="0"/>
-          </a:p>
-        </p:txBody>
-      </p:sp>
-      <p:sp>
-        <p:nvSpPr>
-          <p:cNvPr id="27" name="Shape 24"/>
+              <a:rPr lang="en-US" sz="1600" dirty="0">
+                <a:solidFill>
+                  <a:srgbClr val="243247"/>
+                </a:solidFill>
+                <a:latin typeface="Arial" pitchFamily="34" charset="0"/>
+                <a:ea typeface="Arial" pitchFamily="34" charset="-122"/>
+                <a:cs typeface="Arial" pitchFamily="34" charset="-120"/>
+              </a:rPr>
+              <a:t>20 GIF có PNG dự phòng. Video/âm thanh là phương án bổ sung sau khi duyệt phạm vi, không phải kết quả đã làm.</a:t>
+            </a:r>
+            <a:endParaRPr lang="en-US" sz="1600" dirty="0"/>
+          </a:p>
+        </p:txBody>
+      </p:sp>
+      <p:sp>
+        <p:nvSpPr>
+          <p:cNvPr id="33" name="Shape 30"/>
           <p:cNvSpPr/>
           <p:nvPr/>
         </p:nvSpPr>
         <p:spPr>
           <a:xfrm>
-            <a:off x="4425696" y="4215384"/>
-            <a:ext cx="512064" cy="0"/>
-          </a:xfrm>
-          <a:prstGeom prst="line">
-            <a:avLst/>
-          </a:prstGeom>
-          <a:noFill/>
-          <a:ln w="12700">
-            <a:solidFill>
-              <a:srgbClr val="8E44AD"/>
-            </a:solidFill>
-            <a:prstDash val="solid"/>
-            <a:tailEnd type="triangle"/>
-          </a:ln>
-        </p:spPr>
-      </p:sp>
-      <p:sp>
-        <p:nvSpPr>
-          <p:cNvPr id="28" name="Shape 25"/>
-          <p:cNvSpPr/>
-          <p:nvPr/>
-        </p:nvSpPr>
-        <p:spPr>
-          <a:xfrm>
-            <a:off x="713232" y="3895344"/>
-            <a:ext cx="3712464" cy="640080"/>
+            <a:off x="658368" y="4352544"/>
+            <a:ext cx="5303520" cy="1335024"/>
           </a:xfrm>
           <a:prstGeom prst="roundRect">
             <a:avLst>
-              <a:gd name="adj" fmla="val 5714"/>
-            </a:avLst>
-          </a:prstGeom>
-          <a:solidFill>
-            <a:srgbClr val="FFFFFF"/>
-          </a:solidFill>
-          <a:ln w="12700">
-            <a:solidFill>
-              <a:srgbClr val="D7DEE8"/>
-            </a:solidFill>
-            <a:prstDash val="solid"/>
-          </a:ln>
-        </p:spPr>
-      </p:sp>
-      <p:sp>
-        <p:nvSpPr>
-          <p:cNvPr id="29" name="Text 26"/>
-          <p:cNvSpPr txBox="1"/>
-          <p:nvPr/>
-        </p:nvSpPr>
-        <p:spPr>
-          <a:xfrm>
-            <a:off x="932688" y="3950208"/>
-            <a:ext cx="3310128" cy="521208"/>
-          </a:xfrm>
-          <a:prstGeom prst="rect">
-            <a:avLst/>
-          </a:prstGeom>
-          <a:noFill/>
-          <a:ln/>
-        </p:spPr>
-        <p:txBody>
-          <a:bodyPr wrap="square" lIns="0" tIns="0" rIns="0" bIns="0" rtlCol="0" anchor="ctr">
-            <a:normAutofit/>
-          </a:bodyPr>
-          <a:lstStyle/>
-          <a:p>
-            <a:pPr marL="0" indent="0" algn="l">
-              <a:buNone/>
-            </a:pPr>
-            <a:r>
-              <a:rPr lang="en-US" sz="1230" dirty="0">
-                <a:solidFill>
-                  <a:srgbClr val="243247"/>
-                </a:solidFill>
-                <a:latin typeface="Arial" pitchFamily="34" charset="0"/>
-                <a:ea typeface="Arial" pitchFamily="34" charset="-122"/>
-                <a:cs typeface="Arial" pitchFamily="34" charset="-120"/>
-              </a:rPr>
-              <a:t>Ngân hàng câu hỏi</a:t>
-            </a:r>
-            <a:endParaRPr lang="en-US" sz="1230" dirty="0"/>
-          </a:p>
-          <a:p>
-            <a:pPr marL="0" indent="0" algn="l">
-              <a:buNone/>
-            </a:pPr>
-            <a:r>
-              <a:rPr lang="en-US" sz="1230" dirty="0">
-                <a:solidFill>
-                  <a:srgbClr val="243247"/>
-                </a:solidFill>
-                <a:latin typeface="Arial" pitchFamily="34" charset="0"/>
-                <a:ea typeface="Arial" pitchFamily="34" charset="-122"/>
-                <a:cs typeface="Arial" pitchFamily="34" charset="-120"/>
-              </a:rPr>
-              <a:t>Phản hồi cho người học</a:t>
-            </a:r>
-            <a:endParaRPr lang="en-US" sz="1230" dirty="0"/>
-          </a:p>
-        </p:txBody>
-      </p:sp>
-      <p:sp>
-        <p:nvSpPr>
-          <p:cNvPr id="30" name="Shape 27"/>
-          <p:cNvSpPr/>
-          <p:nvPr/>
-        </p:nvSpPr>
-        <p:spPr>
-          <a:xfrm>
-            <a:off x="4937760" y="3895344"/>
-            <a:ext cx="6565392" cy="640080"/>
-          </a:xfrm>
-          <a:prstGeom prst="roundRect">
-            <a:avLst>
-              <a:gd name="adj" fmla="val 5714"/>
+              <a:gd name="adj" fmla="val 2740"/>
             </a:avLst>
           </a:prstGeom>
           <a:solidFill>
@@ -4383,14 +4834,14 @@
       </p:sp>
       <p:sp>
         <p:nvSpPr>
-          <p:cNvPr id="31" name="Text 28"/>
-          <p:cNvSpPr txBox="1"/>
-          <p:nvPr/>
-        </p:nvSpPr>
-        <p:spPr>
-          <a:xfrm>
-            <a:off x="5138928" y="4059936"/>
-            <a:ext cx="1152144" cy="283464"/>
+          <p:cNvPr id="34" name="Text 31"/>
+          <p:cNvSpPr txBox="1"/>
+          <p:nvPr/>
+        </p:nvSpPr>
+        <p:spPr>
+          <a:xfrm>
+            <a:off x="859536" y="4471416"/>
+            <a:ext cx="4901184" cy="274320"/>
           </a:xfrm>
           <a:prstGeom prst="rect">
             <a:avLst/>
@@ -4408,39 +4859,39 @@
               <a:buNone/>
             </a:pPr>
             <a:r>
-              <a:rPr lang="en-US" sz="1700" b="1" dirty="0">
+              <a:rPr lang="en-US" sz="1800" b="1" dirty="0">
                 <a:solidFill>
                   <a:srgbClr val="07182F"/>
                 </a:solidFill>
-                <a:latin typeface="Arial" pitchFamily="34" charset="0"/>
-                <a:ea typeface="Arial" pitchFamily="34" charset="-122"/>
-                <a:cs typeface="Arial" pitchFamily="34" charset="-120"/>
-              </a:rPr>
-              <a:t>Sư phạm</a:t>
-            </a:r>
-            <a:endParaRPr lang="en-US" sz="1700" dirty="0"/>
-          </a:p>
-        </p:txBody>
-      </p:sp>
-      <p:sp>
-        <p:nvSpPr>
-          <p:cNvPr id="32" name="Text 29"/>
-          <p:cNvSpPr txBox="1"/>
-          <p:nvPr/>
-        </p:nvSpPr>
-        <p:spPr>
-          <a:xfrm>
-            <a:off x="6437376" y="3977640"/>
-            <a:ext cx="4828032" cy="466344"/>
-          </a:xfrm>
-          <a:prstGeom prst="rect">
-            <a:avLst/>
-          </a:prstGeom>
-          <a:noFill/>
-          <a:ln/>
-        </p:spPr>
-        <p:txBody>
-          <a:bodyPr wrap="square" lIns="0" tIns="0" rIns="0" bIns="0" rtlCol="0" anchor="ctr">
+                <a:latin typeface="Georgia" pitchFamily="34" charset="0"/>
+                <a:ea typeface="Georgia" pitchFamily="34" charset="-122"/>
+                <a:cs typeface="Georgia" pitchFamily="34" charset="-120"/>
+              </a:rPr>
+              <a:t>Đóng gói · Phụ lục 22</a:t>
+            </a:r>
+            <a:endParaRPr lang="en-US" sz="1800" dirty="0"/>
+          </a:p>
+        </p:txBody>
+      </p:sp>
+      <p:sp>
+        <p:nvSpPr>
+          <p:cNvPr id="35" name="Text 32"/>
+          <p:cNvSpPr txBox="1"/>
+          <p:nvPr/>
+        </p:nvSpPr>
+        <p:spPr>
+          <a:xfrm>
+            <a:off x="859536" y="4828032"/>
+            <a:ext cx="4901184" cy="740664"/>
+          </a:xfrm>
+          <a:prstGeom prst="rect">
+            <a:avLst/>
+          </a:prstGeom>
+          <a:noFill/>
+          <a:ln/>
+        </p:spPr>
+        <p:txBody>
+          <a:bodyPr wrap="square" lIns="0" tIns="0" rIns="0" bIns="0" rtlCol="0" anchor="t">
             <a:normAutofit/>
           </a:bodyPr>
           <a:lstStyle/>
@@ -4449,143 +4900,34 @@
               <a:buNone/>
             </a:pPr>
             <a:r>
-              <a:rPr lang="en-US" sz="1540" dirty="0">
-                <a:solidFill>
-                  <a:srgbClr val="5B6B80"/>
-                </a:solidFill>
-                <a:latin typeface="Arial" pitchFamily="34" charset="0"/>
-                <a:ea typeface="Arial" pitchFamily="34" charset="-122"/>
-                <a:cs typeface="Arial" pitchFamily="34" charset="-120"/>
-              </a:rPr>
-              <a:t>Quan sát vòng học và phản hồi tự kiểm tra</a:t>
-            </a:r>
-            <a:endParaRPr lang="en-US" sz="1540" dirty="0"/>
-          </a:p>
-        </p:txBody>
-      </p:sp>
-      <p:sp>
-        <p:nvSpPr>
-          <p:cNvPr id="33" name="Shape 30"/>
+              <a:rPr lang="en-US" sz="1600" dirty="0">
+                <a:solidFill>
+                  <a:srgbClr val="243247"/>
+                </a:solidFill>
+                <a:latin typeface="Arial" pitchFamily="34" charset="0"/>
+                <a:ea typeface="Arial" pitchFamily="34" charset="-122"/>
+                <a:cs typeface="Arial" pitchFamily="34" charset="-120"/>
+              </a:rPr>
+              <a:t>Web tĩnh và tài nguyên cục bộ → ZIP, phiên bản, SHA-256. Kiểm gói không thay kiểm trên LMS hoặc phê duyệt.</a:t>
+            </a:r>
+            <a:endParaRPr lang="en-US" sz="1600" dirty="0"/>
+          </a:p>
+        </p:txBody>
+      </p:sp>
+      <p:sp>
+        <p:nvSpPr>
+          <p:cNvPr id="36" name="Shape 33"/>
           <p:cNvSpPr/>
           <p:nvPr/>
         </p:nvSpPr>
         <p:spPr>
           <a:xfrm>
-            <a:off x="4425696" y="4965192"/>
-            <a:ext cx="512064" cy="0"/>
-          </a:xfrm>
-          <a:prstGeom prst="line">
-            <a:avLst/>
-          </a:prstGeom>
-          <a:noFill/>
-          <a:ln w="12700">
-            <a:solidFill>
-              <a:srgbClr val="C9963A"/>
-            </a:solidFill>
-            <a:prstDash val="solid"/>
-            <a:tailEnd type="triangle"/>
-          </a:ln>
-        </p:spPr>
-      </p:sp>
-      <p:sp>
-        <p:nvSpPr>
-          <p:cNvPr id="34" name="Shape 31"/>
-          <p:cNvSpPr/>
-          <p:nvPr/>
-        </p:nvSpPr>
-        <p:spPr>
-          <a:xfrm>
-            <a:off x="713232" y="4645152"/>
-            <a:ext cx="3712464" cy="640080"/>
+            <a:off x="6236208" y="4352544"/>
+            <a:ext cx="5303520" cy="1335024"/>
           </a:xfrm>
           <a:prstGeom prst="roundRect">
             <a:avLst>
-              <a:gd name="adj" fmla="val 5714"/>
-            </a:avLst>
-          </a:prstGeom>
-          <a:solidFill>
-            <a:srgbClr val="FFFFFF"/>
-          </a:solidFill>
-          <a:ln w="12700">
-            <a:solidFill>
-              <a:srgbClr val="D7DEE8"/>
-            </a:solidFill>
-            <a:prstDash val="solid"/>
-          </a:ln>
-        </p:spPr>
-      </p:sp>
-      <p:sp>
-        <p:nvSpPr>
-          <p:cNvPr id="35" name="Text 32"/>
-          <p:cNvSpPr txBox="1"/>
-          <p:nvPr/>
-        </p:nvSpPr>
-        <p:spPr>
-          <a:xfrm>
-            <a:off x="932688" y="4700016"/>
-            <a:ext cx="3310128" cy="521208"/>
-          </a:xfrm>
-          <a:prstGeom prst="rect">
-            <a:avLst/>
-          </a:prstGeom>
-          <a:noFill/>
-          <a:ln/>
-        </p:spPr>
-        <p:txBody>
-          <a:bodyPr wrap="square" lIns="0" tIns="0" rIns="0" bIns="0" rtlCol="0" anchor="ctr">
-            <a:normAutofit/>
-          </a:bodyPr>
-          <a:lstStyle/>
-          <a:p>
-            <a:pPr marL="0" indent="0" algn="l">
-              <a:buNone/>
-            </a:pPr>
-            <a:r>
-              <a:rPr lang="en-US" sz="1340" dirty="0">
-                <a:solidFill>
-                  <a:srgbClr val="243247"/>
-                </a:solidFill>
-                <a:latin typeface="Arial" pitchFamily="34" charset="0"/>
-                <a:ea typeface="Arial" pitchFamily="34" charset="-122"/>
-                <a:cs typeface="Arial" pitchFamily="34" charset="-120"/>
-              </a:rPr>
-              <a:t>Ảnh, tài liệu kèm theo</a:t>
-            </a:r>
-            <a:endParaRPr lang="en-US" sz="1340" dirty="0"/>
-          </a:p>
-          <a:p>
-            <a:pPr marL="0" indent="0" algn="l">
-              <a:buNone/>
-            </a:pPr>
-            <a:r>
-              <a:rPr lang="en-US" sz="1340" dirty="0">
-                <a:solidFill>
-                  <a:srgbClr val="243247"/>
-                </a:solidFill>
-                <a:latin typeface="Arial" pitchFamily="34" charset="0"/>
-                <a:ea typeface="Arial" pitchFamily="34" charset="-122"/>
-                <a:cs typeface="Arial" pitchFamily="34" charset="-120"/>
-              </a:rPr>
-              <a:t>Hồ sơ ký xác nhận</a:t>
-            </a:r>
-            <a:endParaRPr lang="en-US" sz="1340" dirty="0"/>
-          </a:p>
-        </p:txBody>
-      </p:sp>
-      <p:sp>
-        <p:nvSpPr>
-          <p:cNvPr id="36" name="Shape 33"/>
-          <p:cNvSpPr/>
-          <p:nvPr/>
-        </p:nvSpPr>
-        <p:spPr>
-          <a:xfrm>
-            <a:off x="4937760" y="4645152"/>
-            <a:ext cx="6565392" cy="640080"/>
-          </a:xfrm>
-          <a:prstGeom prst="roundRect">
-            <a:avLst>
-              <a:gd name="adj" fmla="val 5714"/>
+              <a:gd name="adj" fmla="val 2740"/>
             </a:avLst>
           </a:prstGeom>
           <a:solidFill>
@@ -4607,8 +4949,8 @@
         </p:nvSpPr>
         <p:spPr>
           <a:xfrm>
-            <a:off x="5138928" y="4809744"/>
-            <a:ext cx="1152144" cy="283464"/>
+            <a:off x="6437376" y="4471416"/>
+            <a:ext cx="4901184" cy="274320"/>
           </a:xfrm>
           <a:prstGeom prst="rect">
             <a:avLst/>
@@ -4626,17 +4968,17 @@
               <a:buNone/>
             </a:pPr>
             <a:r>
-              <a:rPr lang="en-US" sz="1700" b="1" dirty="0">
+              <a:rPr lang="en-US" sz="1800" b="1" dirty="0">
                 <a:solidFill>
                   <a:srgbClr val="07182F"/>
                 </a:solidFill>
-                <a:latin typeface="Arial" pitchFamily="34" charset="0"/>
-                <a:ea typeface="Arial" pitchFamily="34" charset="-122"/>
-                <a:cs typeface="Arial" pitchFamily="34" charset="-120"/>
-              </a:rPr>
-              <a:t>Truy vết</a:t>
-            </a:r>
-            <a:endParaRPr lang="en-US" sz="1700" dirty="0"/>
+                <a:latin typeface="Georgia" pitchFamily="34" charset="0"/>
+                <a:ea typeface="Georgia" pitchFamily="34" charset="-122"/>
+                <a:cs typeface="Georgia" pitchFamily="34" charset="-120"/>
+              </a:rPr>
+              <a:t>Tra cứu, tự đánh giá · Phụ lục 23</a:t>
+            </a:r>
+            <a:endParaRPr lang="en-US" sz="1800" dirty="0"/>
           </a:p>
         </p:txBody>
       </p:sp>
@@ -4648,17 +4990,17 @@
         </p:nvSpPr>
         <p:spPr>
           <a:xfrm>
-            <a:off x="6437376" y="4727448"/>
-            <a:ext cx="4828032" cy="466344"/>
-          </a:xfrm>
-          <a:prstGeom prst="rect">
-            <a:avLst/>
-          </a:prstGeom>
-          <a:noFill/>
-          <a:ln/>
-        </p:spPr>
-        <p:txBody>
-          <a:bodyPr wrap="square" lIns="0" tIns="0" rIns="0" bIns="0" rtlCol="0" anchor="ctr">
+            <a:off x="6437376" y="4828032"/>
+            <a:ext cx="4901184" cy="740664"/>
+          </a:xfrm>
+          <a:prstGeom prst="rect">
+            <a:avLst/>
+          </a:prstGeom>
+          <a:noFill/>
+          <a:ln/>
+        </p:spPr>
+        <p:txBody>
+          <a:bodyPr wrap="square" lIns="0" tIns="0" rIns="0" bIns="0" rtlCol="0" anchor="t">
             <a:normAutofit/>
           </a:bodyPr>
           <a:lstStyle/>
@@ -4667,83 +5009,42 @@
               <a:buNone/>
             </a:pPr>
             <a:r>
-              <a:rPr lang="en-US" sz="1540" dirty="0">
-                <a:solidFill>
-                  <a:srgbClr val="5B6B80"/>
-                </a:solidFill>
-                <a:latin typeface="Arial" pitchFamily="34" charset="0"/>
-                <a:ea typeface="Arial" pitchFamily="34" charset="-122"/>
-                <a:cs typeface="Arial" pitchFamily="34" charset="-120"/>
-              </a:rPr>
-              <a:t>Đối chiếu dữ liệu nguồn, ảnh và tài liệu kèm theo</a:t>
-            </a:r>
-            <a:endParaRPr lang="en-US" sz="1540" dirty="0"/>
-          </a:p>
-        </p:txBody>
-      </p:sp>
-      <p:sp>
-        <p:nvSpPr>
-          <p:cNvPr id="39" name="Text 36"/>
-          <p:cNvSpPr txBox="1"/>
-          <p:nvPr/>
-        </p:nvSpPr>
-        <p:spPr>
-          <a:xfrm>
-            <a:off x="768096" y="5468112"/>
-            <a:ext cx="10753344" cy="246888"/>
-          </a:xfrm>
-          <a:prstGeom prst="rect">
-            <a:avLst/>
-          </a:prstGeom>
-          <a:noFill/>
-          <a:ln/>
-        </p:spPr>
-        <p:txBody>
-          <a:bodyPr wrap="square" lIns="0" tIns="0" rIns="0" bIns="0" rtlCol="0" anchor="t">
-            <a:normAutofit/>
-          </a:bodyPr>
-          <a:lstStyle/>
-          <a:p>
-            <a:pPr marL="0" indent="0" algn="l">
-              <a:buNone/>
-            </a:pPr>
-            <a:r>
-              <a:rPr lang="en-US" sz="1340" b="1" dirty="0">
-                <a:solidFill>
-                  <a:srgbClr val="9A5B00"/>
-                </a:solidFill>
-                <a:latin typeface="Arial" pitchFamily="34" charset="0"/>
-                <a:ea typeface="Arial" pitchFamily="34" charset="-122"/>
-                <a:cs typeface="Arial" pitchFamily="34" charset="-120"/>
-              </a:rPr>
-              <a:t>Mũi tên = truy vết nguồn → căn cứ; không biểu thị thẩm định, ký duyệt hay đo hiệu quả.</a:t>
-            </a:r>
-            <a:endParaRPr lang="en-US" sz="1340" dirty="0"/>
-          </a:p>
-        </p:txBody>
-      </p:sp>
-      <p:sp>
-        <p:nvSpPr>
-          <p:cNvPr id="40" name="Shape 37"/>
+              <a:rPr lang="en-US" sz="1600" dirty="0">
+                <a:solidFill>
+                  <a:srgbClr val="243247"/>
+                </a:solidFill>
+                <a:latin typeface="Arial" pitchFamily="34" charset="0"/>
+                <a:ea typeface="Arial" pitchFamily="34" charset="-122"/>
+                <a:cs typeface="Arial" pitchFamily="34" charset="-120"/>
+              </a:rPr>
+              <a:t>Chỉ mục tiếng Việt và 300 câu phản hồi cục bộ hỗ trợ tự học; không phải sổ điểm hay bằng chứng đạt đầu ra.</a:t>
+            </a:r>
+            <a:endParaRPr lang="en-US" sz="1600" dirty="0"/>
+          </a:p>
+        </p:txBody>
+      </p:sp>
+      <p:sp>
+        <p:nvSpPr>
+          <p:cNvPr id="39" name="Shape 36"/>
           <p:cNvSpPr/>
           <p:nvPr/>
         </p:nvSpPr>
         <p:spPr>
           <a:xfrm>
-            <a:off x="713232" y="5806440"/>
-            <a:ext cx="10789920" cy="402336"/>
+            <a:off x="658368" y="5852160"/>
+            <a:ext cx="10881360" cy="365760"/>
           </a:xfrm>
           <a:prstGeom prst="roundRect">
             <a:avLst>
-              <a:gd name="adj" fmla="val 9091"/>
+              <a:gd name="adj" fmla="val 10000"/>
             </a:avLst>
           </a:prstGeom>
           <a:solidFill>
-            <a:srgbClr val="EEF2F7"/>
+            <a:srgbClr val="FFF4E8"/>
           </a:solidFill>
           <a:ln w="12700">
             <a:solidFill>
-              <a:srgbClr val="D7DEE8"/>
+              <a:srgbClr val="9A5B00"/>
             </a:solidFill>
             <a:prstDash val="solid"/>
           </a:ln>
@@ -4751,14 +5052,14 @@
       </p:sp>
       <p:sp>
         <p:nvSpPr>
-          <p:cNvPr id="41" name="Text 38"/>
-          <p:cNvSpPr txBox="1"/>
-          <p:nvPr/>
-        </p:nvSpPr>
-        <p:spPr>
-          <a:xfrm>
-            <a:off x="896112" y="5879592"/>
-            <a:ext cx="676656" cy="228600"/>
+          <p:cNvPr id="40" name="Text 37"/>
+          <p:cNvSpPr txBox="1"/>
+          <p:nvPr/>
+        </p:nvSpPr>
+        <p:spPr>
+          <a:xfrm>
+            <a:off x="859536" y="5925312"/>
+            <a:ext cx="10479024" cy="219456"/>
           </a:xfrm>
           <a:prstGeom prst="rect">
             <a:avLst/>
@@ -4772,308 +5073,21 @@
           </a:bodyPr>
           <a:lstStyle/>
           <a:p>
-            <a:pPr marL="0" indent="0" algn="l">
-              <a:buNone/>
-            </a:pPr>
-            <a:r>
-              <a:rPr lang="en-US" sz="1700" b="1" dirty="0">
-                <a:solidFill>
-                  <a:srgbClr val="2980B9"/>
-                </a:solidFill>
-                <a:latin typeface="Arial" pitchFamily="34" charset="0"/>
-                <a:ea typeface="Arial" pitchFamily="34" charset="-122"/>
-                <a:cs typeface="Arial" pitchFamily="34" charset="-120"/>
-              </a:rPr>
-              <a:t>108</a:t>
-            </a:r>
-            <a:endParaRPr lang="en-US" sz="1700" dirty="0"/>
-          </a:p>
-        </p:txBody>
-      </p:sp>
-      <p:sp>
-        <p:nvSpPr>
-          <p:cNvPr id="42" name="Text 39"/>
-          <p:cNvSpPr txBox="1"/>
-          <p:nvPr/>
-        </p:nvSpPr>
-        <p:spPr>
-          <a:xfrm>
-            <a:off x="1618488" y="5907024"/>
-            <a:ext cx="1810512" cy="182880"/>
-          </a:xfrm>
-          <a:prstGeom prst="rect">
-            <a:avLst/>
-          </a:prstGeom>
-          <a:noFill/>
-          <a:ln/>
-        </p:spPr>
-        <p:txBody>
-          <a:bodyPr wrap="square" lIns="0" tIns="0" rIns="0" bIns="0" rtlCol="0" anchor="ctr">
-            <a:normAutofit/>
-          </a:bodyPr>
-          <a:lstStyle/>
-          <a:p>
-            <a:pPr marL="0" indent="0" algn="l">
-              <a:buNone/>
-            </a:pPr>
-            <a:r>
-              <a:rPr lang="en-US" sz="1150" dirty="0">
-                <a:solidFill>
-                  <a:srgbClr val="243247"/>
-                </a:solidFill>
-                <a:latin typeface="Arial" pitchFamily="34" charset="0"/>
-                <a:ea typeface="Arial" pitchFamily="34" charset="-122"/>
-                <a:cs typeface="Arial" pitchFamily="34" charset="-120"/>
-              </a:rPr>
-              <a:t>mục/trang hiển thị</a:t>
-            </a:r>
-            <a:endParaRPr lang="en-US" sz="1150" dirty="0"/>
-          </a:p>
-        </p:txBody>
-      </p:sp>
-      <p:sp>
-        <p:nvSpPr>
-          <p:cNvPr id="43" name="Text 40"/>
-          <p:cNvSpPr txBox="1"/>
-          <p:nvPr/>
-        </p:nvSpPr>
-        <p:spPr>
-          <a:xfrm>
-            <a:off x="3547872" y="5879592"/>
-            <a:ext cx="676656" cy="228600"/>
-          </a:xfrm>
-          <a:prstGeom prst="rect">
-            <a:avLst/>
-          </a:prstGeom>
-          <a:noFill/>
-          <a:ln/>
-        </p:spPr>
-        <p:txBody>
-          <a:bodyPr wrap="square" lIns="0" tIns="0" rIns="0" bIns="0" rtlCol="0" anchor="t">
-            <a:normAutofit/>
-          </a:bodyPr>
-          <a:lstStyle/>
-          <a:p>
-            <a:pPr marL="0" indent="0" algn="l">
-              <a:buNone/>
-            </a:pPr>
-            <a:r>
-              <a:rPr lang="en-US" sz="1700" b="1" dirty="0">
-                <a:solidFill>
-                  <a:srgbClr val="27AE60"/>
-                </a:solidFill>
-                <a:latin typeface="Arial" pitchFamily="34" charset="0"/>
-                <a:ea typeface="Arial" pitchFamily="34" charset="-122"/>
-                <a:cs typeface="Arial" pitchFamily="34" charset="-120"/>
-              </a:rPr>
-              <a:t>127</a:t>
-            </a:r>
-            <a:endParaRPr lang="en-US" sz="1700" dirty="0"/>
-          </a:p>
-        </p:txBody>
-      </p:sp>
-      <p:sp>
-        <p:nvSpPr>
-          <p:cNvPr id="44" name="Text 41"/>
-          <p:cNvSpPr txBox="1"/>
-          <p:nvPr/>
-        </p:nvSpPr>
-        <p:spPr>
-          <a:xfrm>
-            <a:off x="4270248" y="5907024"/>
-            <a:ext cx="1810512" cy="182880"/>
-          </a:xfrm>
-          <a:prstGeom prst="rect">
-            <a:avLst/>
-          </a:prstGeom>
-          <a:noFill/>
-          <a:ln/>
-        </p:spPr>
-        <p:txBody>
-          <a:bodyPr wrap="square" lIns="0" tIns="0" rIns="0" bIns="0" rtlCol="0" anchor="ctr">
-            <a:normAutofit/>
-          </a:bodyPr>
-          <a:lstStyle/>
-          <a:p>
-            <a:pPr marL="0" indent="0" algn="l">
-              <a:buNone/>
-            </a:pPr>
-            <a:r>
-              <a:rPr lang="en-US" sz="1150" dirty="0">
-                <a:solidFill>
-                  <a:srgbClr val="243247"/>
-                </a:solidFill>
-                <a:latin typeface="Arial" pitchFamily="34" charset="0"/>
-                <a:ea typeface="Arial" pitchFamily="34" charset="-122"/>
-                <a:cs typeface="Arial" pitchFamily="34" charset="-120"/>
-              </a:rPr>
-              <a:t>tham chiếu hình duy nhất</a:t>
-            </a:r>
-            <a:endParaRPr lang="en-US" sz="1150" dirty="0"/>
-          </a:p>
-        </p:txBody>
-      </p:sp>
-      <p:sp>
-        <p:nvSpPr>
-          <p:cNvPr id="45" name="Text 42"/>
-          <p:cNvSpPr txBox="1"/>
-          <p:nvPr/>
-        </p:nvSpPr>
-        <p:spPr>
-          <a:xfrm>
-            <a:off x="6199632" y="5879592"/>
-            <a:ext cx="676656" cy="228600"/>
-          </a:xfrm>
-          <a:prstGeom prst="rect">
-            <a:avLst/>
-          </a:prstGeom>
-          <a:noFill/>
-          <a:ln/>
-        </p:spPr>
-        <p:txBody>
-          <a:bodyPr wrap="square" lIns="0" tIns="0" rIns="0" bIns="0" rtlCol="0" anchor="t">
-            <a:normAutofit/>
-          </a:bodyPr>
-          <a:lstStyle/>
-          <a:p>
-            <a:pPr marL="0" indent="0" algn="l">
-              <a:buNone/>
-            </a:pPr>
-            <a:r>
-              <a:rPr lang="en-US" sz="1700" b="1" dirty="0">
-                <a:solidFill>
-                  <a:srgbClr val="8E44AD"/>
-                </a:solidFill>
-                <a:latin typeface="Arial" pitchFamily="34" charset="0"/>
-                <a:ea typeface="Arial" pitchFamily="34" charset="-122"/>
-                <a:cs typeface="Arial" pitchFamily="34" charset="-120"/>
-              </a:rPr>
-              <a:t>1.302</a:t>
-            </a:r>
-            <a:endParaRPr lang="en-US" sz="1700" dirty="0"/>
-          </a:p>
-        </p:txBody>
-      </p:sp>
-      <p:sp>
-        <p:nvSpPr>
-          <p:cNvPr id="46" name="Text 43"/>
-          <p:cNvSpPr txBox="1"/>
-          <p:nvPr/>
-        </p:nvSpPr>
-        <p:spPr>
-          <a:xfrm>
-            <a:off x="6922008" y="5907024"/>
-            <a:ext cx="1810512" cy="182880"/>
-          </a:xfrm>
-          <a:prstGeom prst="rect">
-            <a:avLst/>
-          </a:prstGeom>
-          <a:noFill/>
-          <a:ln/>
-        </p:spPr>
-        <p:txBody>
-          <a:bodyPr wrap="square" lIns="0" tIns="0" rIns="0" bIns="0" rtlCol="0" anchor="ctr">
-            <a:normAutofit/>
-          </a:bodyPr>
-          <a:lstStyle/>
-          <a:p>
-            <a:pPr marL="0" indent="0" algn="l">
-              <a:buNone/>
-            </a:pPr>
-            <a:r>
-              <a:rPr lang="en-US" sz="1150" dirty="0">
-                <a:solidFill>
-                  <a:srgbClr val="243247"/>
-                </a:solidFill>
-                <a:latin typeface="Arial" pitchFamily="34" charset="0"/>
-                <a:ea typeface="Arial" pitchFamily="34" charset="-122"/>
-                <a:cs typeface="Arial" pitchFamily="34" charset="-120"/>
-              </a:rPr>
-              <a:t>tham chiếu công thức</a:t>
-            </a:r>
-            <a:endParaRPr lang="en-US" sz="1150" dirty="0"/>
-          </a:p>
-        </p:txBody>
-      </p:sp>
-      <p:sp>
-        <p:nvSpPr>
-          <p:cNvPr id="47" name="Text 44"/>
-          <p:cNvSpPr txBox="1"/>
-          <p:nvPr/>
-        </p:nvSpPr>
-        <p:spPr>
-          <a:xfrm>
-            <a:off x="8851392" y="5879592"/>
-            <a:ext cx="676656" cy="228600"/>
-          </a:xfrm>
-          <a:prstGeom prst="rect">
-            <a:avLst/>
-          </a:prstGeom>
-          <a:noFill/>
-          <a:ln/>
-        </p:spPr>
-        <p:txBody>
-          <a:bodyPr wrap="square" lIns="0" tIns="0" rIns="0" bIns="0" rtlCol="0" anchor="t">
-            <a:normAutofit/>
-          </a:bodyPr>
-          <a:lstStyle/>
-          <a:p>
-            <a:pPr marL="0" indent="0" algn="l">
-              <a:buNone/>
-            </a:pPr>
-            <a:r>
-              <a:rPr lang="en-US" sz="1700" b="1" dirty="0">
-                <a:solidFill>
-                  <a:srgbClr val="C9963A"/>
-                </a:solidFill>
-                <a:latin typeface="Arial" pitchFamily="34" charset="0"/>
-                <a:ea typeface="Arial" pitchFamily="34" charset="-122"/>
-                <a:cs typeface="Arial" pitchFamily="34" charset="-120"/>
-              </a:rPr>
-              <a:t>300</a:t>
-            </a:r>
-            <a:endParaRPr lang="en-US" sz="1700" dirty="0"/>
-          </a:p>
-        </p:txBody>
-      </p:sp>
-      <p:sp>
-        <p:nvSpPr>
-          <p:cNvPr id="48" name="Text 45"/>
-          <p:cNvSpPr txBox="1"/>
-          <p:nvPr/>
-        </p:nvSpPr>
-        <p:spPr>
-          <a:xfrm>
-            <a:off x="9573768" y="5907024"/>
-            <a:ext cx="1810512" cy="182880"/>
-          </a:xfrm>
-          <a:prstGeom prst="rect">
-            <a:avLst/>
-          </a:prstGeom>
-          <a:noFill/>
-          <a:ln/>
-        </p:spPr>
-        <p:txBody>
-          <a:bodyPr wrap="square" lIns="0" tIns="0" rIns="0" bIns="0" rtlCol="0" anchor="ctr">
-            <a:normAutofit/>
-          </a:bodyPr>
-          <a:lstStyle/>
-          <a:p>
-            <a:pPr marL="0" indent="0" algn="l">
-              <a:buNone/>
-            </a:pPr>
-            <a:r>
-              <a:rPr lang="en-US" sz="1150" dirty="0">
-                <a:solidFill>
-                  <a:srgbClr val="243247"/>
-                </a:solidFill>
-                <a:latin typeface="Arial" pitchFamily="34" charset="0"/>
-                <a:ea typeface="Arial" pitchFamily="34" charset="-122"/>
-                <a:cs typeface="Arial" pitchFamily="34" charset="-120"/>
-              </a:rPr>
-              <a:t>câu tự kiểm tra</a:t>
-            </a:r>
-            <a:endParaRPr lang="en-US" sz="1150" dirty="0"/>
+            <a:pPr marL="0" indent="0" algn="ctr">
+              <a:buNone/>
+            </a:pPr>
+            <a:r>
+              <a:rPr lang="en-US" sz="1400" b="1" dirty="0">
+                <a:solidFill>
+                  <a:srgbClr val="9A5B00"/>
+                </a:solidFill>
+                <a:latin typeface="Arial" pitchFamily="34" charset="0"/>
+                <a:ea typeface="Arial" pitchFamily="34" charset="-122"/>
+                <a:cs typeface="Arial" pitchFamily="34" charset="-120"/>
+              </a:rPr>
+              <a:t>Luồng tổ chức đề xuất; thử người học và phê duyệt độc lập chưa được xác nhận hoàn tất.</a:t>
+            </a:r>
+            <a:endParaRPr lang="en-US" sz="1400" dirty="0"/>
           </a:p>
         </p:txBody>
       </p:sp>
@@ -13079,7 +13093,7 @@
                 <a:ea typeface="Arial" pitchFamily="34" charset="-122"/>
                 <a:cs typeface="Arial" pitchFamily="34" charset="-120"/>
               </a:rPr>
-              <a:t>Tổng hợp 24 cổng: 11 đạt · 9 không đạt · 4 chưa thể thực hiện. Snapshot nền 2026-09-21; bằng chứng mô phỏng cập nhật 2026-09-25.</a:t>
+              <a:t>Snapshot lịch sử: 24 cổng, 11 đạt · 9 không đạt · 4 chưa thể thực hiện. Nền 2026-09-21; cập nhật 2026-09-25; không phải QA mới.</a:t>
             </a:r>
             <a:endParaRPr lang="en-US" sz="1700" dirty="0"/>
           </a:p>
@@ -14464,7 +14478,7 @@
               <a:buNone/>
             </a:pPr>
             <a:r>
-              <a:rPr lang="en-US" sz="2800" b="1" dirty="0">
+              <a:rPr lang="en-US" sz="3400" b="1" dirty="0">
                 <a:solidFill>
                   <a:srgbClr val="07182F"/>
                 </a:solidFill>
@@ -14472,7 +14486,7 @@
                 <a:ea typeface="Georgia" pitchFamily="34" charset="-122"/>
                 <a:cs typeface="Georgia" pitchFamily="34" charset="-120"/>
               </a:rPr>
-              <a:t>Phụ lục · Chín lần dừng kiểm tra và bốn nội dung bị chặn</a:t>
+              <a:t>Phụ lục · Kiểm tra dừng và hồ sơ còn bị chặn</a:t>
             </a:r>
             <a:endParaRPr lang="en-US" sz="3600" dirty="0"/>
           </a:p>
@@ -14579,7 +14593,7 @@
                 <a:ea typeface="Arial" pitchFamily="34" charset="-122"/>
                 <a:cs typeface="Arial" pitchFamily="34" charset="-120"/>
               </a:rPr>
-              <a:t>Chín trạng thái không đạt đều ghi nhận thiếu Chromium trong môi trường chụp bằng chứng; bốn nội dung độc lập cần đúng người thực hiện và đúng bằng chứng.</a:t>
+              <a:t>Snapshot lịch sử ghi 9 trạng thái không đạt do thiếu Chromium; 4 nội dung độc lập cần đúng người và đúng bằng chứng.</a:t>
             </a:r>
             <a:endParaRPr lang="en-US" sz="1700" dirty="0"/>
           </a:p>
@@ -18098,7 +18112,7 @@
                 <a:ea typeface="Georgia" pitchFamily="34" charset="-122"/>
                 <a:cs typeface="Georgia" pitchFamily="34" charset="-120"/>
               </a:rPr>
-              <a:t>Nhu cầu dạy–học mà sản phẩm hướng tới</a:t>
+              <a:t>Từ kiến thức trừu tượng đến thao tác tự học</a:t>
             </a:r>
             <a:endParaRPr lang="en-US" sz="3600" dirty="0"/>
           </a:p>
@@ -18205,7 +18219,7 @@
                 <a:ea typeface="Arial" pitchFamily="34" charset="-122"/>
                 <a:cs typeface="Arial" pitchFamily="34" charset="-120"/>
               </a:rPr>
-              <a:t>Sản phẩm được thiết kế để nối nội dung, hình, công thức, mô phỏng và tự kiểm tra trong một luồng học.</a:t>
+              <a:t>Nội dung → quan sát → thao tác → phản hồi: thiết kế giúp người học đối chiếu quan hệ cơ học trong cùng ngữ cảnh.</a:t>
             </a:r>
             <a:endParaRPr lang="en-US" sz="1700" dirty="0"/>
           </a:p>
@@ -19408,6 +19422,5346 @@
               <a:t>Kết nối nội dung, mô phỏng, câu hỏi và tài liệu đối chiếu</a:t>
             </a:r>
             <a:endParaRPr lang="en-US" sz="1450" dirty="0"/>
+          </a:p>
+        </p:txBody>
+      </p:sp>
+    </p:spTree>
+  </p:cSld>
+  <p:clrMapOvr>
+    <a:masterClrMapping/>
+  </p:clrMapOvr>
+</p:sld>
+</file>
+
+<file path=ppt/slides/slide20.xml><?xml version="1.0" encoding="utf-8"?>
+<p:sld xmlns:a="http://schemas.openxmlformats.org/drawingml/2006/main" xmlns:r="http://schemas.openxmlformats.org/officeDocument/2006/relationships" xmlns:p="http://schemas.openxmlformats.org/presentationml/2006/main">
+  <p:cSld name="Slide 20">
+    <p:bg>
+      <p:bgPr>
+        <a:solidFill>
+          <a:srgbClr val="F7F5EF"/>
+        </a:solidFill>
+        <a:effectLst/>
+      </p:bgPr>
+    </p:bg>
+    <p:spTree>
+      <p:nvGrpSpPr>
+        <p:cNvPr id="1" name=""/>
+        <p:cNvGrpSpPr/>
+        <p:nvPr/>
+      </p:nvGrpSpPr>
+      <p:grpSpPr>
+        <a:xfrm>
+          <a:off x="0" y="0"/>
+          <a:ext cx="0" cy="0"/>
+          <a:chOff x="0" y="0"/>
+          <a:chExt cx="0" cy="0"/>
+        </a:xfrm>
+      </p:grpSpPr>
+      <p:sp>
+        <p:nvSpPr>
+          <p:cNvPr id="2" name="Shape 0"/>
+          <p:cNvSpPr/>
+          <p:nvPr/>
+        </p:nvSpPr>
+        <p:spPr>
+          <a:xfrm>
+            <a:off x="612648" y="393192"/>
+            <a:ext cx="475488" cy="0"/>
+          </a:xfrm>
+          <a:prstGeom prst="line">
+            <a:avLst/>
+          </a:prstGeom>
+          <a:noFill/>
+          <a:ln w="12700">
+            <a:solidFill>
+              <a:srgbClr val="C9963A"/>
+            </a:solidFill>
+            <a:prstDash val="solid"/>
+          </a:ln>
+        </p:spPr>
+      </p:sp>
+      <p:sp>
+        <p:nvSpPr>
+          <p:cNvPr id="3" name="Text 1"/>
+          <p:cNvSpPr txBox="1"/>
+          <p:nvPr/>
+        </p:nvSpPr>
+        <p:spPr>
+          <a:xfrm>
+            <a:off x="1207008" y="256032"/>
+            <a:ext cx="4114800" cy="228600"/>
+          </a:xfrm>
+          <a:prstGeom prst="rect">
+            <a:avLst/>
+          </a:prstGeom>
+          <a:noFill/>
+          <a:ln/>
+        </p:spPr>
+        <p:txBody>
+          <a:bodyPr wrap="square" lIns="0" tIns="0" rIns="0" bIns="0" rtlCol="0" anchor="ctr">
+            <a:normAutofit/>
+          </a:bodyPr>
+          <a:lstStyle/>
+          <a:p>
+            <a:pPr marL="0" indent="0" algn="l">
+              <a:buNone/>
+            </a:pPr>
+            <a:r>
+              <a:rPr lang="en-US" sz="950" b="1" dirty="0">
+                <a:solidFill>
+                  <a:srgbClr val="5B6B80"/>
+                </a:solidFill>
+                <a:latin typeface="Arial" pitchFamily="34" charset="0"/>
+                <a:ea typeface="Arial" pitchFamily="34" charset="-122"/>
+                <a:cs typeface="Arial" pitchFamily="34" charset="-120"/>
+              </a:rPr>
+              <a:t>PHỤ LỤC / DỰ PHÒNG</a:t>
+            </a:r>
+            <a:endParaRPr lang="en-US" sz="950" dirty="0"/>
+          </a:p>
+        </p:txBody>
+      </p:sp>
+      <p:sp>
+        <p:nvSpPr>
+          <p:cNvPr id="4" name="Text 0"/>
+          <p:cNvSpPr>
+            <a:spLocks noGrp="1"/>
+          </p:cNvSpPr>
+          <p:nvPr>
+            <p:ph type="title" idx="100" hasCustomPrompt="1"/>
+          </p:nvPr>
+        </p:nvSpPr>
+        <p:spPr>
+          <a:xfrm>
+            <a:off x="612648" y="621792"/>
+            <a:ext cx="10972800" cy="713232"/>
+          </a:xfrm>
+          <a:prstGeom prst="rect">
+            <a:avLst/>
+          </a:prstGeom>
+          <a:noFill/>
+          <a:ln/>
+        </p:spPr>
+        <p:txBody>
+          <a:bodyPr wrap="square" lIns="0" tIns="0" rIns="0" bIns="0" rtlCol="0" anchor="ctr">
+            <a:normAutofit/>
+          </a:bodyPr>
+          <a:lstStyle/>
+          <a:p>
+            <a:pPr marL="0" indent="0" algn="l">
+              <a:buNone/>
+            </a:pPr>
+            <a:r>
+              <a:rPr lang="en-US" sz="3400" b="1" dirty="0">
+                <a:solidFill>
+                  <a:srgbClr val="07182F"/>
+                </a:solidFill>
+                <a:latin typeface="Georgia" pitchFamily="34" charset="0"/>
+                <a:ea typeface="Georgia" pitchFamily="34" charset="-122"/>
+                <a:cs typeface="Georgia" pitchFamily="34" charset="-120"/>
+              </a:rPr>
+              <a:t>Phụ lục · Mô phỏng từ mô hình đến kiểm chứng</a:t>
+            </a:r>
+            <a:endParaRPr lang="en-US" sz="3600" dirty="0"/>
+          </a:p>
+        </p:txBody>
+      </p:sp>
+      <p:sp>
+        <p:nvSpPr>
+          <p:cNvPr id="5" name="Text 3"/>
+          <p:cNvSpPr txBox="1"/>
+          <p:nvPr/>
+        </p:nvSpPr>
+        <p:spPr>
+          <a:xfrm>
+            <a:off x="11109960" y="256032"/>
+            <a:ext cx="457200" cy="228600"/>
+          </a:xfrm>
+          <a:prstGeom prst="rect">
+            <a:avLst/>
+          </a:prstGeom>
+          <a:noFill/>
+          <a:ln/>
+        </p:spPr>
+        <p:txBody>
+          <a:bodyPr wrap="square" lIns="0" tIns="0" rIns="0" bIns="0" rtlCol="0" anchor="t">
+            <a:normAutofit/>
+          </a:bodyPr>
+          <a:lstStyle/>
+          <a:p>
+            <a:pPr marL="0" indent="0" algn="r">
+              <a:buNone/>
+            </a:pPr>
+            <a:r>
+              <a:rPr lang="en-US" sz="1000" b="1" dirty="0">
+                <a:solidFill>
+                  <a:srgbClr val="C9963A"/>
+                </a:solidFill>
+                <a:latin typeface="Arial" pitchFamily="34" charset="0"/>
+                <a:ea typeface="Arial" pitchFamily="34" charset="-122"/>
+                <a:cs typeface="Arial" pitchFamily="34" charset="-120"/>
+              </a:rPr>
+              <a:t>20</a:t>
+            </a:r>
+            <a:endParaRPr lang="en-US" sz="1000" dirty="0"/>
+          </a:p>
+        </p:txBody>
+      </p:sp>
+      <p:sp>
+        <p:nvSpPr>
+          <p:cNvPr id="6" name="Shape 4"/>
+          <p:cNvSpPr/>
+          <p:nvPr/>
+        </p:nvSpPr>
+        <p:spPr>
+          <a:xfrm>
+            <a:off x="612648" y="1408176"/>
+            <a:ext cx="10972800" cy="475488"/>
+          </a:xfrm>
+          <a:prstGeom prst="rect">
+            <a:avLst/>
+          </a:prstGeom>
+          <a:solidFill>
+            <a:srgbClr val="EEF2F7"/>
+          </a:solidFill>
+          <a:ln w="12700">
+            <a:solidFill>
+              <a:srgbClr val="D7DEE8"/>
+            </a:solidFill>
+            <a:prstDash val="solid"/>
+          </a:ln>
+        </p:spPr>
+      </p:sp>
+      <p:sp>
+        <p:nvSpPr>
+          <p:cNvPr id="7" name="Text 5"/>
+          <p:cNvSpPr txBox="1"/>
+          <p:nvPr/>
+        </p:nvSpPr>
+        <p:spPr>
+          <a:xfrm>
+            <a:off x="777240" y="1453896"/>
+            <a:ext cx="10652760" cy="384048"/>
+          </a:xfrm>
+          <a:prstGeom prst="rect">
+            <a:avLst/>
+          </a:prstGeom>
+          <a:noFill/>
+          <a:ln/>
+        </p:spPr>
+        <p:txBody>
+          <a:bodyPr wrap="square" lIns="0" tIns="0" rIns="0" bIns="0" rtlCol="0" anchor="ctr">
+            <a:normAutofit/>
+          </a:bodyPr>
+          <a:lstStyle/>
+          <a:p>
+            <a:pPr marL="0" indent="0" algn="l">
+              <a:buNone/>
+            </a:pPr>
+            <a:r>
+              <a:rPr lang="en-US" sz="1700" b="1" dirty="0">
+                <a:solidFill>
+                  <a:srgbClr val="0D2447"/>
+                </a:solidFill>
+                <a:latin typeface="Arial" pitchFamily="34" charset="0"/>
+                <a:ea typeface="Arial" pitchFamily="34" charset="-122"/>
+                <a:cs typeface="Arial" pitchFamily="34" charset="-120"/>
+              </a:rPr>
+              <a:t>Mô hình đúng trước, hình trực quan sau; kiểm nghiệm và biên trước kết luận.</a:t>
+            </a:r>
+            <a:endParaRPr lang="en-US" sz="1700" dirty="0"/>
+          </a:p>
+        </p:txBody>
+      </p:sp>
+      <p:sp>
+        <p:nvSpPr>
+          <p:cNvPr id="8" name="Shape 6"/>
+          <p:cNvSpPr/>
+          <p:nvPr/>
+        </p:nvSpPr>
+        <p:spPr>
+          <a:xfrm>
+            <a:off x="612648" y="6519672"/>
+            <a:ext cx="10972800" cy="0"/>
+          </a:xfrm>
+          <a:prstGeom prst="line">
+            <a:avLst/>
+          </a:prstGeom>
+          <a:noFill/>
+          <a:ln w="12700">
+            <a:solidFill>
+              <a:srgbClr val="D7DEE8"/>
+            </a:solidFill>
+            <a:prstDash val="solid"/>
+          </a:ln>
+        </p:spPr>
+      </p:sp>
+      <p:sp>
+        <p:nvSpPr>
+          <p:cNvPr id="9" name="Text 7"/>
+          <p:cNvSpPr txBox="1"/>
+          <p:nvPr/>
+        </p:nvSpPr>
+        <p:spPr>
+          <a:xfrm>
+            <a:off x="612648" y="6583680"/>
+            <a:ext cx="3566160" cy="146304"/>
+          </a:xfrm>
+          <a:prstGeom prst="rect">
+            <a:avLst/>
+          </a:prstGeom>
+          <a:noFill/>
+          <a:ln/>
+        </p:spPr>
+        <p:txBody>
+          <a:bodyPr wrap="square" lIns="0" tIns="0" rIns="0" bIns="0" rtlCol="0" anchor="t">
+            <a:normAutofit/>
+          </a:bodyPr>
+          <a:lstStyle/>
+          <a:p>
+            <a:pPr marL="0" indent="0" algn="l">
+              <a:buNone/>
+            </a:pPr>
+            <a:r>
+              <a:rPr lang="en-US" sz="820" b="1" dirty="0">
+                <a:solidFill>
+                  <a:srgbClr val="5B6B80"/>
+                </a:solidFill>
+                <a:latin typeface="Arial" pitchFamily="34" charset="0"/>
+                <a:ea typeface="Arial" pitchFamily="34" charset="-122"/>
+                <a:cs typeface="Arial" pitchFamily="34" charset="-120"/>
+              </a:rPr>
+              <a:t>PHỤ LỤC / DỰ PHÒNG</a:t>
+            </a:r>
+            <a:endParaRPr lang="en-US" sz="820" dirty="0"/>
+          </a:p>
+        </p:txBody>
+      </p:sp>
+      <p:sp>
+        <p:nvSpPr>
+          <p:cNvPr id="10" name="Text 8"/>
+          <p:cNvSpPr txBox="1"/>
+          <p:nvPr/>
+        </p:nvSpPr>
+        <p:spPr>
+          <a:xfrm>
+            <a:off x="3794760" y="6583680"/>
+            <a:ext cx="7086600" cy="146304"/>
+          </a:xfrm>
+          <a:prstGeom prst="rect">
+            <a:avLst/>
+          </a:prstGeom>
+          <a:noFill/>
+          <a:ln/>
+        </p:spPr>
+        <p:txBody>
+          <a:bodyPr wrap="square" lIns="0" tIns="0" rIns="0" bIns="0" rtlCol="0" anchor="t">
+            <a:normAutofit/>
+          </a:bodyPr>
+          <a:lstStyle/>
+          <a:p>
+            <a:pPr marL="0" indent="0" algn="ctr">
+              <a:buNone/>
+            </a:pPr>
+            <a:r>
+              <a:rPr lang="en-US" sz="760" dirty="0">
+                <a:solidFill>
+                  <a:srgbClr val="5B6B80"/>
+                </a:solidFill>
+                <a:latin typeface="Arial" pitchFamily="34" charset="0"/>
+                <a:ea typeface="Arial" pitchFamily="34" charset="-122"/>
+                <a:cs typeface="Arial" pitchFamily="34" charset="-120"/>
+              </a:rPr>
+              <a:t>PL-PP-MO-PHONG</a:t>
+            </a:r>
+            <a:endParaRPr lang="en-US" sz="760" dirty="0"/>
+          </a:p>
+        </p:txBody>
+      </p:sp>
+      <p:sp>
+        <p:nvSpPr>
+          <p:cNvPr id="11" name="Text 9"/>
+          <p:cNvSpPr txBox="1"/>
+          <p:nvPr/>
+        </p:nvSpPr>
+        <p:spPr>
+          <a:xfrm>
+            <a:off x="11064240" y="6583680"/>
+            <a:ext cx="502920" cy="146304"/>
+          </a:xfrm>
+          <a:prstGeom prst="rect">
+            <a:avLst/>
+          </a:prstGeom>
+          <a:noFill/>
+          <a:ln/>
+        </p:spPr>
+        <p:txBody>
+          <a:bodyPr wrap="square" lIns="0" tIns="0" rIns="0" bIns="0" rtlCol="0" anchor="t">
+            <a:normAutofit/>
+          </a:bodyPr>
+          <a:lstStyle/>
+          <a:p>
+            <a:pPr marL="0" indent="0" algn="r">
+              <a:buNone/>
+            </a:pPr>
+            <a:r>
+              <a:rPr lang="en-US" sz="820" dirty="0">
+                <a:solidFill>
+                  <a:srgbClr val="5B6B80"/>
+                </a:solidFill>
+                <a:latin typeface="Arial" pitchFamily="34" charset="0"/>
+                <a:ea typeface="Arial" pitchFamily="34" charset="-122"/>
+                <a:cs typeface="Arial" pitchFamily="34" charset="-120"/>
+              </a:rPr>
+              <a:t>20</a:t>
+            </a:r>
+            <a:endParaRPr lang="en-US" sz="820" dirty="0"/>
+          </a:p>
+        </p:txBody>
+      </p:sp>
+      <p:sp>
+        <p:nvSpPr>
+          <p:cNvPr id="13" name="Shape 10"/>
+          <p:cNvSpPr/>
+          <p:nvPr/>
+        </p:nvSpPr>
+        <p:spPr>
+          <a:xfrm>
+            <a:off x="658368" y="1993392"/>
+            <a:ext cx="1920240" cy="676656"/>
+          </a:xfrm>
+          <a:prstGeom prst="roundRect">
+            <a:avLst>
+              <a:gd name="adj" fmla="val 5405"/>
+            </a:avLst>
+          </a:prstGeom>
+          <a:solidFill>
+            <a:srgbClr val="FFFFFF"/>
+          </a:solidFill>
+          <a:ln w="12700">
+            <a:solidFill>
+              <a:srgbClr val="15355F"/>
+            </a:solidFill>
+            <a:prstDash val="solid"/>
+          </a:ln>
+        </p:spPr>
+      </p:sp>
+      <p:sp>
+        <p:nvSpPr>
+          <p:cNvPr id="14" name="Text 11"/>
+          <p:cNvSpPr txBox="1"/>
+          <p:nvPr/>
+        </p:nvSpPr>
+        <p:spPr>
+          <a:xfrm>
+            <a:off x="768096" y="2057400"/>
+            <a:ext cx="1700784" cy="548640"/>
+          </a:xfrm>
+          <a:prstGeom prst="rect">
+            <a:avLst/>
+          </a:prstGeom>
+          <a:noFill/>
+          <a:ln/>
+        </p:spPr>
+        <p:txBody>
+          <a:bodyPr wrap="square" lIns="0" tIns="0" rIns="0" bIns="0" rtlCol="0" anchor="ctr">
+            <a:normAutofit/>
+          </a:bodyPr>
+          <a:lstStyle/>
+          <a:p>
+            <a:pPr marL="0" indent="0" algn="ctr">
+              <a:buNone/>
+            </a:pPr>
+            <a:r>
+              <a:rPr lang="en-US" sz="1650" b="1" dirty="0">
+                <a:solidFill>
+                  <a:srgbClr val="07182F"/>
+                </a:solidFill>
+                <a:latin typeface="Arial" pitchFamily="34" charset="0"/>
+                <a:ea typeface="Arial" pitchFamily="34" charset="-122"/>
+                <a:cs typeface="Arial" pitchFamily="34" charset="-120"/>
+              </a:rPr>
+              <a:t>Bài toán, giả thiết</a:t>
+            </a:r>
+            <a:endParaRPr lang="en-US" sz="1650" dirty="0"/>
+          </a:p>
+        </p:txBody>
+      </p:sp>
+      <p:sp>
+        <p:nvSpPr>
+          <p:cNvPr id="15" name="Shape 12"/>
+          <p:cNvSpPr/>
+          <p:nvPr/>
+        </p:nvSpPr>
+        <p:spPr>
+          <a:xfrm>
+            <a:off x="2642616" y="2331720"/>
+            <a:ext cx="201168" cy="0"/>
+          </a:xfrm>
+          <a:prstGeom prst="line">
+            <a:avLst/>
+          </a:prstGeom>
+          <a:noFill/>
+          <a:ln w="12700">
+            <a:solidFill>
+              <a:srgbClr val="C9963A"/>
+            </a:solidFill>
+            <a:prstDash val="solid"/>
+            <a:tailEnd type="triangle"/>
+          </a:ln>
+        </p:spPr>
+      </p:sp>
+      <p:sp>
+        <p:nvSpPr>
+          <p:cNvPr id="16" name="Shape 13"/>
+          <p:cNvSpPr/>
+          <p:nvPr/>
+        </p:nvSpPr>
+        <p:spPr>
+          <a:xfrm>
+            <a:off x="2907792" y="1993392"/>
+            <a:ext cx="1920240" cy="676656"/>
+          </a:xfrm>
+          <a:prstGeom prst="roundRect">
+            <a:avLst>
+              <a:gd name="adj" fmla="val 5405"/>
+            </a:avLst>
+          </a:prstGeom>
+          <a:solidFill>
+            <a:srgbClr val="FFFFFF"/>
+          </a:solidFill>
+          <a:ln w="12700">
+            <a:solidFill>
+              <a:srgbClr val="15355F"/>
+            </a:solidFill>
+            <a:prstDash val="solid"/>
+          </a:ln>
+        </p:spPr>
+      </p:sp>
+      <p:sp>
+        <p:nvSpPr>
+          <p:cNvPr id="17" name="Text 14"/>
+          <p:cNvSpPr txBox="1"/>
+          <p:nvPr/>
+        </p:nvSpPr>
+        <p:spPr>
+          <a:xfrm>
+            <a:off x="3017520" y="2057400"/>
+            <a:ext cx="1700784" cy="548640"/>
+          </a:xfrm>
+          <a:prstGeom prst="rect">
+            <a:avLst/>
+          </a:prstGeom>
+          <a:noFill/>
+          <a:ln/>
+        </p:spPr>
+        <p:txBody>
+          <a:bodyPr wrap="square" lIns="0" tIns="0" rIns="0" bIns="0" rtlCol="0" anchor="ctr">
+            <a:normAutofit/>
+          </a:bodyPr>
+          <a:lstStyle/>
+          <a:p>
+            <a:pPr marL="0" indent="0" algn="ctr">
+              <a:buNone/>
+            </a:pPr>
+            <a:r>
+              <a:rPr lang="en-US" sz="1650" b="1" dirty="0">
+                <a:solidFill>
+                  <a:srgbClr val="07182F"/>
+                </a:solidFill>
+                <a:latin typeface="Arial" pitchFamily="34" charset="0"/>
+                <a:ea typeface="Arial" pitchFamily="34" charset="-122"/>
+                <a:cs typeface="Arial" pitchFamily="34" charset="-120"/>
+              </a:rPr>
+              <a:t>Tính toán, trạng thái</a:t>
+            </a:r>
+            <a:endParaRPr lang="en-US" sz="1650" dirty="0"/>
+          </a:p>
+        </p:txBody>
+      </p:sp>
+      <p:sp>
+        <p:nvSpPr>
+          <p:cNvPr id="18" name="Shape 15"/>
+          <p:cNvSpPr/>
+          <p:nvPr/>
+        </p:nvSpPr>
+        <p:spPr>
+          <a:xfrm>
+            <a:off x="4892040" y="2331720"/>
+            <a:ext cx="201168" cy="0"/>
+          </a:xfrm>
+          <a:prstGeom prst="line">
+            <a:avLst/>
+          </a:prstGeom>
+          <a:noFill/>
+          <a:ln w="12700">
+            <a:solidFill>
+              <a:srgbClr val="C9963A"/>
+            </a:solidFill>
+            <a:prstDash val="solid"/>
+            <a:tailEnd type="triangle"/>
+          </a:ln>
+        </p:spPr>
+      </p:sp>
+      <p:sp>
+        <p:nvSpPr>
+          <p:cNvPr id="19" name="Shape 16"/>
+          <p:cNvSpPr/>
+          <p:nvPr/>
+        </p:nvSpPr>
+        <p:spPr>
+          <a:xfrm>
+            <a:off x="5157216" y="1993392"/>
+            <a:ext cx="1920240" cy="676656"/>
+          </a:xfrm>
+          <a:prstGeom prst="roundRect">
+            <a:avLst>
+              <a:gd name="adj" fmla="val 5405"/>
+            </a:avLst>
+          </a:prstGeom>
+          <a:solidFill>
+            <a:srgbClr val="FFFFFF"/>
+          </a:solidFill>
+          <a:ln w="12700">
+            <a:solidFill>
+              <a:srgbClr val="15355F"/>
+            </a:solidFill>
+            <a:prstDash val="solid"/>
+          </a:ln>
+        </p:spPr>
+      </p:sp>
+      <p:sp>
+        <p:nvSpPr>
+          <p:cNvPr id="20" name="Text 17"/>
+          <p:cNvSpPr txBox="1"/>
+          <p:nvPr/>
+        </p:nvSpPr>
+        <p:spPr>
+          <a:xfrm>
+            <a:off x="5266944" y="2057400"/>
+            <a:ext cx="1700784" cy="548640"/>
+          </a:xfrm>
+          <a:prstGeom prst="rect">
+            <a:avLst/>
+          </a:prstGeom>
+          <a:noFill/>
+          <a:ln/>
+        </p:spPr>
+        <p:txBody>
+          <a:bodyPr wrap="square" lIns="0" tIns="0" rIns="0" bIns="0" rtlCol="0" anchor="ctr">
+            <a:normAutofit/>
+          </a:bodyPr>
+          <a:lstStyle/>
+          <a:p>
+            <a:pPr marL="0" indent="0" algn="ctr">
+              <a:buNone/>
+            </a:pPr>
+            <a:r>
+              <a:rPr lang="en-US" sz="1650" b="1" dirty="0">
+                <a:solidFill>
+                  <a:srgbClr val="07182F"/>
+                </a:solidFill>
+                <a:latin typeface="Arial" pitchFamily="34" charset="0"/>
+                <a:ea typeface="Arial" pitchFamily="34" charset="-122"/>
+                <a:cs typeface="Arial" pitchFamily="34" charset="-120"/>
+              </a:rPr>
+              <a:t>Hình 2D / 3D</a:t>
+            </a:r>
+            <a:endParaRPr lang="en-US" sz="1650" dirty="0"/>
+          </a:p>
+        </p:txBody>
+      </p:sp>
+      <p:sp>
+        <p:nvSpPr>
+          <p:cNvPr id="21" name="Shape 18"/>
+          <p:cNvSpPr/>
+          <p:nvPr/>
+        </p:nvSpPr>
+        <p:spPr>
+          <a:xfrm>
+            <a:off x="7141464" y="2331720"/>
+            <a:ext cx="201168" cy="0"/>
+          </a:xfrm>
+          <a:prstGeom prst="line">
+            <a:avLst/>
+          </a:prstGeom>
+          <a:noFill/>
+          <a:ln w="12700">
+            <a:solidFill>
+              <a:srgbClr val="C9963A"/>
+            </a:solidFill>
+            <a:prstDash val="solid"/>
+            <a:tailEnd type="triangle"/>
+          </a:ln>
+        </p:spPr>
+      </p:sp>
+      <p:sp>
+        <p:nvSpPr>
+          <p:cNvPr id="22" name="Shape 19"/>
+          <p:cNvSpPr/>
+          <p:nvPr/>
+        </p:nvSpPr>
+        <p:spPr>
+          <a:xfrm>
+            <a:off x="7406640" y="1993392"/>
+            <a:ext cx="1920240" cy="676656"/>
+          </a:xfrm>
+          <a:prstGeom prst="roundRect">
+            <a:avLst>
+              <a:gd name="adj" fmla="val 5405"/>
+            </a:avLst>
+          </a:prstGeom>
+          <a:solidFill>
+            <a:srgbClr val="FFFFFF"/>
+          </a:solidFill>
+          <a:ln w="12700">
+            <a:solidFill>
+              <a:srgbClr val="15355F"/>
+            </a:solidFill>
+            <a:prstDash val="solid"/>
+          </a:ln>
+        </p:spPr>
+      </p:sp>
+      <p:sp>
+        <p:nvSpPr>
+          <p:cNvPr id="23" name="Text 20"/>
+          <p:cNvSpPr txBox="1"/>
+          <p:nvPr/>
+        </p:nvSpPr>
+        <p:spPr>
+          <a:xfrm>
+            <a:off x="7516368" y="2057400"/>
+            <a:ext cx="1700784" cy="548640"/>
+          </a:xfrm>
+          <a:prstGeom prst="rect">
+            <a:avLst/>
+          </a:prstGeom>
+          <a:noFill/>
+          <a:ln/>
+        </p:spPr>
+        <p:txBody>
+          <a:bodyPr wrap="square" lIns="0" tIns="0" rIns="0" bIns="0" rtlCol="0" anchor="ctr">
+            <a:normAutofit/>
+          </a:bodyPr>
+          <a:lstStyle/>
+          <a:p>
+            <a:pPr marL="0" indent="0" algn="ctr">
+              <a:buNone/>
+            </a:pPr>
+            <a:r>
+              <a:rPr lang="en-US" sz="1650" b="1" dirty="0">
+                <a:solidFill>
+                  <a:srgbClr val="07182F"/>
+                </a:solidFill>
+                <a:latin typeface="Arial" pitchFamily="34" charset="0"/>
+                <a:ea typeface="Arial" pitchFamily="34" charset="-122"/>
+                <a:cs typeface="Arial" pitchFamily="34" charset="-120"/>
+              </a:rPr>
+              <a:t>Thao tác, thời gian</a:t>
+            </a:r>
+            <a:endParaRPr lang="en-US" sz="1650" dirty="0"/>
+          </a:p>
+        </p:txBody>
+      </p:sp>
+      <p:sp>
+        <p:nvSpPr>
+          <p:cNvPr id="24" name="Shape 21"/>
+          <p:cNvSpPr/>
+          <p:nvPr/>
+        </p:nvSpPr>
+        <p:spPr>
+          <a:xfrm>
+            <a:off x="9390888" y="2331720"/>
+            <a:ext cx="201168" cy="0"/>
+          </a:xfrm>
+          <a:prstGeom prst="line">
+            <a:avLst/>
+          </a:prstGeom>
+          <a:noFill/>
+          <a:ln w="12700">
+            <a:solidFill>
+              <a:srgbClr val="C9963A"/>
+            </a:solidFill>
+            <a:prstDash val="solid"/>
+            <a:tailEnd type="triangle"/>
+          </a:ln>
+        </p:spPr>
+      </p:sp>
+      <p:sp>
+        <p:nvSpPr>
+          <p:cNvPr id="25" name="Shape 22"/>
+          <p:cNvSpPr/>
+          <p:nvPr/>
+        </p:nvSpPr>
+        <p:spPr>
+          <a:xfrm>
+            <a:off x="9656064" y="1993392"/>
+            <a:ext cx="1920240" cy="676656"/>
+          </a:xfrm>
+          <a:prstGeom prst="roundRect">
+            <a:avLst>
+              <a:gd name="adj" fmla="val 5405"/>
+            </a:avLst>
+          </a:prstGeom>
+          <a:solidFill>
+            <a:srgbClr val="07182F"/>
+          </a:solidFill>
+          <a:ln w="12700">
+            <a:solidFill>
+              <a:srgbClr val="15355F"/>
+            </a:solidFill>
+            <a:prstDash val="solid"/>
+          </a:ln>
+        </p:spPr>
+      </p:sp>
+      <p:sp>
+        <p:nvSpPr>
+          <p:cNvPr id="26" name="Text 23"/>
+          <p:cNvSpPr txBox="1"/>
+          <p:nvPr/>
+        </p:nvSpPr>
+        <p:spPr>
+          <a:xfrm>
+            <a:off x="9765792" y="2057400"/>
+            <a:ext cx="1700784" cy="548640"/>
+          </a:xfrm>
+          <a:prstGeom prst="rect">
+            <a:avLst/>
+          </a:prstGeom>
+          <a:noFill/>
+          <a:ln/>
+        </p:spPr>
+        <p:txBody>
+          <a:bodyPr wrap="square" lIns="0" tIns="0" rIns="0" bIns="0" rtlCol="0" anchor="ctr">
+            <a:normAutofit/>
+          </a:bodyPr>
+          <a:lstStyle/>
+          <a:p>
+            <a:pPr marL="0" indent="0" algn="ctr">
+              <a:buNone/>
+            </a:pPr>
+            <a:r>
+              <a:rPr lang="en-US" sz="1650" b="1" dirty="0">
+                <a:solidFill>
+                  <a:srgbClr val="FFFFFF"/>
+                </a:solidFill>
+                <a:latin typeface="Arial" pitchFamily="34" charset="0"/>
+                <a:ea typeface="Arial" pitchFamily="34" charset="-122"/>
+                <a:cs typeface="Arial" pitchFamily="34" charset="-120"/>
+              </a:rPr>
+              <a:t>Đối chiếu, tích hợp</a:t>
+            </a:r>
+            <a:endParaRPr lang="en-US" sz="1650" dirty="0"/>
+          </a:p>
+        </p:txBody>
+      </p:sp>
+      <p:sp>
+        <p:nvSpPr>
+          <p:cNvPr id="27" name="Shape 24"/>
+          <p:cNvSpPr/>
+          <p:nvPr/>
+        </p:nvSpPr>
+        <p:spPr>
+          <a:xfrm>
+            <a:off x="658368" y="2852928"/>
+            <a:ext cx="5303520" cy="1335024"/>
+          </a:xfrm>
+          <a:prstGeom prst="roundRect">
+            <a:avLst>
+              <a:gd name="adj" fmla="val 2740"/>
+            </a:avLst>
+          </a:prstGeom>
+          <a:solidFill>
+            <a:srgbClr val="FFFFFF"/>
+          </a:solidFill>
+          <a:ln w="12700">
+            <a:solidFill>
+              <a:srgbClr val="2980B9"/>
+            </a:solidFill>
+            <a:prstDash val="solid"/>
+          </a:ln>
+        </p:spPr>
+      </p:sp>
+      <p:sp>
+        <p:nvSpPr>
+          <p:cNvPr id="28" name="Text 25"/>
+          <p:cNvSpPr txBox="1"/>
+          <p:nvPr/>
+        </p:nvSpPr>
+        <p:spPr>
+          <a:xfrm>
+            <a:off x="859536" y="2971800"/>
+            <a:ext cx="4901184" cy="274320"/>
+          </a:xfrm>
+          <a:prstGeom prst="rect">
+            <a:avLst/>
+          </a:prstGeom>
+          <a:noFill/>
+          <a:ln/>
+        </p:spPr>
+        <p:txBody>
+          <a:bodyPr wrap="square" lIns="0" tIns="0" rIns="0" bIns="0" rtlCol="0" anchor="t">
+            <a:normAutofit/>
+          </a:bodyPr>
+          <a:lstStyle/>
+          <a:p>
+            <a:pPr marL="0" indent="0" algn="l">
+              <a:buNone/>
+            </a:pPr>
+            <a:r>
+              <a:rPr lang="en-US" sz="1800" b="1" dirty="0">
+                <a:solidFill>
+                  <a:srgbClr val="07182F"/>
+                </a:solidFill>
+                <a:latin typeface="Georgia" pitchFamily="34" charset="0"/>
+                <a:ea typeface="Georgia" pitchFamily="34" charset="-122"/>
+                <a:cs typeface="Georgia" pitchFamily="34" charset="-120"/>
+              </a:rPr>
+              <a:t>2D là lớp cơ sở</a:t>
+            </a:r>
+            <a:endParaRPr lang="en-US" sz="1800" dirty="0"/>
+          </a:p>
+        </p:txBody>
+      </p:sp>
+      <p:sp>
+        <p:nvSpPr>
+          <p:cNvPr id="29" name="Text 26"/>
+          <p:cNvSpPr txBox="1"/>
+          <p:nvPr/>
+        </p:nvSpPr>
+        <p:spPr>
+          <a:xfrm>
+            <a:off x="859536" y="3328416"/>
+            <a:ext cx="4901184" cy="740664"/>
+          </a:xfrm>
+          <a:prstGeom prst="rect">
+            <a:avLst/>
+          </a:prstGeom>
+          <a:noFill/>
+          <a:ln/>
+        </p:spPr>
+        <p:txBody>
+          <a:bodyPr wrap="square" lIns="0" tIns="0" rIns="0" bIns="0" rtlCol="0" anchor="t">
+            <a:normAutofit/>
+          </a:bodyPr>
+          <a:lstStyle/>
+          <a:p>
+            <a:pPr marL="0" indent="0" algn="l">
+              <a:buNone/>
+            </a:pPr>
+            <a:r>
+              <a:rPr lang="en-US" sz="1600" dirty="0">
+                <a:solidFill>
+                  <a:srgbClr val="243247"/>
+                </a:solidFill>
+                <a:latin typeface="Arial" pitchFamily="34" charset="0"/>
+                <a:ea typeface="Arial" pitchFamily="34" charset="-122"/>
+                <a:cs typeface="Arial" pitchFamily="34" charset="-120"/>
+              </a:rPr>
+              <a:t>25 vị trí 2D bằng SVG/JavaScript; tham số, hình và giá trị hiển thị dùng cùng trạng thái tính toán.</a:t>
+            </a:r>
+            <a:endParaRPr lang="en-US" sz="1600" dirty="0"/>
+          </a:p>
+        </p:txBody>
+      </p:sp>
+      <p:sp>
+        <p:nvSpPr>
+          <p:cNvPr id="30" name="Shape 27"/>
+          <p:cNvSpPr/>
+          <p:nvPr/>
+        </p:nvSpPr>
+        <p:spPr>
+          <a:xfrm>
+            <a:off x="6236208" y="2852928"/>
+            <a:ext cx="5303520" cy="1335024"/>
+          </a:xfrm>
+          <a:prstGeom prst="roundRect">
+            <a:avLst>
+              <a:gd name="adj" fmla="val 2740"/>
+            </a:avLst>
+          </a:prstGeom>
+          <a:solidFill>
+            <a:srgbClr val="FFFFFF"/>
+          </a:solidFill>
+          <a:ln w="12700">
+            <a:solidFill>
+              <a:srgbClr val="27AE60"/>
+            </a:solidFill>
+            <a:prstDash val="solid"/>
+          </a:ln>
+        </p:spPr>
+      </p:sp>
+      <p:sp>
+        <p:nvSpPr>
+          <p:cNvPr id="31" name="Text 28"/>
+          <p:cNvSpPr txBox="1"/>
+          <p:nvPr/>
+        </p:nvSpPr>
+        <p:spPr>
+          <a:xfrm>
+            <a:off x="6437376" y="2971800"/>
+            <a:ext cx="4901184" cy="274320"/>
+          </a:xfrm>
+          <a:prstGeom prst="rect">
+            <a:avLst/>
+          </a:prstGeom>
+          <a:noFill/>
+          <a:ln/>
+        </p:spPr>
+        <p:txBody>
+          <a:bodyPr wrap="square" lIns="0" tIns="0" rIns="0" bIns="0" rtlCol="0" anchor="t">
+            <a:normAutofit/>
+          </a:bodyPr>
+          <a:lstStyle/>
+          <a:p>
+            <a:pPr marL="0" indent="0" algn="l">
+              <a:buNone/>
+            </a:pPr>
+            <a:r>
+              <a:rPr lang="en-US" sz="1800" b="1" dirty="0">
+                <a:solidFill>
+                  <a:srgbClr val="07182F"/>
+                </a:solidFill>
+                <a:latin typeface="Georgia" pitchFamily="34" charset="0"/>
+                <a:ea typeface="Georgia" pitchFamily="34" charset="-122"/>
+                <a:cs typeface="Georgia" pitchFamily="34" charset="-120"/>
+              </a:rPr>
+              <a:t>3D là lớp thử nghiệm</a:t>
+            </a:r>
+            <a:endParaRPr lang="en-US" sz="1800" dirty="0"/>
+          </a:p>
+        </p:txBody>
+      </p:sp>
+      <p:sp>
+        <p:nvSpPr>
+          <p:cNvPr id="32" name="Text 29"/>
+          <p:cNvSpPr txBox="1"/>
+          <p:nvPr/>
+        </p:nvSpPr>
+        <p:spPr>
+          <a:xfrm>
+            <a:off x="6437376" y="3328416"/>
+            <a:ext cx="4901184" cy="740664"/>
+          </a:xfrm>
+          <a:prstGeom prst="rect">
+            <a:avLst/>
+          </a:prstGeom>
+          <a:noFill/>
+          <a:ln/>
+        </p:spPr>
+        <p:txBody>
+          <a:bodyPr wrap="square" lIns="0" tIns="0" rIns="0" bIns="0" rtlCol="0" anchor="t">
+            <a:normAutofit/>
+          </a:bodyPr>
+          <a:lstStyle/>
+          <a:p>
+            <a:pPr marL="0" indent="0" algn="l">
+              <a:buNone/>
+            </a:pPr>
+            <a:r>
+              <a:rPr lang="en-US" sz="1600" dirty="0">
+                <a:solidFill>
+                  <a:srgbClr val="243247"/>
+                </a:solidFill>
+                <a:latin typeface="Arial" pitchFamily="34" charset="0"/>
+                <a:ea typeface="Arial" pitchFamily="34" charset="-122"/>
+                <a:cs typeface="Arial" pitchFamily="34" charset="-120"/>
+              </a:rPr>
+              <a:t>10 vị trí trong số đó có Three.js/WebGL; không cộng thành 35 bài. Lỗi khởi tạo/vẽ 3D phải báo và về Sim2.</a:t>
+            </a:r>
+            <a:endParaRPr lang="en-US" sz="1600" dirty="0"/>
+          </a:p>
+        </p:txBody>
+      </p:sp>
+      <p:sp>
+        <p:nvSpPr>
+          <p:cNvPr id="33" name="Shape 30"/>
+          <p:cNvSpPr/>
+          <p:nvPr/>
+        </p:nvSpPr>
+        <p:spPr>
+          <a:xfrm>
+            <a:off x="658368" y="4352544"/>
+            <a:ext cx="5303520" cy="1335024"/>
+          </a:xfrm>
+          <a:prstGeom prst="roundRect">
+            <a:avLst>
+              <a:gd name="adj" fmla="val 2740"/>
+            </a:avLst>
+          </a:prstGeom>
+          <a:solidFill>
+            <a:srgbClr val="FFFFFF"/>
+          </a:solidFill>
+          <a:ln w="12700">
+            <a:solidFill>
+              <a:srgbClr val="8E44AD"/>
+            </a:solidFill>
+            <a:prstDash val="solid"/>
+          </a:ln>
+        </p:spPr>
+      </p:sp>
+      <p:sp>
+        <p:nvSpPr>
+          <p:cNvPr id="34" name="Text 31"/>
+          <p:cNvSpPr txBox="1"/>
+          <p:nvPr/>
+        </p:nvSpPr>
+        <p:spPr>
+          <a:xfrm>
+            <a:off x="859536" y="4471416"/>
+            <a:ext cx="4901184" cy="274320"/>
+          </a:xfrm>
+          <a:prstGeom prst="rect">
+            <a:avLst/>
+          </a:prstGeom>
+          <a:noFill/>
+          <a:ln/>
+        </p:spPr>
+        <p:txBody>
+          <a:bodyPr wrap="square" lIns="0" tIns="0" rIns="0" bIns="0" rtlCol="0" anchor="t">
+            <a:normAutofit/>
+          </a:bodyPr>
+          <a:lstStyle/>
+          <a:p>
+            <a:pPr marL="0" indent="0" algn="l">
+              <a:buNone/>
+            </a:pPr>
+            <a:r>
+              <a:rPr lang="en-US" sz="1800" b="1" dirty="0">
+                <a:solidFill>
+                  <a:srgbClr val="07182F"/>
+                </a:solidFill>
+                <a:latin typeface="Georgia" pitchFamily="34" charset="0"/>
+                <a:ea typeface="Georgia" pitchFamily="34" charset="-122"/>
+                <a:cs typeface="Georgia" pitchFamily="34" charset="-120"/>
+              </a:rPr>
+              <a:t>4D chỉ theo nghĩa 3D+t</a:t>
+            </a:r>
+            <a:endParaRPr lang="en-US" sz="1800" dirty="0"/>
+          </a:p>
+        </p:txBody>
+      </p:sp>
+      <p:sp>
+        <p:nvSpPr>
+          <p:cNvPr id="35" name="Text 32"/>
+          <p:cNvSpPr txBox="1"/>
+          <p:nvPr/>
+        </p:nvSpPr>
+        <p:spPr>
+          <a:xfrm>
+            <a:off x="859536" y="4828032"/>
+            <a:ext cx="4901184" cy="740664"/>
+          </a:xfrm>
+          <a:prstGeom prst="rect">
+            <a:avLst/>
+          </a:prstGeom>
+          <a:noFill/>
+          <a:ln/>
+        </p:spPr>
+        <p:txBody>
+          <a:bodyPr wrap="square" lIns="0" tIns="0" rIns="0" bIns="0" rtlCol="0" anchor="t">
+            <a:normAutofit/>
+          </a:bodyPr>
+          <a:lstStyle/>
+          <a:p>
+            <a:pPr marL="0" indent="0" algn="l">
+              <a:buNone/>
+            </a:pPr>
+            <a:r>
+              <a:rPr lang="en-US" sz="1600" dirty="0">
+                <a:solidFill>
+                  <a:srgbClr val="243247"/>
+                </a:solidFill>
+                <a:latin typeface="Arial" pitchFamily="34" charset="0"/>
+                <a:ea typeface="Arial" pitchFamily="34" charset="-122"/>
+                <a:cs typeface="Arial" pitchFamily="34" charset="-120"/>
+              </a:rPr>
+              <a:t>Chỉ dùng khi có diễn biến thời gian và tiêu chí kiểm. Đổi tham số tĩnh không tự động là 4D; nhịp vẽ không chứng minh sai số tính.</a:t>
+            </a:r>
+            <a:endParaRPr lang="en-US" sz="1600" dirty="0"/>
+          </a:p>
+        </p:txBody>
+      </p:sp>
+      <p:sp>
+        <p:nvSpPr>
+          <p:cNvPr id="36" name="Shape 33"/>
+          <p:cNvSpPr/>
+          <p:nvPr/>
+        </p:nvSpPr>
+        <p:spPr>
+          <a:xfrm>
+            <a:off x="6236208" y="4352544"/>
+            <a:ext cx="5303520" cy="1335024"/>
+          </a:xfrm>
+          <a:prstGeom prst="roundRect">
+            <a:avLst>
+              <a:gd name="adj" fmla="val 2740"/>
+            </a:avLst>
+          </a:prstGeom>
+          <a:solidFill>
+            <a:srgbClr val="FFFFFF"/>
+          </a:solidFill>
+          <a:ln w="12700">
+            <a:solidFill>
+              <a:srgbClr val="C9963A"/>
+            </a:solidFill>
+            <a:prstDash val="solid"/>
+          </a:ln>
+        </p:spPr>
+      </p:sp>
+      <p:sp>
+        <p:nvSpPr>
+          <p:cNvPr id="37" name="Text 34"/>
+          <p:cNvSpPr txBox="1"/>
+          <p:nvPr/>
+        </p:nvSpPr>
+        <p:spPr>
+          <a:xfrm>
+            <a:off x="6437376" y="4471416"/>
+            <a:ext cx="4901184" cy="274320"/>
+          </a:xfrm>
+          <a:prstGeom prst="rect">
+            <a:avLst/>
+          </a:prstGeom>
+          <a:noFill/>
+          <a:ln/>
+        </p:spPr>
+        <p:txBody>
+          <a:bodyPr wrap="square" lIns="0" tIns="0" rIns="0" bIns="0" rtlCol="0" anchor="t">
+            <a:normAutofit/>
+          </a:bodyPr>
+          <a:lstStyle/>
+          <a:p>
+            <a:pPr marL="0" indent="0" algn="l">
+              <a:buNone/>
+            </a:pPr>
+            <a:r>
+              <a:rPr lang="en-US" sz="1800" b="1" dirty="0">
+                <a:solidFill>
+                  <a:srgbClr val="07182F"/>
+                </a:solidFill>
+                <a:latin typeface="Georgia" pitchFamily="34" charset="0"/>
+                <a:ea typeface="Georgia" pitchFamily="34" charset="-122"/>
+                <a:cs typeface="Georgia" pitchFamily="34" charset="-120"/>
+              </a:rPr>
+              <a:t>Kiểm mô hình trước kết luận</a:t>
+            </a:r>
+            <a:endParaRPr lang="en-US" sz="1800" dirty="0"/>
+          </a:p>
+        </p:txBody>
+      </p:sp>
+      <p:sp>
+        <p:nvSpPr>
+          <p:cNvPr id="38" name="Text 35"/>
+          <p:cNvSpPr txBox="1"/>
+          <p:nvPr/>
+        </p:nvSpPr>
+        <p:spPr>
+          <a:xfrm>
+            <a:off x="6437376" y="4828032"/>
+            <a:ext cx="4901184" cy="740664"/>
+          </a:xfrm>
+          <a:prstGeom prst="rect">
+            <a:avLst/>
+          </a:prstGeom>
+          <a:noFill/>
+          <a:ln/>
+        </p:spPr>
+        <p:txBody>
+          <a:bodyPr wrap="square" lIns="0" tIns="0" rIns="0" bIns="0" rtlCol="0" anchor="t">
+            <a:normAutofit/>
+          </a:bodyPr>
+          <a:lstStyle/>
+          <a:p>
+            <a:pPr marL="0" indent="0" algn="l">
+              <a:buNone/>
+            </a:pPr>
+            <a:r>
+              <a:rPr lang="en-US" sz="1600" dirty="0">
+                <a:solidFill>
+                  <a:srgbClr val="243247"/>
+                </a:solidFill>
+                <a:latin typeface="Arial" pitchFamily="34" charset="0"/>
+                <a:ea typeface="Arial" pitchFamily="34" charset="-122"/>
+                <a:cs typeface="Arial" pitchFamily="34" charset="-120"/>
+              </a:rPr>
+              <a:t>Đối chiếu nghiệm độc lập, trường hợp chuẩn/biên, đơn vị, dấu và tương đương 2D/3D; chuyên gia duyệt giá trị vật lý, sư phạm.</a:t>
+            </a:r>
+            <a:endParaRPr lang="en-US" sz="1600" dirty="0"/>
+          </a:p>
+        </p:txBody>
+      </p:sp>
+      <p:sp>
+        <p:nvSpPr>
+          <p:cNvPr id="39" name="Shape 36"/>
+          <p:cNvSpPr/>
+          <p:nvPr/>
+        </p:nvSpPr>
+        <p:spPr>
+          <a:xfrm>
+            <a:off x="658368" y="5852160"/>
+            <a:ext cx="10881360" cy="365760"/>
+          </a:xfrm>
+          <a:prstGeom prst="roundRect">
+            <a:avLst>
+              <a:gd name="adj" fmla="val 10000"/>
+            </a:avLst>
+          </a:prstGeom>
+          <a:solidFill>
+            <a:srgbClr val="FFF4E8"/>
+          </a:solidFill>
+          <a:ln w="12700">
+            <a:solidFill>
+              <a:srgbClr val="9A5B00"/>
+            </a:solidFill>
+            <a:prstDash val="solid"/>
+          </a:ln>
+        </p:spPr>
+      </p:sp>
+      <p:sp>
+        <p:nvSpPr>
+          <p:cNvPr id="40" name="Text 37"/>
+          <p:cNvSpPr txBox="1"/>
+          <p:nvPr/>
+        </p:nvSpPr>
+        <p:spPr>
+          <a:xfrm>
+            <a:off x="859536" y="5925312"/>
+            <a:ext cx="10479024" cy="219456"/>
+          </a:xfrm>
+          <a:prstGeom prst="rect">
+            <a:avLst/>
+          </a:prstGeom>
+          <a:noFill/>
+          <a:ln/>
+        </p:spPr>
+        <p:txBody>
+          <a:bodyPr wrap="square" lIns="0" tIns="0" rIns="0" bIns="0" rtlCol="0" anchor="t">
+            <a:normAutofit/>
+          </a:bodyPr>
+          <a:lstStyle/>
+          <a:p>
+            <a:pPr marL="0" indent="0" algn="ctr">
+              <a:buNone/>
+            </a:pPr>
+            <a:r>
+              <a:rPr lang="en-US" sz="1400" b="1" dirty="0">
+                <a:solidFill>
+                  <a:srgbClr val="9A5B00"/>
+                </a:solidFill>
+                <a:latin typeface="Arial" pitchFamily="34" charset="0"/>
+                <a:ea typeface="Arial" pitchFamily="34" charset="-122"/>
+                <a:cs typeface="Arial" pitchFamily="34" charset="-120"/>
+              </a:rPr>
+              <a:t>3D vẫn là thử nghiệm; kiểm kỹ thuật không thay thẩm định khoa học–sư phạm độc lập.</a:t>
+            </a:r>
+            <a:endParaRPr lang="en-US" sz="1400" dirty="0"/>
+          </a:p>
+        </p:txBody>
+      </p:sp>
+    </p:spTree>
+  </p:cSld>
+  <p:clrMapOvr>
+    <a:masterClrMapping/>
+  </p:clrMapOvr>
+</p:sld>
+</file>
+
+<file path=ppt/slides/slide21.xml><?xml version="1.0" encoding="utf-8"?>
+<p:sld xmlns:a="http://schemas.openxmlformats.org/drawingml/2006/main" xmlns:r="http://schemas.openxmlformats.org/officeDocument/2006/relationships" xmlns:p="http://schemas.openxmlformats.org/presentationml/2006/main">
+  <p:cSld name="Slide 21">
+    <p:bg>
+      <p:bgPr>
+        <a:solidFill>
+          <a:srgbClr val="F7F5EF"/>
+        </a:solidFill>
+        <a:effectLst/>
+      </p:bgPr>
+    </p:bg>
+    <p:spTree>
+      <p:nvGrpSpPr>
+        <p:cNvPr id="1" name=""/>
+        <p:cNvGrpSpPr/>
+        <p:nvPr/>
+      </p:nvGrpSpPr>
+      <p:grpSpPr>
+        <a:xfrm>
+          <a:off x="0" y="0"/>
+          <a:ext cx="0" cy="0"/>
+          <a:chOff x="0" y="0"/>
+          <a:chExt cx="0" cy="0"/>
+        </a:xfrm>
+      </p:grpSpPr>
+      <p:sp>
+        <p:nvSpPr>
+          <p:cNvPr id="2" name="Shape 0"/>
+          <p:cNvSpPr/>
+          <p:nvPr/>
+        </p:nvSpPr>
+        <p:spPr>
+          <a:xfrm>
+            <a:off x="612648" y="393192"/>
+            <a:ext cx="475488" cy="0"/>
+          </a:xfrm>
+          <a:prstGeom prst="line">
+            <a:avLst/>
+          </a:prstGeom>
+          <a:noFill/>
+          <a:ln w="12700">
+            <a:solidFill>
+              <a:srgbClr val="C9963A"/>
+            </a:solidFill>
+            <a:prstDash val="solid"/>
+          </a:ln>
+        </p:spPr>
+      </p:sp>
+      <p:sp>
+        <p:nvSpPr>
+          <p:cNvPr id="3" name="Text 1"/>
+          <p:cNvSpPr txBox="1"/>
+          <p:nvPr/>
+        </p:nvSpPr>
+        <p:spPr>
+          <a:xfrm>
+            <a:off x="1207008" y="256032"/>
+            <a:ext cx="4114800" cy="228600"/>
+          </a:xfrm>
+          <a:prstGeom prst="rect">
+            <a:avLst/>
+          </a:prstGeom>
+          <a:noFill/>
+          <a:ln/>
+        </p:spPr>
+        <p:txBody>
+          <a:bodyPr wrap="square" lIns="0" tIns="0" rIns="0" bIns="0" rtlCol="0" anchor="ctr">
+            <a:normAutofit/>
+          </a:bodyPr>
+          <a:lstStyle/>
+          <a:p>
+            <a:pPr marL="0" indent="0" algn="l">
+              <a:buNone/>
+            </a:pPr>
+            <a:r>
+              <a:rPr lang="en-US" sz="950" b="1" dirty="0">
+                <a:solidFill>
+                  <a:srgbClr val="5B6B80"/>
+                </a:solidFill>
+                <a:latin typeface="Arial" pitchFamily="34" charset="0"/>
+                <a:ea typeface="Arial" pitchFamily="34" charset="-122"/>
+                <a:cs typeface="Arial" pitchFamily="34" charset="-120"/>
+              </a:rPr>
+              <a:t>PHỤ LỤC / DỰ PHÒNG</a:t>
+            </a:r>
+            <a:endParaRPr lang="en-US" sz="950" dirty="0"/>
+          </a:p>
+        </p:txBody>
+      </p:sp>
+      <p:sp>
+        <p:nvSpPr>
+          <p:cNvPr id="4" name="Text 0"/>
+          <p:cNvSpPr>
+            <a:spLocks noGrp="1"/>
+          </p:cNvSpPr>
+          <p:nvPr>
+            <p:ph type="title" idx="100" hasCustomPrompt="1"/>
+          </p:nvPr>
+        </p:nvSpPr>
+        <p:spPr>
+          <a:xfrm>
+            <a:off x="612648" y="621792"/>
+            <a:ext cx="10972800" cy="713232"/>
+          </a:xfrm>
+          <a:prstGeom prst="rect">
+            <a:avLst/>
+          </a:prstGeom>
+          <a:noFill/>
+          <a:ln/>
+        </p:spPr>
+        <p:txBody>
+          <a:bodyPr wrap="square" lIns="0" tIns="0" rIns="0" bIns="0" rtlCol="0" anchor="ctr">
+            <a:normAutofit/>
+          </a:bodyPr>
+          <a:lstStyle/>
+          <a:p>
+            <a:pPr marL="0" indent="0" algn="l">
+              <a:buNone/>
+            </a:pPr>
+            <a:r>
+              <a:rPr lang="en-US" sz="2800" b="1" dirty="0">
+                <a:solidFill>
+                  <a:srgbClr val="07182F"/>
+                </a:solidFill>
+                <a:latin typeface="Georgia" pitchFamily="34" charset="0"/>
+                <a:ea typeface="Georgia" pitchFamily="34" charset="-122"/>
+                <a:cs typeface="Georgia" pitchFamily="34" charset="-120"/>
+              </a:rPr>
+              <a:t>Phụ lục · GIF hiện có, video và âm thanh đề xuất</a:t>
+            </a:r>
+            <a:endParaRPr lang="en-US" sz="3600" dirty="0"/>
+          </a:p>
+        </p:txBody>
+      </p:sp>
+      <p:sp>
+        <p:nvSpPr>
+          <p:cNvPr id="5" name="Text 3"/>
+          <p:cNvSpPr txBox="1"/>
+          <p:nvPr/>
+        </p:nvSpPr>
+        <p:spPr>
+          <a:xfrm>
+            <a:off x="11109960" y="256032"/>
+            <a:ext cx="457200" cy="228600"/>
+          </a:xfrm>
+          <a:prstGeom prst="rect">
+            <a:avLst/>
+          </a:prstGeom>
+          <a:noFill/>
+          <a:ln/>
+        </p:spPr>
+        <p:txBody>
+          <a:bodyPr wrap="square" lIns="0" tIns="0" rIns="0" bIns="0" rtlCol="0" anchor="t">
+            <a:normAutofit/>
+          </a:bodyPr>
+          <a:lstStyle/>
+          <a:p>
+            <a:pPr marL="0" indent="0" algn="r">
+              <a:buNone/>
+            </a:pPr>
+            <a:r>
+              <a:rPr lang="en-US" sz="1000" b="1" dirty="0">
+                <a:solidFill>
+                  <a:srgbClr val="C9963A"/>
+                </a:solidFill>
+                <a:latin typeface="Arial" pitchFamily="34" charset="0"/>
+                <a:ea typeface="Arial" pitchFamily="34" charset="-122"/>
+                <a:cs typeface="Arial" pitchFamily="34" charset="-120"/>
+              </a:rPr>
+              <a:t>21</a:t>
+            </a:r>
+            <a:endParaRPr lang="en-US" sz="1000" dirty="0"/>
+          </a:p>
+        </p:txBody>
+      </p:sp>
+      <p:sp>
+        <p:nvSpPr>
+          <p:cNvPr id="6" name="Shape 4"/>
+          <p:cNvSpPr/>
+          <p:nvPr/>
+        </p:nvSpPr>
+        <p:spPr>
+          <a:xfrm>
+            <a:off x="612648" y="1408176"/>
+            <a:ext cx="10972800" cy="475488"/>
+          </a:xfrm>
+          <a:prstGeom prst="rect">
+            <a:avLst/>
+          </a:prstGeom>
+          <a:solidFill>
+            <a:srgbClr val="EEF2F7"/>
+          </a:solidFill>
+          <a:ln w="12700">
+            <a:solidFill>
+              <a:srgbClr val="D7DEE8"/>
+            </a:solidFill>
+            <a:prstDash val="solid"/>
+          </a:ln>
+        </p:spPr>
+      </p:sp>
+      <p:sp>
+        <p:nvSpPr>
+          <p:cNvPr id="7" name="Text 5"/>
+          <p:cNvSpPr txBox="1"/>
+          <p:nvPr/>
+        </p:nvSpPr>
+        <p:spPr>
+          <a:xfrm>
+            <a:off x="777240" y="1453896"/>
+            <a:ext cx="10652760" cy="384048"/>
+          </a:xfrm>
+          <a:prstGeom prst="rect">
+            <a:avLst/>
+          </a:prstGeom>
+          <a:noFill/>
+          <a:ln/>
+        </p:spPr>
+        <p:txBody>
+          <a:bodyPr wrap="square" lIns="0" tIns="0" rIns="0" bIns="0" rtlCol="0" anchor="ctr">
+            <a:normAutofit/>
+          </a:bodyPr>
+          <a:lstStyle/>
+          <a:p>
+            <a:pPr marL="0" indent="0" algn="l">
+              <a:buNone/>
+            </a:pPr>
+            <a:r>
+              <a:rPr lang="en-US" sz="1700" b="1" dirty="0">
+                <a:solidFill>
+                  <a:srgbClr val="0D2447"/>
+                </a:solidFill>
+                <a:latin typeface="Arial" pitchFamily="34" charset="0"/>
+                <a:ea typeface="Arial" pitchFamily="34" charset="-122"/>
+                <a:cs typeface="Arial" pitchFamily="34" charset="-120"/>
+              </a:rPr>
+              <a:t>GIF đã có; video và âm thanh chỉ là phương án bổ sung sau khi duyệt phạm vi.</a:t>
+            </a:r>
+            <a:endParaRPr lang="en-US" sz="1700" dirty="0"/>
+          </a:p>
+        </p:txBody>
+      </p:sp>
+      <p:sp>
+        <p:nvSpPr>
+          <p:cNvPr id="8" name="Shape 6"/>
+          <p:cNvSpPr/>
+          <p:nvPr/>
+        </p:nvSpPr>
+        <p:spPr>
+          <a:xfrm>
+            <a:off x="612648" y="6519672"/>
+            <a:ext cx="10972800" cy="0"/>
+          </a:xfrm>
+          <a:prstGeom prst="line">
+            <a:avLst/>
+          </a:prstGeom>
+          <a:noFill/>
+          <a:ln w="12700">
+            <a:solidFill>
+              <a:srgbClr val="D7DEE8"/>
+            </a:solidFill>
+            <a:prstDash val="solid"/>
+          </a:ln>
+        </p:spPr>
+      </p:sp>
+      <p:sp>
+        <p:nvSpPr>
+          <p:cNvPr id="9" name="Text 7"/>
+          <p:cNvSpPr txBox="1"/>
+          <p:nvPr/>
+        </p:nvSpPr>
+        <p:spPr>
+          <a:xfrm>
+            <a:off x="612648" y="6583680"/>
+            <a:ext cx="3566160" cy="146304"/>
+          </a:xfrm>
+          <a:prstGeom prst="rect">
+            <a:avLst/>
+          </a:prstGeom>
+          <a:noFill/>
+          <a:ln/>
+        </p:spPr>
+        <p:txBody>
+          <a:bodyPr wrap="square" lIns="0" tIns="0" rIns="0" bIns="0" rtlCol="0" anchor="t">
+            <a:normAutofit/>
+          </a:bodyPr>
+          <a:lstStyle/>
+          <a:p>
+            <a:pPr marL="0" indent="0" algn="l">
+              <a:buNone/>
+            </a:pPr>
+            <a:r>
+              <a:rPr lang="en-US" sz="820" b="1" dirty="0">
+                <a:solidFill>
+                  <a:srgbClr val="5B6B80"/>
+                </a:solidFill>
+                <a:latin typeface="Arial" pitchFamily="34" charset="0"/>
+                <a:ea typeface="Arial" pitchFamily="34" charset="-122"/>
+                <a:cs typeface="Arial" pitchFamily="34" charset="-120"/>
+              </a:rPr>
+              <a:t>PHỤ LỤC / DỰ PHÒNG</a:t>
+            </a:r>
+            <a:endParaRPr lang="en-US" sz="820" dirty="0"/>
+          </a:p>
+        </p:txBody>
+      </p:sp>
+      <p:sp>
+        <p:nvSpPr>
+          <p:cNvPr id="10" name="Text 8"/>
+          <p:cNvSpPr txBox="1"/>
+          <p:nvPr/>
+        </p:nvSpPr>
+        <p:spPr>
+          <a:xfrm>
+            <a:off x="3794760" y="6583680"/>
+            <a:ext cx="7086600" cy="146304"/>
+          </a:xfrm>
+          <a:prstGeom prst="rect">
+            <a:avLst/>
+          </a:prstGeom>
+          <a:noFill/>
+          <a:ln/>
+        </p:spPr>
+        <p:txBody>
+          <a:bodyPr wrap="square" lIns="0" tIns="0" rIns="0" bIns="0" rtlCol="0" anchor="t">
+            <a:normAutofit/>
+          </a:bodyPr>
+          <a:lstStyle/>
+          <a:p>
+            <a:pPr marL="0" indent="0" algn="ctr">
+              <a:buNone/>
+            </a:pPr>
+            <a:r>
+              <a:rPr lang="en-US" sz="760" dirty="0">
+                <a:solidFill>
+                  <a:srgbClr val="5B6B80"/>
+                </a:solidFill>
+                <a:latin typeface="Arial" pitchFamily="34" charset="0"/>
+                <a:ea typeface="Arial" pitchFamily="34" charset="-122"/>
+                <a:cs typeface="Arial" pitchFamily="34" charset="-120"/>
+              </a:rPr>
+              <a:t>PL-PP-DA-PHUONG-TIEN</a:t>
+            </a:r>
+            <a:endParaRPr lang="en-US" sz="760" dirty="0"/>
+          </a:p>
+        </p:txBody>
+      </p:sp>
+      <p:sp>
+        <p:nvSpPr>
+          <p:cNvPr id="11" name="Text 9"/>
+          <p:cNvSpPr txBox="1"/>
+          <p:nvPr/>
+        </p:nvSpPr>
+        <p:spPr>
+          <a:xfrm>
+            <a:off x="11064240" y="6583680"/>
+            <a:ext cx="502920" cy="146304"/>
+          </a:xfrm>
+          <a:prstGeom prst="rect">
+            <a:avLst/>
+          </a:prstGeom>
+          <a:noFill/>
+          <a:ln/>
+        </p:spPr>
+        <p:txBody>
+          <a:bodyPr wrap="square" lIns="0" tIns="0" rIns="0" bIns="0" rtlCol="0" anchor="t">
+            <a:normAutofit/>
+          </a:bodyPr>
+          <a:lstStyle/>
+          <a:p>
+            <a:pPr marL="0" indent="0" algn="r">
+              <a:buNone/>
+            </a:pPr>
+            <a:r>
+              <a:rPr lang="en-US" sz="820" dirty="0">
+                <a:solidFill>
+                  <a:srgbClr val="5B6B80"/>
+                </a:solidFill>
+                <a:latin typeface="Arial" pitchFamily="34" charset="0"/>
+                <a:ea typeface="Arial" pitchFamily="34" charset="-122"/>
+                <a:cs typeface="Arial" pitchFamily="34" charset="-120"/>
+              </a:rPr>
+              <a:t>21</a:t>
+            </a:r>
+            <a:endParaRPr lang="en-US" sz="820" dirty="0"/>
+          </a:p>
+        </p:txBody>
+      </p:sp>
+      <p:sp>
+        <p:nvSpPr>
+          <p:cNvPr id="13" name="Shape 10"/>
+          <p:cNvSpPr/>
+          <p:nvPr/>
+        </p:nvSpPr>
+        <p:spPr>
+          <a:xfrm>
+            <a:off x="658368" y="1993392"/>
+            <a:ext cx="1920240" cy="676656"/>
+          </a:xfrm>
+          <a:prstGeom prst="roundRect">
+            <a:avLst>
+              <a:gd name="adj" fmla="val 5405"/>
+            </a:avLst>
+          </a:prstGeom>
+          <a:solidFill>
+            <a:srgbClr val="FFFFFF"/>
+          </a:solidFill>
+          <a:ln w="12700">
+            <a:solidFill>
+              <a:srgbClr val="15355F"/>
+            </a:solidFill>
+            <a:prstDash val="solid"/>
+          </a:ln>
+        </p:spPr>
+      </p:sp>
+      <p:sp>
+        <p:nvSpPr>
+          <p:cNvPr id="14" name="Text 11"/>
+          <p:cNvSpPr txBox="1"/>
+          <p:nvPr/>
+        </p:nvSpPr>
+        <p:spPr>
+          <a:xfrm>
+            <a:off x="768096" y="2057400"/>
+            <a:ext cx="1700784" cy="548640"/>
+          </a:xfrm>
+          <a:prstGeom prst="rect">
+            <a:avLst/>
+          </a:prstGeom>
+          <a:noFill/>
+          <a:ln/>
+        </p:spPr>
+        <p:txBody>
+          <a:bodyPr wrap="square" lIns="0" tIns="0" rIns="0" bIns="0" rtlCol="0" anchor="ctr">
+            <a:normAutofit/>
+          </a:bodyPr>
+          <a:lstStyle/>
+          <a:p>
+            <a:pPr marL="0" indent="0" algn="ctr">
+              <a:buNone/>
+            </a:pPr>
+            <a:r>
+              <a:rPr lang="en-US" sz="1650" b="1" dirty="0">
+                <a:solidFill>
+                  <a:srgbClr val="07182F"/>
+                </a:solidFill>
+                <a:latin typeface="Arial" pitchFamily="34" charset="0"/>
+                <a:ea typeface="Arial" pitchFamily="34" charset="-122"/>
+                <a:cs typeface="Arial" pitchFamily="34" charset="-120"/>
+              </a:rPr>
+              <a:t>Mục tiêu, kịch bản</a:t>
+            </a:r>
+            <a:endParaRPr lang="en-US" sz="1650" dirty="0"/>
+          </a:p>
+        </p:txBody>
+      </p:sp>
+      <p:sp>
+        <p:nvSpPr>
+          <p:cNvPr id="15" name="Shape 12"/>
+          <p:cNvSpPr/>
+          <p:nvPr/>
+        </p:nvSpPr>
+        <p:spPr>
+          <a:xfrm>
+            <a:off x="2642616" y="2331720"/>
+            <a:ext cx="201168" cy="0"/>
+          </a:xfrm>
+          <a:prstGeom prst="line">
+            <a:avLst/>
+          </a:prstGeom>
+          <a:noFill/>
+          <a:ln w="12700">
+            <a:solidFill>
+              <a:srgbClr val="C9963A"/>
+            </a:solidFill>
+            <a:prstDash val="solid"/>
+            <a:tailEnd type="triangle"/>
+          </a:ln>
+        </p:spPr>
+      </p:sp>
+      <p:sp>
+        <p:nvSpPr>
+          <p:cNvPr id="16" name="Shape 13"/>
+          <p:cNvSpPr/>
+          <p:nvPr/>
+        </p:nvSpPr>
+        <p:spPr>
+          <a:xfrm>
+            <a:off x="2907792" y="1993392"/>
+            <a:ext cx="1920240" cy="676656"/>
+          </a:xfrm>
+          <a:prstGeom prst="roundRect">
+            <a:avLst>
+              <a:gd name="adj" fmla="val 5405"/>
+            </a:avLst>
+          </a:prstGeom>
+          <a:solidFill>
+            <a:srgbClr val="FFFFFF"/>
+          </a:solidFill>
+          <a:ln w="12700">
+            <a:solidFill>
+              <a:srgbClr val="15355F"/>
+            </a:solidFill>
+            <a:prstDash val="solid"/>
+          </a:ln>
+        </p:spPr>
+      </p:sp>
+      <p:sp>
+        <p:nvSpPr>
+          <p:cNvPr id="17" name="Text 14"/>
+          <p:cNvSpPr txBox="1"/>
+          <p:nvPr/>
+        </p:nvSpPr>
+        <p:spPr>
+          <a:xfrm>
+            <a:off x="3017520" y="2057400"/>
+            <a:ext cx="1700784" cy="548640"/>
+          </a:xfrm>
+          <a:prstGeom prst="rect">
+            <a:avLst/>
+          </a:prstGeom>
+          <a:noFill/>
+          <a:ln/>
+        </p:spPr>
+        <p:txBody>
+          <a:bodyPr wrap="square" lIns="0" tIns="0" rIns="0" bIns="0" rtlCol="0" anchor="ctr">
+            <a:normAutofit/>
+          </a:bodyPr>
+          <a:lstStyle/>
+          <a:p>
+            <a:pPr marL="0" indent="0" algn="ctr">
+              <a:buNone/>
+            </a:pPr>
+            <a:r>
+              <a:rPr lang="en-US" sz="1650" b="1" dirty="0">
+                <a:solidFill>
+                  <a:srgbClr val="07182F"/>
+                </a:solidFill>
+                <a:latin typeface="Arial" pitchFamily="34" charset="0"/>
+                <a:ea typeface="Arial" pitchFamily="34" charset="-122"/>
+                <a:cs typeface="Arial" pitchFamily="34" charset="-120"/>
+              </a:rPr>
+              <a:t>Dựng / ghi, thu âm</a:t>
+            </a:r>
+            <a:endParaRPr lang="en-US" sz="1650" dirty="0"/>
+          </a:p>
+        </p:txBody>
+      </p:sp>
+      <p:sp>
+        <p:nvSpPr>
+          <p:cNvPr id="18" name="Shape 15"/>
+          <p:cNvSpPr/>
+          <p:nvPr/>
+        </p:nvSpPr>
+        <p:spPr>
+          <a:xfrm>
+            <a:off x="4892040" y="2331720"/>
+            <a:ext cx="201168" cy="0"/>
+          </a:xfrm>
+          <a:prstGeom prst="line">
+            <a:avLst/>
+          </a:prstGeom>
+          <a:noFill/>
+          <a:ln w="12700">
+            <a:solidFill>
+              <a:srgbClr val="C9963A"/>
+            </a:solidFill>
+            <a:prstDash val="solid"/>
+            <a:tailEnd type="triangle"/>
+          </a:ln>
+        </p:spPr>
+      </p:sp>
+      <p:sp>
+        <p:nvSpPr>
+          <p:cNvPr id="19" name="Shape 16"/>
+          <p:cNvSpPr/>
+          <p:nvPr/>
+        </p:nvSpPr>
+        <p:spPr>
+          <a:xfrm>
+            <a:off x="5157216" y="1993392"/>
+            <a:ext cx="1920240" cy="676656"/>
+          </a:xfrm>
+          <a:prstGeom prst="roundRect">
+            <a:avLst>
+              <a:gd name="adj" fmla="val 5405"/>
+            </a:avLst>
+          </a:prstGeom>
+          <a:solidFill>
+            <a:srgbClr val="FFFFFF"/>
+          </a:solidFill>
+          <a:ln w="12700">
+            <a:solidFill>
+              <a:srgbClr val="15355F"/>
+            </a:solidFill>
+            <a:prstDash val="solid"/>
+          </a:ln>
+        </p:spPr>
+      </p:sp>
+      <p:sp>
+        <p:nvSpPr>
+          <p:cNvPr id="20" name="Text 17"/>
+          <p:cNvSpPr txBox="1"/>
+          <p:nvPr/>
+        </p:nvSpPr>
+        <p:spPr>
+          <a:xfrm>
+            <a:off x="5266944" y="2057400"/>
+            <a:ext cx="1700784" cy="548640"/>
+          </a:xfrm>
+          <a:prstGeom prst="rect">
+            <a:avLst/>
+          </a:prstGeom>
+          <a:noFill/>
+          <a:ln/>
+        </p:spPr>
+        <p:txBody>
+          <a:bodyPr wrap="square" lIns="0" tIns="0" rIns="0" bIns="0" rtlCol="0" anchor="ctr">
+            <a:normAutofit/>
+          </a:bodyPr>
+          <a:lstStyle/>
+          <a:p>
+            <a:pPr marL="0" indent="0" algn="ctr">
+              <a:buNone/>
+            </a:pPr>
+            <a:r>
+              <a:rPr lang="en-US" sz="1650" b="1" dirty="0">
+                <a:solidFill>
+                  <a:srgbClr val="07182F"/>
+                </a:solidFill>
+                <a:latin typeface="Arial" pitchFamily="34" charset="0"/>
+                <a:ea typeface="Arial" pitchFamily="34" charset="-122"/>
+                <a:cs typeface="Arial" pitchFamily="34" charset="-120"/>
+              </a:rPr>
+              <a:t>Khung hình / dựng</a:t>
+            </a:r>
+            <a:endParaRPr lang="en-US" sz="1650" dirty="0"/>
+          </a:p>
+        </p:txBody>
+      </p:sp>
+      <p:sp>
+        <p:nvSpPr>
+          <p:cNvPr id="21" name="Shape 18"/>
+          <p:cNvSpPr/>
+          <p:nvPr/>
+        </p:nvSpPr>
+        <p:spPr>
+          <a:xfrm>
+            <a:off x="7141464" y="2331720"/>
+            <a:ext cx="201168" cy="0"/>
+          </a:xfrm>
+          <a:prstGeom prst="line">
+            <a:avLst/>
+          </a:prstGeom>
+          <a:noFill/>
+          <a:ln w="12700">
+            <a:solidFill>
+              <a:srgbClr val="C9963A"/>
+            </a:solidFill>
+            <a:prstDash val="solid"/>
+            <a:tailEnd type="triangle"/>
+          </a:ln>
+        </p:spPr>
+      </p:sp>
+      <p:sp>
+        <p:nvSpPr>
+          <p:cNvPr id="22" name="Shape 19"/>
+          <p:cNvSpPr/>
+          <p:nvPr/>
+        </p:nvSpPr>
+        <p:spPr>
+          <a:xfrm>
+            <a:off x="7406640" y="1993392"/>
+            <a:ext cx="1920240" cy="676656"/>
+          </a:xfrm>
+          <a:prstGeom prst="roundRect">
+            <a:avLst>
+              <a:gd name="adj" fmla="val 5405"/>
+            </a:avLst>
+          </a:prstGeom>
+          <a:solidFill>
+            <a:srgbClr val="FFFFFF"/>
+          </a:solidFill>
+          <a:ln w="12700">
+            <a:solidFill>
+              <a:srgbClr val="15355F"/>
+            </a:solidFill>
+            <a:prstDash val="solid"/>
+          </a:ln>
+        </p:spPr>
+      </p:sp>
+      <p:sp>
+        <p:nvSpPr>
+          <p:cNvPr id="23" name="Text 20"/>
+          <p:cNvSpPr txBox="1"/>
+          <p:nvPr/>
+        </p:nvSpPr>
+        <p:spPr>
+          <a:xfrm>
+            <a:off x="7516368" y="2057400"/>
+            <a:ext cx="1700784" cy="548640"/>
+          </a:xfrm>
+          <a:prstGeom prst="rect">
+            <a:avLst/>
+          </a:prstGeom>
+          <a:noFill/>
+          <a:ln/>
+        </p:spPr>
+        <p:txBody>
+          <a:bodyPr wrap="square" lIns="0" tIns="0" rIns="0" bIns="0" rtlCol="0" anchor="ctr">
+            <a:normAutofit/>
+          </a:bodyPr>
+          <a:lstStyle/>
+          <a:p>
+            <a:pPr marL="0" indent="0" algn="ctr">
+              <a:buNone/>
+            </a:pPr>
+            <a:r>
+              <a:rPr lang="en-US" sz="1650" b="1" dirty="0">
+                <a:solidFill>
+                  <a:srgbClr val="07182F"/>
+                </a:solidFill>
+                <a:latin typeface="Arial" pitchFamily="34" charset="0"/>
+                <a:ea typeface="Arial" pitchFamily="34" charset="-122"/>
+                <a:cs typeface="Arial" pitchFamily="34" charset="-120"/>
+              </a:rPr>
+              <a:t>Duyệt, thay thế</a:t>
+            </a:r>
+            <a:endParaRPr lang="en-US" sz="1650" dirty="0"/>
+          </a:p>
+        </p:txBody>
+      </p:sp>
+      <p:sp>
+        <p:nvSpPr>
+          <p:cNvPr id="24" name="Shape 21"/>
+          <p:cNvSpPr/>
+          <p:nvPr/>
+        </p:nvSpPr>
+        <p:spPr>
+          <a:xfrm>
+            <a:off x="9390888" y="2331720"/>
+            <a:ext cx="201168" cy="0"/>
+          </a:xfrm>
+          <a:prstGeom prst="line">
+            <a:avLst/>
+          </a:prstGeom>
+          <a:noFill/>
+          <a:ln w="12700">
+            <a:solidFill>
+              <a:srgbClr val="C9963A"/>
+            </a:solidFill>
+            <a:prstDash val="solid"/>
+            <a:tailEnd type="triangle"/>
+          </a:ln>
+        </p:spPr>
+      </p:sp>
+      <p:sp>
+        <p:nvSpPr>
+          <p:cNvPr id="25" name="Shape 22"/>
+          <p:cNvSpPr/>
+          <p:nvPr/>
+        </p:nvSpPr>
+        <p:spPr>
+          <a:xfrm>
+            <a:off x="9656064" y="1993392"/>
+            <a:ext cx="1920240" cy="676656"/>
+          </a:xfrm>
+          <a:prstGeom prst="roundRect">
+            <a:avLst>
+              <a:gd name="adj" fmla="val 5405"/>
+            </a:avLst>
+          </a:prstGeom>
+          <a:solidFill>
+            <a:srgbClr val="07182F"/>
+          </a:solidFill>
+          <a:ln w="12700">
+            <a:solidFill>
+              <a:srgbClr val="15355F"/>
+            </a:solidFill>
+            <a:prstDash val="solid"/>
+          </a:ln>
+        </p:spPr>
+      </p:sp>
+      <p:sp>
+        <p:nvSpPr>
+          <p:cNvPr id="26" name="Text 23"/>
+          <p:cNvSpPr txBox="1"/>
+          <p:nvPr/>
+        </p:nvSpPr>
+        <p:spPr>
+          <a:xfrm>
+            <a:off x="9765792" y="2057400"/>
+            <a:ext cx="1700784" cy="548640"/>
+          </a:xfrm>
+          <a:prstGeom prst="rect">
+            <a:avLst/>
+          </a:prstGeom>
+          <a:noFill/>
+          <a:ln/>
+        </p:spPr>
+        <p:txBody>
+          <a:bodyPr wrap="square" lIns="0" tIns="0" rIns="0" bIns="0" rtlCol="0" anchor="ctr">
+            <a:normAutofit/>
+          </a:bodyPr>
+          <a:lstStyle/>
+          <a:p>
+            <a:pPr marL="0" indent="0" algn="ctr">
+              <a:buNone/>
+            </a:pPr>
+            <a:r>
+              <a:rPr lang="en-US" sz="1650" b="1" dirty="0">
+                <a:solidFill>
+                  <a:srgbClr val="FFFFFF"/>
+                </a:solidFill>
+                <a:latin typeface="Arial" pitchFamily="34" charset="0"/>
+                <a:ea typeface="Arial" pitchFamily="34" charset="-122"/>
+                <a:cs typeface="Arial" pitchFamily="34" charset="-120"/>
+              </a:rPr>
+              <a:t>Xuất, kiểm ngoại tuyến</a:t>
+            </a:r>
+            <a:endParaRPr lang="en-US" sz="1650" dirty="0"/>
+          </a:p>
+        </p:txBody>
+      </p:sp>
+      <p:sp>
+        <p:nvSpPr>
+          <p:cNvPr id="27" name="Shape 24"/>
+          <p:cNvSpPr/>
+          <p:nvPr/>
+        </p:nvSpPr>
+        <p:spPr>
+          <a:xfrm>
+            <a:off x="658368" y="2852928"/>
+            <a:ext cx="5303520" cy="1335024"/>
+          </a:xfrm>
+          <a:prstGeom prst="roundRect">
+            <a:avLst>
+              <a:gd name="adj" fmla="val 2740"/>
+            </a:avLst>
+          </a:prstGeom>
+          <a:solidFill>
+            <a:srgbClr val="FFFFFF"/>
+          </a:solidFill>
+          <a:ln w="12700">
+            <a:solidFill>
+              <a:srgbClr val="2980B9"/>
+            </a:solidFill>
+            <a:prstDash val="solid"/>
+          </a:ln>
+        </p:spPr>
+      </p:sp>
+      <p:sp>
+        <p:nvSpPr>
+          <p:cNvPr id="28" name="Text 25"/>
+          <p:cNvSpPr txBox="1"/>
+          <p:nvPr/>
+        </p:nvSpPr>
+        <p:spPr>
+          <a:xfrm>
+            <a:off x="859536" y="2971800"/>
+            <a:ext cx="4901184" cy="274320"/>
+          </a:xfrm>
+          <a:prstGeom prst="rect">
+            <a:avLst/>
+          </a:prstGeom>
+          <a:noFill/>
+          <a:ln/>
+        </p:spPr>
+        <p:txBody>
+          <a:bodyPr wrap="square" lIns="0" tIns="0" rIns="0" bIns="0" rtlCol="0" anchor="t">
+            <a:normAutofit/>
+          </a:bodyPr>
+          <a:lstStyle/>
+          <a:p>
+            <a:pPr marL="0" indent="0" algn="l">
+              <a:buNone/>
+            </a:pPr>
+            <a:r>
+              <a:rPr lang="en-US" sz="1800" b="1" dirty="0">
+                <a:solidFill>
+                  <a:srgbClr val="07182F"/>
+                </a:solidFill>
+                <a:latin typeface="Georgia" pitchFamily="34" charset="0"/>
+                <a:ea typeface="Georgia" pitchFamily="34" charset="-122"/>
+                <a:cs typeface="Georgia" pitchFamily="34" charset="-120"/>
+              </a:rPr>
+              <a:t>GIF · đã có tài nguyên</a:t>
+            </a:r>
+            <a:endParaRPr lang="en-US" sz="1800" dirty="0"/>
+          </a:p>
+        </p:txBody>
+      </p:sp>
+      <p:sp>
+        <p:nvSpPr>
+          <p:cNvPr id="29" name="Text 26"/>
+          <p:cNvSpPr txBox="1"/>
+          <p:nvPr/>
+        </p:nvSpPr>
+        <p:spPr>
+          <a:xfrm>
+            <a:off x="859536" y="3328416"/>
+            <a:ext cx="4901184" cy="740664"/>
+          </a:xfrm>
+          <a:prstGeom prst="rect">
+            <a:avLst/>
+          </a:prstGeom>
+          <a:noFill/>
+          <a:ln/>
+        </p:spPr>
+        <p:txBody>
+          <a:bodyPr wrap="square" lIns="0" tIns="0" rIns="0" bIns="0" rtlCol="0" anchor="t">
+            <a:normAutofit/>
+          </a:bodyPr>
+          <a:lstStyle/>
+          <a:p>
+            <a:pPr marL="0" indent="0" algn="l">
+              <a:buNone/>
+            </a:pPr>
+            <a:r>
+              <a:rPr lang="en-US" sz="1600" dirty="0">
+                <a:solidFill>
+                  <a:srgbClr val="243247"/>
+                </a:solidFill>
+                <a:latin typeface="Arial" pitchFamily="34" charset="0"/>
+                <a:ea typeface="Arial" pitchFamily="34" charset="-122"/>
+                <a:cs typeface="Arial" pitchFamily="34" charset="-120"/>
+              </a:rPr>
+              <a:t>20 GIF: dựng hình học/chuyển động bằng Python → khung hình → duyệt → xuất bản. PNG dự phòng hỗ trợ giảm chuyển động và lỗi tải.</a:t>
+            </a:r>
+            <a:endParaRPr lang="en-US" sz="1600" dirty="0"/>
+          </a:p>
+        </p:txBody>
+      </p:sp>
+      <p:sp>
+        <p:nvSpPr>
+          <p:cNvPr id="30" name="Shape 27"/>
+          <p:cNvSpPr/>
+          <p:nvPr/>
+        </p:nvSpPr>
+        <p:spPr>
+          <a:xfrm>
+            <a:off x="6236208" y="2852928"/>
+            <a:ext cx="5303520" cy="1335024"/>
+          </a:xfrm>
+          <a:prstGeom prst="roundRect">
+            <a:avLst>
+              <a:gd name="adj" fmla="val 2740"/>
+            </a:avLst>
+          </a:prstGeom>
+          <a:solidFill>
+            <a:srgbClr val="FFFFFF"/>
+          </a:solidFill>
+          <a:ln w="12700">
+            <a:solidFill>
+              <a:srgbClr val="27AE60"/>
+            </a:solidFill>
+            <a:prstDash val="solid"/>
+          </a:ln>
+        </p:spPr>
+      </p:sp>
+      <p:sp>
+        <p:nvSpPr>
+          <p:cNvPr id="31" name="Text 28"/>
+          <p:cNvSpPr txBox="1"/>
+          <p:nvPr/>
+        </p:nvSpPr>
+        <p:spPr>
+          <a:xfrm>
+            <a:off x="6437376" y="2971800"/>
+            <a:ext cx="4901184" cy="274320"/>
+          </a:xfrm>
+          <a:prstGeom prst="rect">
+            <a:avLst/>
+          </a:prstGeom>
+          <a:noFill/>
+          <a:ln/>
+        </p:spPr>
+        <p:txBody>
+          <a:bodyPr wrap="square" lIns="0" tIns="0" rIns="0" bIns="0" rtlCol="0" anchor="t">
+            <a:normAutofit/>
+          </a:bodyPr>
+          <a:lstStyle/>
+          <a:p>
+            <a:pPr marL="0" indent="0" algn="l">
+              <a:buNone/>
+            </a:pPr>
+            <a:r>
+              <a:rPr lang="en-US" sz="1800" b="1" dirty="0">
+                <a:solidFill>
+                  <a:srgbClr val="07182F"/>
+                </a:solidFill>
+                <a:latin typeface="Georgia" pitchFamily="34" charset="0"/>
+                <a:ea typeface="Georgia" pitchFamily="34" charset="-122"/>
+                <a:cs typeface="Georgia" pitchFamily="34" charset="-120"/>
+              </a:rPr>
+              <a:t>Video/âm thanh · kiểm kê giới hạn</a:t>
+            </a:r>
+            <a:endParaRPr lang="en-US" sz="1800" dirty="0"/>
+          </a:p>
+        </p:txBody>
+      </p:sp>
+      <p:sp>
+        <p:nvSpPr>
+          <p:cNvPr id="32" name="Text 29"/>
+          <p:cNvSpPr txBox="1"/>
+          <p:nvPr/>
+        </p:nvSpPr>
+        <p:spPr>
+          <a:xfrm>
+            <a:off x="6437376" y="3328416"/>
+            <a:ext cx="4901184" cy="740664"/>
+          </a:xfrm>
+          <a:prstGeom prst="rect">
+            <a:avLst/>
+          </a:prstGeom>
+          <a:noFill/>
+          <a:ln/>
+        </p:spPr>
+        <p:txBody>
+          <a:bodyPr wrap="square" lIns="0" tIns="0" rIns="0" bIns="0" rtlCol="0" anchor="t">
+            <a:normAutofit/>
+          </a:bodyPr>
+          <a:lstStyle/>
+          <a:p>
+            <a:pPr marL="0" indent="0" algn="l">
+              <a:buNone/>
+            </a:pPr>
+            <a:r>
+              <a:rPr lang="en-US" sz="1600" dirty="0">
+                <a:solidFill>
+                  <a:srgbClr val="243247"/>
+                </a:solidFill>
+                <a:latin typeface="Arial" pitchFamily="34" charset="0"/>
+                <a:ea typeface="Arial" pitchFamily="34" charset="-122"/>
+                <a:cs typeface="Arial" pitchFamily="34" charset="-120"/>
+              </a:rPr>
+              <a:t>0 tệp trong danh mục gói ứng viên theo các đuôi đã kiểm kê. Bốn pilot đa phương tiện không phải bốn video; GIF không phải video.</a:t>
+            </a:r>
+            <a:endParaRPr lang="en-US" sz="1600" dirty="0"/>
+          </a:p>
+        </p:txBody>
+      </p:sp>
+      <p:sp>
+        <p:nvSpPr>
+          <p:cNvPr id="33" name="Shape 30"/>
+          <p:cNvSpPr/>
+          <p:nvPr/>
+        </p:nvSpPr>
+        <p:spPr>
+          <a:xfrm>
+            <a:off x="658368" y="4352544"/>
+            <a:ext cx="5303520" cy="1335024"/>
+          </a:xfrm>
+          <a:prstGeom prst="roundRect">
+            <a:avLst>
+              <a:gd name="adj" fmla="val 2740"/>
+            </a:avLst>
+          </a:prstGeom>
+          <a:solidFill>
+            <a:srgbClr val="FFFFFF"/>
+          </a:solidFill>
+          <a:ln w="12700">
+            <a:solidFill>
+              <a:srgbClr val="8E44AD"/>
+            </a:solidFill>
+            <a:prstDash val="solid"/>
+          </a:ln>
+        </p:spPr>
+      </p:sp>
+      <p:sp>
+        <p:nvSpPr>
+          <p:cNvPr id="34" name="Text 31"/>
+          <p:cNvSpPr txBox="1"/>
+          <p:nvPr/>
+        </p:nvSpPr>
+        <p:spPr>
+          <a:xfrm>
+            <a:off x="859536" y="4471416"/>
+            <a:ext cx="4901184" cy="274320"/>
+          </a:xfrm>
+          <a:prstGeom prst="rect">
+            <a:avLst/>
+          </a:prstGeom>
+          <a:noFill/>
+          <a:ln/>
+        </p:spPr>
+        <p:txBody>
+          <a:bodyPr wrap="square" lIns="0" tIns="0" rIns="0" bIns="0" rtlCol="0" anchor="t">
+            <a:normAutofit/>
+          </a:bodyPr>
+          <a:lstStyle/>
+          <a:p>
+            <a:pPr marL="0" indent="0" algn="l">
+              <a:buNone/>
+            </a:pPr>
+            <a:r>
+              <a:rPr lang="en-US" sz="1800" b="1" dirty="0">
+                <a:solidFill>
+                  <a:srgbClr val="07182F"/>
+                </a:solidFill>
+                <a:latin typeface="Georgia" pitchFamily="34" charset="0"/>
+                <a:ea typeface="Georgia" pitchFamily="34" charset="-122"/>
+                <a:cs typeface="Georgia" pitchFamily="34" charset="-120"/>
+              </a:rPr>
+              <a:t>Bổ sung sau khi duyệt phạm vi</a:t>
+            </a:r>
+            <a:endParaRPr lang="en-US" sz="1800" dirty="0"/>
+          </a:p>
+        </p:txBody>
+      </p:sp>
+      <p:sp>
+        <p:nvSpPr>
+          <p:cNvPr id="35" name="Text 32"/>
+          <p:cNvSpPr txBox="1"/>
+          <p:nvPr/>
+        </p:nvSpPr>
+        <p:spPr>
+          <a:xfrm>
+            <a:off x="859536" y="4828032"/>
+            <a:ext cx="4901184" cy="740664"/>
+          </a:xfrm>
+          <a:prstGeom prst="rect">
+            <a:avLst/>
+          </a:prstGeom>
+          <a:noFill/>
+          <a:ln/>
+        </p:spPr>
+        <p:txBody>
+          <a:bodyPr wrap="square" lIns="0" tIns="0" rIns="0" bIns="0" rtlCol="0" anchor="t">
+            <a:normAutofit/>
+          </a:bodyPr>
+          <a:lstStyle/>
+          <a:p>
+            <a:pPr marL="0" indent="0" algn="l">
+              <a:buNone/>
+            </a:pPr>
+            <a:r>
+              <a:rPr lang="en-US" sz="1600" dirty="0">
+                <a:solidFill>
+                  <a:srgbClr val="243247"/>
+                </a:solidFill>
+                <a:latin typeface="Arial" pitchFamily="34" charset="0"/>
+                <a:ea typeface="Arial" pitchFamily="34" charset="-122"/>
+                <a:cs typeface="Arial" pitchFamily="34" charset="-120"/>
+              </a:rPr>
+              <a:t>Kịch bản/lời đọc → ghi hình/thu âm → dựng, đồng bộ → duyệt cơ học, quyền dùng → MP4/H.264 + AAC; OBS/FFmpeg là lựa chọn đề xuất.</a:t>
+            </a:r>
+            <a:endParaRPr lang="en-US" sz="1600" dirty="0"/>
+          </a:p>
+        </p:txBody>
+      </p:sp>
+      <p:sp>
+        <p:nvSpPr>
+          <p:cNvPr id="36" name="Shape 33"/>
+          <p:cNvSpPr/>
+          <p:nvPr/>
+        </p:nvSpPr>
+        <p:spPr>
+          <a:xfrm>
+            <a:off x="6236208" y="4352544"/>
+            <a:ext cx="5303520" cy="1335024"/>
+          </a:xfrm>
+          <a:prstGeom prst="roundRect">
+            <a:avLst>
+              <a:gd name="adj" fmla="val 2740"/>
+            </a:avLst>
+          </a:prstGeom>
+          <a:solidFill>
+            <a:srgbClr val="FFFFFF"/>
+          </a:solidFill>
+          <a:ln w="12700">
+            <a:solidFill>
+              <a:srgbClr val="C9963A"/>
+            </a:solidFill>
+            <a:prstDash val="solid"/>
+          </a:ln>
+        </p:spPr>
+      </p:sp>
+      <p:sp>
+        <p:nvSpPr>
+          <p:cNvPr id="37" name="Text 34"/>
+          <p:cNvSpPr txBox="1"/>
+          <p:nvPr/>
+        </p:nvSpPr>
+        <p:spPr>
+          <a:xfrm>
+            <a:off x="6437376" y="4471416"/>
+            <a:ext cx="4901184" cy="274320"/>
+          </a:xfrm>
+          <a:prstGeom prst="rect">
+            <a:avLst/>
+          </a:prstGeom>
+          <a:noFill/>
+          <a:ln/>
+        </p:spPr>
+        <p:txBody>
+          <a:bodyPr wrap="square" lIns="0" tIns="0" rIns="0" bIns="0" rtlCol="0" anchor="t">
+            <a:normAutofit/>
+          </a:bodyPr>
+          <a:lstStyle/>
+          <a:p>
+            <a:pPr marL="0" indent="0" algn="l">
+              <a:buNone/>
+            </a:pPr>
+            <a:r>
+              <a:rPr lang="en-US" sz="1800" b="1" dirty="0">
+                <a:solidFill>
+                  <a:srgbClr val="07182F"/>
+                </a:solidFill>
+                <a:latin typeface="Georgia" pitchFamily="34" charset="0"/>
+                <a:ea typeface="Georgia" pitchFamily="34" charset="-122"/>
+                <a:cs typeface="Georgia" pitchFamily="34" charset="-120"/>
+              </a:rPr>
+              <a:t>Tiếp cận và ngoại tuyến</a:t>
+            </a:r>
+            <a:endParaRPr lang="en-US" sz="1800" dirty="0"/>
+          </a:p>
+        </p:txBody>
+      </p:sp>
+      <p:sp>
+        <p:nvSpPr>
+          <p:cNvPr id="38" name="Text 35"/>
+          <p:cNvSpPr txBox="1"/>
+          <p:nvPr/>
+        </p:nvSpPr>
+        <p:spPr>
+          <a:xfrm>
+            <a:off x="6437376" y="4828032"/>
+            <a:ext cx="4901184" cy="740664"/>
+          </a:xfrm>
+          <a:prstGeom prst="rect">
+            <a:avLst/>
+          </a:prstGeom>
+          <a:noFill/>
+          <a:ln/>
+        </p:spPr>
+        <p:txBody>
+          <a:bodyPr wrap="square" lIns="0" tIns="0" rIns="0" bIns="0" rtlCol="0" anchor="t">
+            <a:normAutofit/>
+          </a:bodyPr>
+          <a:lstStyle/>
+          <a:p>
+            <a:pPr marL="0" indent="0" algn="l">
+              <a:buNone/>
+            </a:pPr>
+            <a:r>
+              <a:rPr lang="en-US" sz="1600" dirty="0">
+                <a:solidFill>
+                  <a:srgbClr val="243247"/>
+                </a:solidFill>
+                <a:latin typeface="Arial" pitchFamily="34" charset="0"/>
+                <a:ea typeface="Arial" pitchFamily="34" charset="-122"/>
+                <a:cs typeface="Arial" pitchFamily="34" charset="-120"/>
+              </a:rPr>
+              <a:t>Phụ đề, bản chép lời, mô tả tương đương; người biên soạn kiểm thuật ngữ/đơn vị. Phát theo yêu cầu, không tự phát âm; đóng gói cục bộ.</a:t>
+            </a:r>
+            <a:endParaRPr lang="en-US" sz="1600" dirty="0"/>
+          </a:p>
+        </p:txBody>
+      </p:sp>
+      <p:sp>
+        <p:nvSpPr>
+          <p:cNvPr id="39" name="Shape 36"/>
+          <p:cNvSpPr/>
+          <p:nvPr/>
+        </p:nvSpPr>
+        <p:spPr>
+          <a:xfrm>
+            <a:off x="658368" y="5852160"/>
+            <a:ext cx="10881360" cy="365760"/>
+          </a:xfrm>
+          <a:prstGeom prst="roundRect">
+            <a:avLst>
+              <a:gd name="adj" fmla="val 10000"/>
+            </a:avLst>
+          </a:prstGeom>
+          <a:solidFill>
+            <a:srgbClr val="FFF4E8"/>
+          </a:solidFill>
+          <a:ln w="12700">
+            <a:solidFill>
+              <a:srgbClr val="9A5B00"/>
+            </a:solidFill>
+            <a:prstDash val="solid"/>
+          </a:ln>
+        </p:spPr>
+      </p:sp>
+      <p:sp>
+        <p:nvSpPr>
+          <p:cNvPr id="40" name="Text 37"/>
+          <p:cNvSpPr txBox="1"/>
+          <p:nvPr/>
+        </p:nvSpPr>
+        <p:spPr>
+          <a:xfrm>
+            <a:off x="859536" y="5925312"/>
+            <a:ext cx="10479024" cy="219456"/>
+          </a:xfrm>
+          <a:prstGeom prst="rect">
+            <a:avLst/>
+          </a:prstGeom>
+          <a:noFill/>
+          <a:ln/>
+        </p:spPr>
+        <p:txBody>
+          <a:bodyPr wrap="square" lIns="0" tIns="0" rIns="0" bIns="0" rtlCol="0" anchor="t">
+            <a:normAutofit/>
+          </a:bodyPr>
+          <a:lstStyle/>
+          <a:p>
+            <a:pPr marL="0" indent="0" algn="ctr">
+              <a:buNone/>
+            </a:pPr>
+            <a:r>
+              <a:rPr lang="en-US" sz="1400" b="1" dirty="0">
+                <a:solidFill>
+                  <a:srgbClr val="9A5B00"/>
+                </a:solidFill>
+                <a:latin typeface="Arial" pitchFamily="34" charset="0"/>
+                <a:ea typeface="Arial" pitchFamily="34" charset="-122"/>
+                <a:cs typeface="Arial" pitchFamily="34" charset="-120"/>
+              </a:rPr>
+              <a:t>Chưa ghi nhận video/âm thanh theo phạm vi kiểm kê; không đổi kết luận QA vì thêm thuyết minh.</a:t>
+            </a:r>
+            <a:endParaRPr lang="en-US" sz="1400" dirty="0"/>
+          </a:p>
+        </p:txBody>
+      </p:sp>
+    </p:spTree>
+  </p:cSld>
+  <p:clrMapOvr>
+    <a:masterClrMapping/>
+  </p:clrMapOvr>
+</p:sld>
+</file>
+
+<file path=ppt/slides/slide22.xml><?xml version="1.0" encoding="utf-8"?>
+<p:sld xmlns:a="http://schemas.openxmlformats.org/drawingml/2006/main" xmlns:r="http://schemas.openxmlformats.org/officeDocument/2006/relationships" xmlns:p="http://schemas.openxmlformats.org/presentationml/2006/main">
+  <p:cSld name="Slide 22">
+    <p:bg>
+      <p:bgPr>
+        <a:solidFill>
+          <a:srgbClr val="F7F5EF"/>
+        </a:solidFill>
+        <a:effectLst/>
+      </p:bgPr>
+    </p:bg>
+    <p:spTree>
+      <p:nvGrpSpPr>
+        <p:cNvPr id="1" name=""/>
+        <p:cNvGrpSpPr/>
+        <p:nvPr/>
+      </p:nvGrpSpPr>
+      <p:grpSpPr>
+        <a:xfrm>
+          <a:off x="0" y="0"/>
+          <a:ext cx="0" cy="0"/>
+          <a:chOff x="0" y="0"/>
+          <a:chExt cx="0" cy="0"/>
+        </a:xfrm>
+      </p:grpSpPr>
+      <p:sp>
+        <p:nvSpPr>
+          <p:cNvPr id="2" name="Shape 0"/>
+          <p:cNvSpPr/>
+          <p:nvPr/>
+        </p:nvSpPr>
+        <p:spPr>
+          <a:xfrm>
+            <a:off x="612648" y="393192"/>
+            <a:ext cx="475488" cy="0"/>
+          </a:xfrm>
+          <a:prstGeom prst="line">
+            <a:avLst/>
+          </a:prstGeom>
+          <a:noFill/>
+          <a:ln w="12700">
+            <a:solidFill>
+              <a:srgbClr val="C9963A"/>
+            </a:solidFill>
+            <a:prstDash val="solid"/>
+          </a:ln>
+        </p:spPr>
+      </p:sp>
+      <p:sp>
+        <p:nvSpPr>
+          <p:cNvPr id="3" name="Text 1"/>
+          <p:cNvSpPr txBox="1"/>
+          <p:nvPr/>
+        </p:nvSpPr>
+        <p:spPr>
+          <a:xfrm>
+            <a:off x="1207008" y="256032"/>
+            <a:ext cx="4114800" cy="228600"/>
+          </a:xfrm>
+          <a:prstGeom prst="rect">
+            <a:avLst/>
+          </a:prstGeom>
+          <a:noFill/>
+          <a:ln/>
+        </p:spPr>
+        <p:txBody>
+          <a:bodyPr wrap="square" lIns="0" tIns="0" rIns="0" bIns="0" rtlCol="0" anchor="ctr">
+            <a:normAutofit/>
+          </a:bodyPr>
+          <a:lstStyle/>
+          <a:p>
+            <a:pPr marL="0" indent="0" algn="l">
+              <a:buNone/>
+            </a:pPr>
+            <a:r>
+              <a:rPr lang="en-US" sz="950" b="1" dirty="0">
+                <a:solidFill>
+                  <a:srgbClr val="5B6B80"/>
+                </a:solidFill>
+                <a:latin typeface="Arial" pitchFamily="34" charset="0"/>
+                <a:ea typeface="Arial" pitchFamily="34" charset="-122"/>
+                <a:cs typeface="Arial" pitchFamily="34" charset="-120"/>
+              </a:rPr>
+              <a:t>PHỤ LỤC / DỰ PHÒNG</a:t>
+            </a:r>
+            <a:endParaRPr lang="en-US" sz="950" dirty="0"/>
+          </a:p>
+        </p:txBody>
+      </p:sp>
+      <p:sp>
+        <p:nvSpPr>
+          <p:cNvPr id="4" name="Text 0"/>
+          <p:cNvSpPr>
+            <a:spLocks noGrp="1"/>
+          </p:cNvSpPr>
+          <p:nvPr>
+            <p:ph type="title" idx="100" hasCustomPrompt="1"/>
+          </p:nvPr>
+        </p:nvSpPr>
+        <p:spPr>
+          <a:xfrm>
+            <a:off x="612648" y="621792"/>
+            <a:ext cx="10972800" cy="713232"/>
+          </a:xfrm>
+          <a:prstGeom prst="rect">
+            <a:avLst/>
+          </a:prstGeom>
+          <a:noFill/>
+          <a:ln/>
+        </p:spPr>
+        <p:txBody>
+          <a:bodyPr wrap="square" lIns="0" tIns="0" rIns="0" bIns="0" rtlCol="0" anchor="ctr">
+            <a:normAutofit/>
+          </a:bodyPr>
+          <a:lstStyle/>
+          <a:p>
+            <a:pPr marL="0" indent="0" algn="l">
+              <a:buNone/>
+            </a:pPr>
+            <a:r>
+              <a:rPr lang="en-US" sz="3400" b="1" dirty="0">
+                <a:solidFill>
+                  <a:srgbClr val="07182F"/>
+                </a:solidFill>
+                <a:latin typeface="Georgia" pitchFamily="34" charset="0"/>
+                <a:ea typeface="Georgia" pitchFamily="34" charset="-122"/>
+                <a:cs typeface="Georgia" pitchFamily="34" charset="-120"/>
+              </a:rPr>
+              <a:t>Phụ lục · Gói web độc lập và giới hạn LMS</a:t>
+            </a:r>
+            <a:endParaRPr lang="en-US" sz="3600" dirty="0"/>
+          </a:p>
+        </p:txBody>
+      </p:sp>
+      <p:sp>
+        <p:nvSpPr>
+          <p:cNvPr id="5" name="Text 3"/>
+          <p:cNvSpPr txBox="1"/>
+          <p:nvPr/>
+        </p:nvSpPr>
+        <p:spPr>
+          <a:xfrm>
+            <a:off x="11109960" y="256032"/>
+            <a:ext cx="457200" cy="228600"/>
+          </a:xfrm>
+          <a:prstGeom prst="rect">
+            <a:avLst/>
+          </a:prstGeom>
+          <a:noFill/>
+          <a:ln/>
+        </p:spPr>
+        <p:txBody>
+          <a:bodyPr wrap="square" lIns="0" tIns="0" rIns="0" bIns="0" rtlCol="0" anchor="t">
+            <a:normAutofit/>
+          </a:bodyPr>
+          <a:lstStyle/>
+          <a:p>
+            <a:pPr marL="0" indent="0" algn="r">
+              <a:buNone/>
+            </a:pPr>
+            <a:r>
+              <a:rPr lang="en-US" sz="1000" b="1" dirty="0">
+                <a:solidFill>
+                  <a:srgbClr val="C9963A"/>
+                </a:solidFill>
+                <a:latin typeface="Arial" pitchFamily="34" charset="0"/>
+                <a:ea typeface="Arial" pitchFamily="34" charset="-122"/>
+                <a:cs typeface="Arial" pitchFamily="34" charset="-120"/>
+              </a:rPr>
+              <a:t>22</a:t>
+            </a:r>
+            <a:endParaRPr lang="en-US" sz="1000" dirty="0"/>
+          </a:p>
+        </p:txBody>
+      </p:sp>
+      <p:sp>
+        <p:nvSpPr>
+          <p:cNvPr id="6" name="Shape 4"/>
+          <p:cNvSpPr/>
+          <p:nvPr/>
+        </p:nvSpPr>
+        <p:spPr>
+          <a:xfrm>
+            <a:off x="612648" y="1408176"/>
+            <a:ext cx="10972800" cy="475488"/>
+          </a:xfrm>
+          <a:prstGeom prst="rect">
+            <a:avLst/>
+          </a:prstGeom>
+          <a:solidFill>
+            <a:srgbClr val="EEF2F7"/>
+          </a:solidFill>
+          <a:ln w="12700">
+            <a:solidFill>
+              <a:srgbClr val="D7DEE8"/>
+            </a:solidFill>
+            <a:prstDash val="solid"/>
+          </a:ln>
+        </p:spPr>
+      </p:sp>
+      <p:sp>
+        <p:nvSpPr>
+          <p:cNvPr id="7" name="Text 5"/>
+          <p:cNvSpPr txBox="1"/>
+          <p:nvPr/>
+        </p:nvSpPr>
+        <p:spPr>
+          <a:xfrm>
+            <a:off x="777240" y="1453896"/>
+            <a:ext cx="10652760" cy="384048"/>
+          </a:xfrm>
+          <a:prstGeom prst="rect">
+            <a:avLst/>
+          </a:prstGeom>
+          <a:noFill/>
+          <a:ln/>
+        </p:spPr>
+        <p:txBody>
+          <a:bodyPr wrap="square" lIns="0" tIns="0" rIns="0" bIns="0" rtlCol="0" anchor="ctr">
+            <a:normAutofit/>
+          </a:bodyPr>
+          <a:lstStyle/>
+          <a:p>
+            <a:pPr marL="0" indent="0" algn="l">
+              <a:buNone/>
+            </a:pPr>
+            <a:r>
+              <a:rPr lang="en-US" sz="1700" b="1" dirty="0">
+                <a:solidFill>
+                  <a:srgbClr val="0D2447"/>
+                </a:solidFill>
+                <a:latin typeface="Arial" pitchFamily="34" charset="0"/>
+                <a:ea typeface="Arial" pitchFamily="34" charset="-122"/>
+                <a:cs typeface="Arial" pitchFamily="34" charset="-120"/>
+              </a:rPr>
+              <a:t>Tạo ZIP ≠ kiểm LMS ≠ phê duyệt; mỗi bước cần bằng chứng riêng.</a:t>
+            </a:r>
+            <a:endParaRPr lang="en-US" sz="1700" dirty="0"/>
+          </a:p>
+        </p:txBody>
+      </p:sp>
+      <p:sp>
+        <p:nvSpPr>
+          <p:cNvPr id="8" name="Shape 6"/>
+          <p:cNvSpPr/>
+          <p:nvPr/>
+        </p:nvSpPr>
+        <p:spPr>
+          <a:xfrm>
+            <a:off x="612648" y="6519672"/>
+            <a:ext cx="10972800" cy="0"/>
+          </a:xfrm>
+          <a:prstGeom prst="line">
+            <a:avLst/>
+          </a:prstGeom>
+          <a:noFill/>
+          <a:ln w="12700">
+            <a:solidFill>
+              <a:srgbClr val="D7DEE8"/>
+            </a:solidFill>
+            <a:prstDash val="solid"/>
+          </a:ln>
+        </p:spPr>
+      </p:sp>
+      <p:sp>
+        <p:nvSpPr>
+          <p:cNvPr id="9" name="Text 7"/>
+          <p:cNvSpPr txBox="1"/>
+          <p:nvPr/>
+        </p:nvSpPr>
+        <p:spPr>
+          <a:xfrm>
+            <a:off x="612648" y="6583680"/>
+            <a:ext cx="3566160" cy="146304"/>
+          </a:xfrm>
+          <a:prstGeom prst="rect">
+            <a:avLst/>
+          </a:prstGeom>
+          <a:noFill/>
+          <a:ln/>
+        </p:spPr>
+        <p:txBody>
+          <a:bodyPr wrap="square" lIns="0" tIns="0" rIns="0" bIns="0" rtlCol="0" anchor="t">
+            <a:normAutofit/>
+          </a:bodyPr>
+          <a:lstStyle/>
+          <a:p>
+            <a:pPr marL="0" indent="0" algn="l">
+              <a:buNone/>
+            </a:pPr>
+            <a:r>
+              <a:rPr lang="en-US" sz="820" b="1" dirty="0">
+                <a:solidFill>
+                  <a:srgbClr val="5B6B80"/>
+                </a:solidFill>
+                <a:latin typeface="Arial" pitchFamily="34" charset="0"/>
+                <a:ea typeface="Arial" pitchFamily="34" charset="-122"/>
+                <a:cs typeface="Arial" pitchFamily="34" charset="-120"/>
+              </a:rPr>
+              <a:t>PHỤ LỤC / DỰ PHÒNG</a:t>
+            </a:r>
+            <a:endParaRPr lang="en-US" sz="820" dirty="0"/>
+          </a:p>
+        </p:txBody>
+      </p:sp>
+      <p:sp>
+        <p:nvSpPr>
+          <p:cNvPr id="10" name="Text 8"/>
+          <p:cNvSpPr txBox="1"/>
+          <p:nvPr/>
+        </p:nvSpPr>
+        <p:spPr>
+          <a:xfrm>
+            <a:off x="3794760" y="6583680"/>
+            <a:ext cx="7086600" cy="146304"/>
+          </a:xfrm>
+          <a:prstGeom prst="rect">
+            <a:avLst/>
+          </a:prstGeom>
+          <a:noFill/>
+          <a:ln/>
+        </p:spPr>
+        <p:txBody>
+          <a:bodyPr wrap="square" lIns="0" tIns="0" rIns="0" bIns="0" rtlCol="0" anchor="t">
+            <a:normAutofit/>
+          </a:bodyPr>
+          <a:lstStyle/>
+          <a:p>
+            <a:pPr marL="0" indent="0" algn="ctr">
+              <a:buNone/>
+            </a:pPr>
+            <a:r>
+              <a:rPr lang="en-US" sz="760" dirty="0">
+                <a:solidFill>
+                  <a:srgbClr val="5B6B80"/>
+                </a:solidFill>
+                <a:latin typeface="Arial" pitchFamily="34" charset="0"/>
+                <a:ea typeface="Arial" pitchFamily="34" charset="-122"/>
+                <a:cs typeface="Arial" pitchFamily="34" charset="-120"/>
+              </a:rPr>
+              <a:t>PL-PP-DONG-GOI-LMS</a:t>
+            </a:r>
+            <a:endParaRPr lang="en-US" sz="760" dirty="0"/>
+          </a:p>
+        </p:txBody>
+      </p:sp>
+      <p:sp>
+        <p:nvSpPr>
+          <p:cNvPr id="11" name="Text 9"/>
+          <p:cNvSpPr txBox="1"/>
+          <p:nvPr/>
+        </p:nvSpPr>
+        <p:spPr>
+          <a:xfrm>
+            <a:off x="11064240" y="6583680"/>
+            <a:ext cx="502920" cy="146304"/>
+          </a:xfrm>
+          <a:prstGeom prst="rect">
+            <a:avLst/>
+          </a:prstGeom>
+          <a:noFill/>
+          <a:ln/>
+        </p:spPr>
+        <p:txBody>
+          <a:bodyPr wrap="square" lIns="0" tIns="0" rIns="0" bIns="0" rtlCol="0" anchor="t">
+            <a:normAutofit/>
+          </a:bodyPr>
+          <a:lstStyle/>
+          <a:p>
+            <a:pPr marL="0" indent="0" algn="r">
+              <a:buNone/>
+            </a:pPr>
+            <a:r>
+              <a:rPr lang="en-US" sz="820" dirty="0">
+                <a:solidFill>
+                  <a:srgbClr val="5B6B80"/>
+                </a:solidFill>
+                <a:latin typeface="Arial" pitchFamily="34" charset="0"/>
+                <a:ea typeface="Arial" pitchFamily="34" charset="-122"/>
+                <a:cs typeface="Arial" pitchFamily="34" charset="-120"/>
+              </a:rPr>
+              <a:t>22</a:t>
+            </a:r>
+            <a:endParaRPr lang="en-US" sz="820" dirty="0"/>
+          </a:p>
+        </p:txBody>
+      </p:sp>
+      <p:sp>
+        <p:nvSpPr>
+          <p:cNvPr id="13" name="Shape 10"/>
+          <p:cNvSpPr/>
+          <p:nvPr/>
+        </p:nvSpPr>
+        <p:spPr>
+          <a:xfrm>
+            <a:off x="658368" y="1993392"/>
+            <a:ext cx="1920240" cy="676656"/>
+          </a:xfrm>
+          <a:prstGeom prst="roundRect">
+            <a:avLst>
+              <a:gd name="adj" fmla="val 5405"/>
+            </a:avLst>
+          </a:prstGeom>
+          <a:solidFill>
+            <a:srgbClr val="FFFFFF"/>
+          </a:solidFill>
+          <a:ln w="12700">
+            <a:solidFill>
+              <a:srgbClr val="15355F"/>
+            </a:solidFill>
+            <a:prstDash val="solid"/>
+          </a:ln>
+        </p:spPr>
+      </p:sp>
+      <p:sp>
+        <p:nvSpPr>
+          <p:cNvPr id="14" name="Text 11"/>
+          <p:cNvSpPr txBox="1"/>
+          <p:nvPr/>
+        </p:nvSpPr>
+        <p:spPr>
+          <a:xfrm>
+            <a:off x="768096" y="2057400"/>
+            <a:ext cx="1700784" cy="548640"/>
+          </a:xfrm>
+          <a:prstGeom prst="rect">
+            <a:avLst/>
+          </a:prstGeom>
+          <a:noFill/>
+          <a:ln/>
+        </p:spPr>
+        <p:txBody>
+          <a:bodyPr wrap="square" lIns="0" tIns="0" rIns="0" bIns="0" rtlCol="0" anchor="ctr">
+            <a:normAutofit/>
+          </a:bodyPr>
+          <a:lstStyle/>
+          <a:p>
+            <a:pPr marL="0" indent="0" algn="ctr">
+              <a:buNone/>
+            </a:pPr>
+            <a:r>
+              <a:rPr lang="en-US" sz="1650" b="1" dirty="0">
+                <a:solidFill>
+                  <a:srgbClr val="07182F"/>
+                </a:solidFill>
+                <a:latin typeface="Arial" pitchFamily="34" charset="0"/>
+                <a:ea typeface="Arial" pitchFamily="34" charset="-122"/>
+                <a:cs typeface="Arial" pitchFamily="34" charset="-120"/>
+              </a:rPr>
+              <a:t>Nguồn đã đồng bộ</a:t>
+            </a:r>
+            <a:endParaRPr lang="en-US" sz="1650" dirty="0"/>
+          </a:p>
+        </p:txBody>
+      </p:sp>
+      <p:sp>
+        <p:nvSpPr>
+          <p:cNvPr id="15" name="Shape 12"/>
+          <p:cNvSpPr/>
+          <p:nvPr/>
+        </p:nvSpPr>
+        <p:spPr>
+          <a:xfrm>
+            <a:off x="2642616" y="2331720"/>
+            <a:ext cx="201168" cy="0"/>
+          </a:xfrm>
+          <a:prstGeom prst="line">
+            <a:avLst/>
+          </a:prstGeom>
+          <a:noFill/>
+          <a:ln w="12700">
+            <a:solidFill>
+              <a:srgbClr val="C9963A"/>
+            </a:solidFill>
+            <a:prstDash val="solid"/>
+            <a:tailEnd type="triangle"/>
+          </a:ln>
+        </p:spPr>
+      </p:sp>
+      <p:sp>
+        <p:nvSpPr>
+          <p:cNvPr id="16" name="Shape 13"/>
+          <p:cNvSpPr/>
+          <p:nvPr/>
+        </p:nvSpPr>
+        <p:spPr>
+          <a:xfrm>
+            <a:off x="2907792" y="1993392"/>
+            <a:ext cx="1920240" cy="676656"/>
+          </a:xfrm>
+          <a:prstGeom prst="roundRect">
+            <a:avLst>
+              <a:gd name="adj" fmla="val 5405"/>
+            </a:avLst>
+          </a:prstGeom>
+          <a:solidFill>
+            <a:srgbClr val="FFFFFF"/>
+          </a:solidFill>
+          <a:ln w="12700">
+            <a:solidFill>
+              <a:srgbClr val="15355F"/>
+            </a:solidFill>
+            <a:prstDash val="solid"/>
+          </a:ln>
+        </p:spPr>
+      </p:sp>
+      <p:sp>
+        <p:nvSpPr>
+          <p:cNvPr id="17" name="Text 14"/>
+          <p:cNvSpPr txBox="1"/>
+          <p:nvPr/>
+        </p:nvSpPr>
+        <p:spPr>
+          <a:xfrm>
+            <a:off x="3017520" y="2057400"/>
+            <a:ext cx="1700784" cy="548640"/>
+          </a:xfrm>
+          <a:prstGeom prst="rect">
+            <a:avLst/>
+          </a:prstGeom>
+          <a:noFill/>
+          <a:ln/>
+        </p:spPr>
+        <p:txBody>
+          <a:bodyPr wrap="square" lIns="0" tIns="0" rIns="0" bIns="0" rtlCol="0" anchor="ctr">
+            <a:normAutofit/>
+          </a:bodyPr>
+          <a:lstStyle/>
+          <a:p>
+            <a:pPr marL="0" indent="0" algn="ctr">
+              <a:buNone/>
+            </a:pPr>
+            <a:r>
+              <a:rPr lang="en-US" sz="1650" b="1" dirty="0">
+                <a:solidFill>
+                  <a:srgbClr val="07182F"/>
+                </a:solidFill>
+                <a:latin typeface="Arial" pitchFamily="34" charset="0"/>
+                <a:ea typeface="Arial" pitchFamily="34" charset="-122"/>
+                <a:cs typeface="Arial" pitchFamily="34" charset="-120"/>
+              </a:rPr>
+              <a:t>Tập hợp tệp cho phép</a:t>
+            </a:r>
+            <a:endParaRPr lang="en-US" sz="1650" dirty="0"/>
+          </a:p>
+        </p:txBody>
+      </p:sp>
+      <p:sp>
+        <p:nvSpPr>
+          <p:cNvPr id="18" name="Shape 15"/>
+          <p:cNvSpPr/>
+          <p:nvPr/>
+        </p:nvSpPr>
+        <p:spPr>
+          <a:xfrm>
+            <a:off x="4892040" y="2331720"/>
+            <a:ext cx="201168" cy="0"/>
+          </a:xfrm>
+          <a:prstGeom prst="line">
+            <a:avLst/>
+          </a:prstGeom>
+          <a:noFill/>
+          <a:ln w="12700">
+            <a:solidFill>
+              <a:srgbClr val="C9963A"/>
+            </a:solidFill>
+            <a:prstDash val="solid"/>
+            <a:tailEnd type="triangle"/>
+          </a:ln>
+        </p:spPr>
+      </p:sp>
+      <p:sp>
+        <p:nvSpPr>
+          <p:cNvPr id="19" name="Shape 16"/>
+          <p:cNvSpPr/>
+          <p:nvPr/>
+        </p:nvSpPr>
+        <p:spPr>
+          <a:xfrm>
+            <a:off x="5157216" y="1993392"/>
+            <a:ext cx="1920240" cy="676656"/>
+          </a:xfrm>
+          <a:prstGeom prst="roundRect">
+            <a:avLst>
+              <a:gd name="adj" fmla="val 5405"/>
+            </a:avLst>
+          </a:prstGeom>
+          <a:solidFill>
+            <a:srgbClr val="FFFFFF"/>
+          </a:solidFill>
+          <a:ln w="12700">
+            <a:solidFill>
+              <a:srgbClr val="15355F"/>
+            </a:solidFill>
+            <a:prstDash val="solid"/>
+          </a:ln>
+        </p:spPr>
+      </p:sp>
+      <p:sp>
+        <p:nvSpPr>
+          <p:cNvPr id="20" name="Text 17"/>
+          <p:cNvSpPr txBox="1"/>
+          <p:nvPr/>
+        </p:nvSpPr>
+        <p:spPr>
+          <a:xfrm>
+            <a:off x="5266944" y="2057400"/>
+            <a:ext cx="1700784" cy="548640"/>
+          </a:xfrm>
+          <a:prstGeom prst="rect">
+            <a:avLst/>
+          </a:prstGeom>
+          <a:noFill/>
+          <a:ln/>
+        </p:spPr>
+        <p:txBody>
+          <a:bodyPr wrap="square" lIns="0" tIns="0" rIns="0" bIns="0" rtlCol="0" anchor="ctr">
+            <a:normAutofit/>
+          </a:bodyPr>
+          <a:lstStyle/>
+          <a:p>
+            <a:pPr marL="0" indent="0" algn="ctr">
+              <a:buNone/>
+            </a:pPr>
+            <a:r>
+              <a:rPr lang="en-US" sz="1650" b="1" dirty="0">
+                <a:solidFill>
+                  <a:srgbClr val="07182F"/>
+                </a:solidFill>
+                <a:latin typeface="Arial" pitchFamily="34" charset="0"/>
+                <a:ea typeface="Arial" pitchFamily="34" charset="-122"/>
+                <a:cs typeface="Arial" pitchFamily="34" charset="-120"/>
+              </a:rPr>
+              <a:t>Danh mục, mã kiểm</a:t>
+            </a:r>
+            <a:endParaRPr lang="en-US" sz="1650" dirty="0"/>
+          </a:p>
+        </p:txBody>
+      </p:sp>
+      <p:sp>
+        <p:nvSpPr>
+          <p:cNvPr id="21" name="Shape 18"/>
+          <p:cNvSpPr/>
+          <p:nvPr/>
+        </p:nvSpPr>
+        <p:spPr>
+          <a:xfrm>
+            <a:off x="7141464" y="2331720"/>
+            <a:ext cx="201168" cy="0"/>
+          </a:xfrm>
+          <a:prstGeom prst="line">
+            <a:avLst/>
+          </a:prstGeom>
+          <a:noFill/>
+          <a:ln w="12700">
+            <a:solidFill>
+              <a:srgbClr val="C9963A"/>
+            </a:solidFill>
+            <a:prstDash val="solid"/>
+            <a:tailEnd type="triangle"/>
+          </a:ln>
+        </p:spPr>
+      </p:sp>
+      <p:sp>
+        <p:nvSpPr>
+          <p:cNvPr id="22" name="Shape 19"/>
+          <p:cNvSpPr/>
+          <p:nvPr/>
+        </p:nvSpPr>
+        <p:spPr>
+          <a:xfrm>
+            <a:off x="7406640" y="1993392"/>
+            <a:ext cx="1920240" cy="676656"/>
+          </a:xfrm>
+          <a:prstGeom prst="roundRect">
+            <a:avLst>
+              <a:gd name="adj" fmla="val 5405"/>
+            </a:avLst>
+          </a:prstGeom>
+          <a:solidFill>
+            <a:srgbClr val="FFFFFF"/>
+          </a:solidFill>
+          <a:ln w="12700">
+            <a:solidFill>
+              <a:srgbClr val="15355F"/>
+            </a:solidFill>
+            <a:prstDash val="solid"/>
+          </a:ln>
+        </p:spPr>
+      </p:sp>
+      <p:sp>
+        <p:nvSpPr>
+          <p:cNvPr id="23" name="Text 20"/>
+          <p:cNvSpPr txBox="1"/>
+          <p:nvPr/>
+        </p:nvSpPr>
+        <p:spPr>
+          <a:xfrm>
+            <a:off x="7516368" y="2057400"/>
+            <a:ext cx="1700784" cy="548640"/>
+          </a:xfrm>
+          <a:prstGeom prst="rect">
+            <a:avLst/>
+          </a:prstGeom>
+          <a:noFill/>
+          <a:ln/>
+        </p:spPr>
+        <p:txBody>
+          <a:bodyPr wrap="square" lIns="0" tIns="0" rIns="0" bIns="0" rtlCol="0" anchor="ctr">
+            <a:normAutofit/>
+          </a:bodyPr>
+          <a:lstStyle/>
+          <a:p>
+            <a:pPr marL="0" indent="0" algn="ctr">
+              <a:buNone/>
+            </a:pPr>
+            <a:r>
+              <a:rPr lang="en-US" sz="1650" b="1" dirty="0">
+                <a:solidFill>
+                  <a:srgbClr val="07182F"/>
+                </a:solidFill>
+                <a:latin typeface="Arial" pitchFamily="34" charset="0"/>
+                <a:ea typeface="Arial" pitchFamily="34" charset="-122"/>
+                <a:cs typeface="Arial" pitchFamily="34" charset="-120"/>
+              </a:rPr>
+              <a:t>Kiểm tệp / ZIP</a:t>
+            </a:r>
+            <a:endParaRPr lang="en-US" sz="1650" dirty="0"/>
+          </a:p>
+        </p:txBody>
+      </p:sp>
+      <p:sp>
+        <p:nvSpPr>
+          <p:cNvPr id="24" name="Shape 21"/>
+          <p:cNvSpPr/>
+          <p:nvPr/>
+        </p:nvSpPr>
+        <p:spPr>
+          <a:xfrm>
+            <a:off x="9390888" y="2331720"/>
+            <a:ext cx="201168" cy="0"/>
+          </a:xfrm>
+          <a:prstGeom prst="line">
+            <a:avLst/>
+          </a:prstGeom>
+          <a:noFill/>
+          <a:ln w="12700">
+            <a:solidFill>
+              <a:srgbClr val="C9963A"/>
+            </a:solidFill>
+            <a:prstDash val="solid"/>
+            <a:tailEnd type="triangle"/>
+          </a:ln>
+        </p:spPr>
+      </p:sp>
+      <p:sp>
+        <p:nvSpPr>
+          <p:cNvPr id="25" name="Shape 22"/>
+          <p:cNvSpPr/>
+          <p:nvPr/>
+        </p:nvSpPr>
+        <p:spPr>
+          <a:xfrm>
+            <a:off x="9656064" y="1993392"/>
+            <a:ext cx="1920240" cy="676656"/>
+          </a:xfrm>
+          <a:prstGeom prst="roundRect">
+            <a:avLst>
+              <a:gd name="adj" fmla="val 5405"/>
+            </a:avLst>
+          </a:prstGeom>
+          <a:solidFill>
+            <a:srgbClr val="07182F"/>
+          </a:solidFill>
+          <a:ln w="12700">
+            <a:solidFill>
+              <a:srgbClr val="15355F"/>
+            </a:solidFill>
+            <a:prstDash val="solid"/>
+          </a:ln>
+        </p:spPr>
+      </p:sp>
+      <p:sp>
+        <p:nvSpPr>
+          <p:cNvPr id="26" name="Text 23"/>
+          <p:cNvSpPr txBox="1"/>
+          <p:nvPr/>
+        </p:nvSpPr>
+        <p:spPr>
+          <a:xfrm>
+            <a:off x="9765792" y="2057400"/>
+            <a:ext cx="1700784" cy="548640"/>
+          </a:xfrm>
+          <a:prstGeom prst="rect">
+            <a:avLst/>
+          </a:prstGeom>
+          <a:noFill/>
+          <a:ln/>
+        </p:spPr>
+        <p:txBody>
+          <a:bodyPr wrap="square" lIns="0" tIns="0" rIns="0" bIns="0" rtlCol="0" anchor="ctr">
+            <a:normAutofit/>
+          </a:bodyPr>
+          <a:lstStyle/>
+          <a:p>
+            <a:pPr marL="0" indent="0" algn="ctr">
+              <a:buNone/>
+            </a:pPr>
+            <a:r>
+              <a:rPr lang="en-US" sz="1650" b="1" dirty="0">
+                <a:solidFill>
+                  <a:srgbClr val="FFFFFF"/>
+                </a:solidFill>
+                <a:latin typeface="Arial" pitchFamily="34" charset="0"/>
+                <a:ea typeface="Arial" pitchFamily="34" charset="-122"/>
+                <a:cs typeface="Arial" pitchFamily="34" charset="-120"/>
+              </a:rPr>
+              <a:t>Gói ứng viên</a:t>
+            </a:r>
+            <a:endParaRPr lang="en-US" sz="1650" dirty="0"/>
+          </a:p>
+        </p:txBody>
+      </p:sp>
+      <p:sp>
+        <p:nvSpPr>
+          <p:cNvPr id="27" name="Shape 24"/>
+          <p:cNvSpPr/>
+          <p:nvPr/>
+        </p:nvSpPr>
+        <p:spPr>
+          <a:xfrm>
+            <a:off x="658368" y="2852928"/>
+            <a:ext cx="5303520" cy="1335024"/>
+          </a:xfrm>
+          <a:prstGeom prst="roundRect">
+            <a:avLst>
+              <a:gd name="adj" fmla="val 2740"/>
+            </a:avLst>
+          </a:prstGeom>
+          <a:solidFill>
+            <a:srgbClr val="FFFFFF"/>
+          </a:solidFill>
+          <a:ln w="12700">
+            <a:solidFill>
+              <a:srgbClr val="2980B9"/>
+            </a:solidFill>
+            <a:prstDash val="solid"/>
+          </a:ln>
+        </p:spPr>
+      </p:sp>
+      <p:sp>
+        <p:nvSpPr>
+          <p:cNvPr id="28" name="Text 25"/>
+          <p:cNvSpPr txBox="1"/>
+          <p:nvPr/>
+        </p:nvSpPr>
+        <p:spPr>
+          <a:xfrm>
+            <a:off x="859536" y="2971800"/>
+            <a:ext cx="4901184" cy="274320"/>
+          </a:xfrm>
+          <a:prstGeom prst="rect">
+            <a:avLst/>
+          </a:prstGeom>
+          <a:noFill/>
+          <a:ln/>
+        </p:spPr>
+        <p:txBody>
+          <a:bodyPr wrap="square" lIns="0" tIns="0" rIns="0" bIns="0" rtlCol="0" anchor="t">
+            <a:normAutofit/>
+          </a:bodyPr>
+          <a:lstStyle/>
+          <a:p>
+            <a:pPr marL="0" indent="0" algn="l">
+              <a:buNone/>
+            </a:pPr>
+            <a:r>
+              <a:rPr lang="en-US" sz="1800" b="1" dirty="0">
+                <a:solidFill>
+                  <a:srgbClr val="07182F"/>
+                </a:solidFill>
+                <a:latin typeface="Georgia" pitchFamily="34" charset="0"/>
+                <a:ea typeface="Georgia" pitchFamily="34" charset="-122"/>
+                <a:cs typeface="Georgia" pitchFamily="34" charset="-120"/>
+              </a:rPr>
+              <a:t>Gói chính · web tĩnh</a:t>
+            </a:r>
+            <a:endParaRPr lang="en-US" sz="1800" dirty="0"/>
+          </a:p>
+        </p:txBody>
+      </p:sp>
+      <p:sp>
+        <p:nvSpPr>
+          <p:cNvPr id="29" name="Text 26"/>
+          <p:cNvSpPr txBox="1"/>
+          <p:nvPr/>
+        </p:nvSpPr>
+        <p:spPr>
+          <a:xfrm>
+            <a:off x="859536" y="3328416"/>
+            <a:ext cx="4901184" cy="740664"/>
+          </a:xfrm>
+          <a:prstGeom prst="rect">
+            <a:avLst/>
+          </a:prstGeom>
+          <a:noFill/>
+          <a:ln/>
+        </p:spPr>
+        <p:txBody>
+          <a:bodyPr wrap="square" lIns="0" tIns="0" rIns="0" bIns="0" rtlCol="0" anchor="t">
+            <a:normAutofit/>
+          </a:bodyPr>
+          <a:lstStyle/>
+          <a:p>
+            <a:pPr marL="0" indent="0" algn="l">
+              <a:buNone/>
+            </a:pPr>
+            <a:r>
+              <a:rPr lang="en-US" sz="1600" dirty="0">
+                <a:solidFill>
+                  <a:srgbClr val="243247"/>
+                </a:solidFill>
+                <a:latin typeface="Arial" pitchFamily="34" charset="0"/>
+                <a:ea typeface="Arial" pitchFamily="34" charset="-122"/>
+                <a:cs typeface="Arial" pitchFamily="34" charset="-120"/>
+              </a:rPr>
+              <a:t>HTML/CSS/JavaScript, thư viện và tài nguyên cục bộ; giải nén mở index.html hoặc dùng máy chủ web. ZIP không đồng nghĩa SCORM.</a:t>
+            </a:r>
+            <a:endParaRPr lang="en-US" sz="1600" dirty="0"/>
+          </a:p>
+        </p:txBody>
+      </p:sp>
+      <p:sp>
+        <p:nvSpPr>
+          <p:cNvPr id="30" name="Shape 27"/>
+          <p:cNvSpPr/>
+          <p:nvPr/>
+        </p:nvSpPr>
+        <p:spPr>
+          <a:xfrm>
+            <a:off x="6236208" y="2852928"/>
+            <a:ext cx="5303520" cy="1335024"/>
+          </a:xfrm>
+          <a:prstGeom prst="roundRect">
+            <a:avLst>
+              <a:gd name="adj" fmla="val 2740"/>
+            </a:avLst>
+          </a:prstGeom>
+          <a:solidFill>
+            <a:srgbClr val="FFFFFF"/>
+          </a:solidFill>
+          <a:ln w="12700">
+            <a:solidFill>
+              <a:srgbClr val="27AE60"/>
+            </a:solidFill>
+            <a:prstDash val="solid"/>
+          </a:ln>
+        </p:spPr>
+      </p:sp>
+      <p:sp>
+        <p:nvSpPr>
+          <p:cNvPr id="31" name="Text 28"/>
+          <p:cNvSpPr txBox="1"/>
+          <p:nvPr/>
+        </p:nvSpPr>
+        <p:spPr>
+          <a:xfrm>
+            <a:off x="6437376" y="2971800"/>
+            <a:ext cx="4901184" cy="274320"/>
+          </a:xfrm>
+          <a:prstGeom prst="rect">
+            <a:avLst/>
+          </a:prstGeom>
+          <a:noFill/>
+          <a:ln/>
+        </p:spPr>
+        <p:txBody>
+          <a:bodyPr wrap="square" lIns="0" tIns="0" rIns="0" bIns="0" rtlCol="0" anchor="t">
+            <a:normAutofit/>
+          </a:bodyPr>
+          <a:lstStyle/>
+          <a:p>
+            <a:pPr marL="0" indent="0" algn="l">
+              <a:buNone/>
+            </a:pPr>
+            <a:r>
+              <a:rPr lang="en-US" sz="1800" b="1" dirty="0">
+                <a:solidFill>
+                  <a:srgbClr val="07182F"/>
+                </a:solidFill>
+                <a:latin typeface="Georgia" pitchFamily="34" charset="0"/>
+                <a:ea typeface="Georgia" pitchFamily="34" charset="-122"/>
+                <a:cs typeface="Georgia" pitchFamily="34" charset="-120"/>
+              </a:rPr>
+              <a:t>QTI 3 / CC 1.4 · kiểm cục bộ</a:t>
+            </a:r>
+            <a:endParaRPr lang="en-US" sz="1800" dirty="0"/>
+          </a:p>
+        </p:txBody>
+      </p:sp>
+      <p:sp>
+        <p:nvSpPr>
+          <p:cNvPr id="32" name="Text 29"/>
+          <p:cNvSpPr txBox="1"/>
+          <p:nvPr/>
+        </p:nvSpPr>
+        <p:spPr>
+          <a:xfrm>
+            <a:off x="6437376" y="3328416"/>
+            <a:ext cx="4901184" cy="740664"/>
+          </a:xfrm>
+          <a:prstGeom prst="rect">
+            <a:avLst/>
+          </a:prstGeom>
+          <a:noFill/>
+          <a:ln/>
+        </p:spPr>
+        <p:txBody>
+          <a:bodyPr wrap="square" lIns="0" tIns="0" rIns="0" bIns="0" rtlCol="0" anchor="t">
+            <a:normAutofit/>
+          </a:bodyPr>
+          <a:lstStyle/>
+          <a:p>
+            <a:pPr marL="0" indent="0" algn="l">
+              <a:buNone/>
+            </a:pPr>
+            <a:r>
+              <a:rPr lang="en-US" sz="1600" dirty="0">
+                <a:solidFill>
+                  <a:srgbClr val="243247"/>
+                </a:solidFill>
+                <a:latin typeface="Arial" pitchFamily="34" charset="0"/>
+                <a:ea typeface="Arial" pitchFamily="34" charset="-122"/>
+                <a:cs typeface="Arial" pitchFamily="34" charset="-120"/>
+              </a:rPr>
+              <a:t>QTI: câu một lựa chọn, tối đa 10 mục đã kiểm; CC 1.4: static webcontent. Kiểm adapter không chứng minh nhập/chạy hay lưu điểm LMS.</a:t>
+            </a:r>
+            <a:endParaRPr lang="en-US" sz="1600" dirty="0"/>
+          </a:p>
+        </p:txBody>
+      </p:sp>
+      <p:sp>
+        <p:nvSpPr>
+          <p:cNvPr id="33" name="Shape 30"/>
+          <p:cNvSpPr/>
+          <p:nvPr/>
+        </p:nvSpPr>
+        <p:spPr>
+          <a:xfrm>
+            <a:off x="658368" y="4352544"/>
+            <a:ext cx="5303520" cy="1335024"/>
+          </a:xfrm>
+          <a:prstGeom prst="roundRect">
+            <a:avLst>
+              <a:gd name="adj" fmla="val 2740"/>
+            </a:avLst>
+          </a:prstGeom>
+          <a:solidFill>
+            <a:srgbClr val="FFFFFF"/>
+          </a:solidFill>
+          <a:ln w="12700">
+            <a:solidFill>
+              <a:srgbClr val="8E44AD"/>
+            </a:solidFill>
+            <a:prstDash val="solid"/>
+          </a:ln>
+        </p:spPr>
+      </p:sp>
+      <p:sp>
+        <p:nvSpPr>
+          <p:cNvPr id="34" name="Text 31"/>
+          <p:cNvSpPr txBox="1"/>
+          <p:nvPr/>
+        </p:nvSpPr>
+        <p:spPr>
+          <a:xfrm>
+            <a:off x="859536" y="4471416"/>
+            <a:ext cx="4901184" cy="274320"/>
+          </a:xfrm>
+          <a:prstGeom prst="rect">
+            <a:avLst/>
+          </a:prstGeom>
+          <a:noFill/>
+          <a:ln/>
+        </p:spPr>
+        <p:txBody>
+          <a:bodyPr wrap="square" lIns="0" tIns="0" rIns="0" bIns="0" rtlCol="0" anchor="t">
+            <a:normAutofit/>
+          </a:bodyPr>
+          <a:lstStyle/>
+          <a:p>
+            <a:pPr marL="0" indent="0" algn="l">
+              <a:buNone/>
+            </a:pPr>
+            <a:r>
+              <a:rPr lang="en-US" sz="1800" b="1" dirty="0">
+                <a:solidFill>
+                  <a:srgbClr val="07182F"/>
+                </a:solidFill>
+                <a:latin typeface="Georgia" pitchFamily="34" charset="0"/>
+                <a:ea typeface="Georgia" pitchFamily="34" charset="-122"/>
+                <a:cs typeface="Georgia" pitchFamily="34" charset="-120"/>
+              </a:rPr>
+              <a:t>SCORM / xAPI / cmi5 · chưa có</a:t>
+            </a:r>
+            <a:endParaRPr lang="en-US" sz="1800" dirty="0"/>
+          </a:p>
+        </p:txBody>
+      </p:sp>
+      <p:sp>
+        <p:nvSpPr>
+          <p:cNvPr id="35" name="Text 32"/>
+          <p:cNvSpPr txBox="1"/>
+          <p:nvPr/>
+        </p:nvSpPr>
+        <p:spPr>
+          <a:xfrm>
+            <a:off x="859536" y="4828032"/>
+            <a:ext cx="4901184" cy="740664"/>
+          </a:xfrm>
+          <a:prstGeom prst="rect">
+            <a:avLst/>
+          </a:prstGeom>
+          <a:noFill/>
+          <a:ln/>
+        </p:spPr>
+        <p:txBody>
+          <a:bodyPr wrap="square" lIns="0" tIns="0" rIns="0" bIns="0" rtlCol="0" anchor="t">
+            <a:normAutofit/>
+          </a:bodyPr>
+          <a:lstStyle/>
+          <a:p>
+            <a:pPr marL="0" indent="0" algn="l">
+              <a:buNone/>
+            </a:pPr>
+            <a:r>
+              <a:rPr lang="en-US" sz="1600" dirty="0">
+                <a:solidFill>
+                  <a:srgbClr val="243247"/>
+                </a:solidFill>
+                <a:latin typeface="Arial" pitchFamily="34" charset="0"/>
+                <a:ea typeface="Arial" pitchFamily="34" charset="-122"/>
+                <a:cs typeface="Arial" pitchFamily="34" charset="-120"/>
+              </a:rPr>
+              <a:t>SCORM và xAPI/cmi5 chưa triển khai. Cần LMS/LRS đích, profile, danh tính/quyền riêng tư và minh chứng thực thi trước mở rộng.</a:t>
+            </a:r>
+            <a:endParaRPr lang="en-US" sz="1600" dirty="0"/>
+          </a:p>
+        </p:txBody>
+      </p:sp>
+      <p:sp>
+        <p:nvSpPr>
+          <p:cNvPr id="36" name="Shape 33"/>
+          <p:cNvSpPr/>
+          <p:nvPr/>
+        </p:nvSpPr>
+        <p:spPr>
+          <a:xfrm>
+            <a:off x="6236208" y="4352544"/>
+            <a:ext cx="5303520" cy="1335024"/>
+          </a:xfrm>
+          <a:prstGeom prst="roundRect">
+            <a:avLst>
+              <a:gd name="adj" fmla="val 2740"/>
+            </a:avLst>
+          </a:prstGeom>
+          <a:solidFill>
+            <a:srgbClr val="FFFFFF"/>
+          </a:solidFill>
+          <a:ln w="12700">
+            <a:solidFill>
+              <a:srgbClr val="C9963A"/>
+            </a:solidFill>
+            <a:prstDash val="solid"/>
+          </a:ln>
+        </p:spPr>
+      </p:sp>
+      <p:sp>
+        <p:nvSpPr>
+          <p:cNvPr id="37" name="Text 34"/>
+          <p:cNvSpPr txBox="1"/>
+          <p:nvPr/>
+        </p:nvSpPr>
+        <p:spPr>
+          <a:xfrm>
+            <a:off x="6437376" y="4471416"/>
+            <a:ext cx="4901184" cy="274320"/>
+          </a:xfrm>
+          <a:prstGeom prst="rect">
+            <a:avLst/>
+          </a:prstGeom>
+          <a:noFill/>
+          <a:ln/>
+        </p:spPr>
+        <p:txBody>
+          <a:bodyPr wrap="square" lIns="0" tIns="0" rIns="0" bIns="0" rtlCol="0" anchor="t">
+            <a:normAutofit/>
+          </a:bodyPr>
+          <a:lstStyle/>
+          <a:p>
+            <a:pPr marL="0" indent="0" algn="l">
+              <a:buNone/>
+            </a:pPr>
+            <a:r>
+              <a:rPr lang="en-US" sz="1800" b="1" dirty="0">
+                <a:solidFill>
+                  <a:srgbClr val="07182F"/>
+                </a:solidFill>
+                <a:latin typeface="Georgia" pitchFamily="34" charset="0"/>
+                <a:ea typeface="Georgia" pitchFamily="34" charset="-122"/>
+                <a:cs typeface="Georgia" pitchFamily="34" charset="-120"/>
+              </a:rPr>
+              <a:t>Phiên bản và thẩm quyền</a:t>
+            </a:r>
+            <a:endParaRPr lang="en-US" sz="1800" dirty="0"/>
+          </a:p>
+        </p:txBody>
+      </p:sp>
+      <p:sp>
+        <p:nvSpPr>
+          <p:cNvPr id="38" name="Text 35"/>
+          <p:cNvSpPr txBox="1"/>
+          <p:nvPr/>
+        </p:nvSpPr>
+        <p:spPr>
+          <a:xfrm>
+            <a:off x="6437376" y="4828032"/>
+            <a:ext cx="4901184" cy="740664"/>
+          </a:xfrm>
+          <a:prstGeom prst="rect">
+            <a:avLst/>
+          </a:prstGeom>
+          <a:noFill/>
+          <a:ln/>
+        </p:spPr>
+        <p:txBody>
+          <a:bodyPr wrap="square" lIns="0" tIns="0" rIns="0" bIns="0" rtlCol="0" anchor="t">
+            <a:normAutofit/>
+          </a:bodyPr>
+          <a:lstStyle/>
+          <a:p>
+            <a:pPr marL="0" indent="0" algn="l">
+              <a:buNone/>
+            </a:pPr>
+            <a:r>
+              <a:rPr lang="en-US" sz="1600" dirty="0">
+                <a:solidFill>
+                  <a:srgbClr val="243247"/>
+                </a:solidFill>
+                <a:latin typeface="Arial" pitchFamily="34" charset="0"/>
+                <a:ea typeface="Arial" pitchFamily="34" charset="-122"/>
+                <a:cs typeface="Arial" pitchFamily="34" charset="-120"/>
+              </a:rPr>
+              <a:t>Danh mục, SHA-256, nguồn/giấy phép và hướng dẫn gắn đúng gói. Sửa nguồn → tái tạo; lưu lịch sử. Phê duyệt độc lập là bước riêng.</a:t>
+            </a:r>
+            <a:endParaRPr lang="en-US" sz="1600" dirty="0"/>
+          </a:p>
+        </p:txBody>
+      </p:sp>
+      <p:sp>
+        <p:nvSpPr>
+          <p:cNvPr id="39" name="Shape 36"/>
+          <p:cNvSpPr/>
+          <p:nvPr/>
+        </p:nvSpPr>
+        <p:spPr>
+          <a:xfrm>
+            <a:off x="658368" y="5852160"/>
+            <a:ext cx="10881360" cy="365760"/>
+          </a:xfrm>
+          <a:prstGeom prst="roundRect">
+            <a:avLst>
+              <a:gd name="adj" fmla="val 10000"/>
+            </a:avLst>
+          </a:prstGeom>
+          <a:solidFill>
+            <a:srgbClr val="FFF4E8"/>
+          </a:solidFill>
+          <a:ln w="12700">
+            <a:solidFill>
+              <a:srgbClr val="9A5B00"/>
+            </a:solidFill>
+            <a:prstDash val="solid"/>
+          </a:ln>
+        </p:spPr>
+      </p:sp>
+      <p:sp>
+        <p:nvSpPr>
+          <p:cNvPr id="40" name="Text 37"/>
+          <p:cNvSpPr txBox="1"/>
+          <p:nvPr/>
+        </p:nvSpPr>
+        <p:spPr>
+          <a:xfrm>
+            <a:off x="859536" y="5925312"/>
+            <a:ext cx="10479024" cy="219456"/>
+          </a:xfrm>
+          <a:prstGeom prst="rect">
+            <a:avLst/>
+          </a:prstGeom>
+          <a:noFill/>
+          <a:ln/>
+        </p:spPr>
+        <p:txBody>
+          <a:bodyPr wrap="square" lIns="0" tIns="0" rIns="0" bIns="0" rtlCol="0" anchor="t">
+            <a:normAutofit/>
+          </a:bodyPr>
+          <a:lstStyle/>
+          <a:p>
+            <a:pPr marL="0" indent="0" algn="ctr">
+              <a:buNone/>
+            </a:pPr>
+            <a:r>
+              <a:rPr lang="en-US" sz="1400" b="1" dirty="0">
+                <a:solidFill>
+                  <a:srgbClr val="9A5B00"/>
+                </a:solidFill>
+                <a:latin typeface="Arial" pitchFamily="34" charset="0"/>
+                <a:ea typeface="Arial" pitchFamily="34" charset="-122"/>
+                <a:cs typeface="Arial" pitchFamily="34" charset="-120"/>
+              </a:rPr>
+              <a:t>Snapshot lịch sử vẫn không chấp thuận phát hành; sửa slide không tạo QA mới hoặc chứng minh liên thông.</a:t>
+            </a:r>
+            <a:endParaRPr lang="en-US" sz="1400" dirty="0"/>
+          </a:p>
+        </p:txBody>
+      </p:sp>
+    </p:spTree>
+  </p:cSld>
+  <p:clrMapOvr>
+    <a:masterClrMapping/>
+  </p:clrMapOvr>
+</p:sld>
+</file>
+
+<file path=ppt/slides/slide23.xml><?xml version="1.0" encoding="utf-8"?>
+<p:sld xmlns:a="http://schemas.openxmlformats.org/drawingml/2006/main" xmlns:r="http://schemas.openxmlformats.org/officeDocument/2006/relationships" xmlns:p="http://schemas.openxmlformats.org/presentationml/2006/main">
+  <p:cSld name="Slide 23">
+    <p:bg>
+      <p:bgPr>
+        <a:solidFill>
+          <a:srgbClr val="F7F5EF"/>
+        </a:solidFill>
+        <a:effectLst/>
+      </p:bgPr>
+    </p:bg>
+    <p:spTree>
+      <p:nvGrpSpPr>
+        <p:cNvPr id="1" name=""/>
+        <p:cNvGrpSpPr/>
+        <p:nvPr/>
+      </p:nvGrpSpPr>
+      <p:grpSpPr>
+        <a:xfrm>
+          <a:off x="0" y="0"/>
+          <a:ext cx="0" cy="0"/>
+          <a:chOff x="0" y="0"/>
+          <a:chExt cx="0" cy="0"/>
+        </a:xfrm>
+      </p:grpSpPr>
+      <p:sp>
+        <p:nvSpPr>
+          <p:cNvPr id="2" name="Shape 0"/>
+          <p:cNvSpPr/>
+          <p:nvPr/>
+        </p:nvSpPr>
+        <p:spPr>
+          <a:xfrm>
+            <a:off x="612648" y="393192"/>
+            <a:ext cx="475488" cy="0"/>
+          </a:xfrm>
+          <a:prstGeom prst="line">
+            <a:avLst/>
+          </a:prstGeom>
+          <a:noFill/>
+          <a:ln w="12700">
+            <a:solidFill>
+              <a:srgbClr val="C9963A"/>
+            </a:solidFill>
+            <a:prstDash val="solid"/>
+          </a:ln>
+        </p:spPr>
+      </p:sp>
+      <p:sp>
+        <p:nvSpPr>
+          <p:cNvPr id="3" name="Text 1"/>
+          <p:cNvSpPr txBox="1"/>
+          <p:nvPr/>
+        </p:nvSpPr>
+        <p:spPr>
+          <a:xfrm>
+            <a:off x="1207008" y="256032"/>
+            <a:ext cx="4114800" cy="228600"/>
+          </a:xfrm>
+          <a:prstGeom prst="rect">
+            <a:avLst/>
+          </a:prstGeom>
+          <a:noFill/>
+          <a:ln/>
+        </p:spPr>
+        <p:txBody>
+          <a:bodyPr wrap="square" lIns="0" tIns="0" rIns="0" bIns="0" rtlCol="0" anchor="ctr">
+            <a:normAutofit/>
+          </a:bodyPr>
+          <a:lstStyle/>
+          <a:p>
+            <a:pPr marL="0" indent="0" algn="l">
+              <a:buNone/>
+            </a:pPr>
+            <a:r>
+              <a:rPr lang="en-US" sz="950" b="1" dirty="0">
+                <a:solidFill>
+                  <a:srgbClr val="5B6B80"/>
+                </a:solidFill>
+                <a:latin typeface="Arial" pitchFamily="34" charset="0"/>
+                <a:ea typeface="Arial" pitchFamily="34" charset="-122"/>
+                <a:cs typeface="Arial" pitchFamily="34" charset="-120"/>
+              </a:rPr>
+              <a:t>PHỤ LỤC / DỰ PHÒNG</a:t>
+            </a:r>
+            <a:endParaRPr lang="en-US" sz="950" dirty="0"/>
+          </a:p>
+        </p:txBody>
+      </p:sp>
+      <p:sp>
+        <p:nvSpPr>
+          <p:cNvPr id="4" name="Text 0"/>
+          <p:cNvSpPr>
+            <a:spLocks noGrp="1"/>
+          </p:cNvSpPr>
+          <p:nvPr>
+            <p:ph type="title" idx="100" hasCustomPrompt="1"/>
+          </p:nvPr>
+        </p:nvSpPr>
+        <p:spPr>
+          <a:xfrm>
+            <a:off x="612648" y="621792"/>
+            <a:ext cx="10972800" cy="713232"/>
+          </a:xfrm>
+          <a:prstGeom prst="rect">
+            <a:avLst/>
+          </a:prstGeom>
+          <a:noFill/>
+          <a:ln/>
+        </p:spPr>
+        <p:txBody>
+          <a:bodyPr wrap="square" lIns="0" tIns="0" rIns="0" bIns="0" rtlCol="0" anchor="ctr">
+            <a:normAutofit/>
+          </a:bodyPr>
+          <a:lstStyle/>
+          <a:p>
+            <a:pPr marL="0" indent="0" algn="l">
+              <a:buNone/>
+            </a:pPr>
+            <a:r>
+              <a:rPr lang="en-US" sz="3400" b="1" dirty="0">
+                <a:solidFill>
+                  <a:srgbClr val="07182F"/>
+                </a:solidFill>
+                <a:latin typeface="Georgia" pitchFamily="34" charset="0"/>
+                <a:ea typeface="Georgia" pitchFamily="34" charset="-122"/>
+                <a:cs typeface="Georgia" pitchFamily="34" charset="-120"/>
+              </a:rPr>
+              <a:t>Phụ lục · Tra cứu và tự đánh giá đúng phạm vi</a:t>
+            </a:r>
+            <a:endParaRPr lang="en-US" sz="3600" dirty="0"/>
+          </a:p>
+        </p:txBody>
+      </p:sp>
+      <p:sp>
+        <p:nvSpPr>
+          <p:cNvPr id="5" name="Text 3"/>
+          <p:cNvSpPr txBox="1"/>
+          <p:nvPr/>
+        </p:nvSpPr>
+        <p:spPr>
+          <a:xfrm>
+            <a:off x="11109960" y="256032"/>
+            <a:ext cx="457200" cy="228600"/>
+          </a:xfrm>
+          <a:prstGeom prst="rect">
+            <a:avLst/>
+          </a:prstGeom>
+          <a:noFill/>
+          <a:ln/>
+        </p:spPr>
+        <p:txBody>
+          <a:bodyPr wrap="square" lIns="0" tIns="0" rIns="0" bIns="0" rtlCol="0" anchor="t">
+            <a:normAutofit/>
+          </a:bodyPr>
+          <a:lstStyle/>
+          <a:p>
+            <a:pPr marL="0" indent="0" algn="r">
+              <a:buNone/>
+            </a:pPr>
+            <a:r>
+              <a:rPr lang="en-US" sz="1000" b="1" dirty="0">
+                <a:solidFill>
+                  <a:srgbClr val="C9963A"/>
+                </a:solidFill>
+                <a:latin typeface="Arial" pitchFamily="34" charset="0"/>
+                <a:ea typeface="Arial" pitchFamily="34" charset="-122"/>
+                <a:cs typeface="Arial" pitchFamily="34" charset="-120"/>
+              </a:rPr>
+              <a:t>23</a:t>
+            </a:r>
+            <a:endParaRPr lang="en-US" sz="1000" dirty="0"/>
+          </a:p>
+        </p:txBody>
+      </p:sp>
+      <p:sp>
+        <p:nvSpPr>
+          <p:cNvPr id="6" name="Shape 4"/>
+          <p:cNvSpPr/>
+          <p:nvPr/>
+        </p:nvSpPr>
+        <p:spPr>
+          <a:xfrm>
+            <a:off x="612648" y="1408176"/>
+            <a:ext cx="10972800" cy="475488"/>
+          </a:xfrm>
+          <a:prstGeom prst="rect">
+            <a:avLst/>
+          </a:prstGeom>
+          <a:solidFill>
+            <a:srgbClr val="EEF2F7"/>
+          </a:solidFill>
+          <a:ln w="12700">
+            <a:solidFill>
+              <a:srgbClr val="D7DEE8"/>
+            </a:solidFill>
+            <a:prstDash val="solid"/>
+          </a:ln>
+        </p:spPr>
+      </p:sp>
+      <p:sp>
+        <p:nvSpPr>
+          <p:cNvPr id="7" name="Text 5"/>
+          <p:cNvSpPr txBox="1"/>
+          <p:nvPr/>
+        </p:nvSpPr>
+        <p:spPr>
+          <a:xfrm>
+            <a:off x="777240" y="1453896"/>
+            <a:ext cx="10652760" cy="384048"/>
+          </a:xfrm>
+          <a:prstGeom prst="rect">
+            <a:avLst/>
+          </a:prstGeom>
+          <a:noFill/>
+          <a:ln/>
+        </p:spPr>
+        <p:txBody>
+          <a:bodyPr wrap="square" lIns="0" tIns="0" rIns="0" bIns="0" rtlCol="0" anchor="ctr">
+            <a:normAutofit/>
+          </a:bodyPr>
+          <a:lstStyle/>
+          <a:p>
+            <a:pPr marL="0" indent="0" algn="l">
+              <a:buNone/>
+            </a:pPr>
+            <a:r>
+              <a:rPr lang="en-US" sz="1700" b="1" dirty="0">
+                <a:solidFill>
+                  <a:srgbClr val="0D2447"/>
+                </a:solidFill>
+                <a:latin typeface="Arial" pitchFamily="34" charset="0"/>
+                <a:ea typeface="Arial" pitchFamily="34" charset="-122"/>
+                <a:cs typeface="Arial" pitchFamily="34" charset="-120"/>
+              </a:rPr>
+              <a:t>Tra cứu và phản hồi hỗ trợ tự học; không thay đánh giá chuẩn đầu ra.</a:t>
+            </a:r>
+            <a:endParaRPr lang="en-US" sz="1700" dirty="0"/>
+          </a:p>
+        </p:txBody>
+      </p:sp>
+      <p:sp>
+        <p:nvSpPr>
+          <p:cNvPr id="8" name="Shape 6"/>
+          <p:cNvSpPr/>
+          <p:nvPr/>
+        </p:nvSpPr>
+        <p:spPr>
+          <a:xfrm>
+            <a:off x="612648" y="6519672"/>
+            <a:ext cx="10972800" cy="0"/>
+          </a:xfrm>
+          <a:prstGeom prst="line">
+            <a:avLst/>
+          </a:prstGeom>
+          <a:noFill/>
+          <a:ln w="12700">
+            <a:solidFill>
+              <a:srgbClr val="D7DEE8"/>
+            </a:solidFill>
+            <a:prstDash val="solid"/>
+          </a:ln>
+        </p:spPr>
+      </p:sp>
+      <p:sp>
+        <p:nvSpPr>
+          <p:cNvPr id="9" name="Text 7"/>
+          <p:cNvSpPr txBox="1"/>
+          <p:nvPr/>
+        </p:nvSpPr>
+        <p:spPr>
+          <a:xfrm>
+            <a:off x="612648" y="6583680"/>
+            <a:ext cx="3566160" cy="146304"/>
+          </a:xfrm>
+          <a:prstGeom prst="rect">
+            <a:avLst/>
+          </a:prstGeom>
+          <a:noFill/>
+          <a:ln/>
+        </p:spPr>
+        <p:txBody>
+          <a:bodyPr wrap="square" lIns="0" tIns="0" rIns="0" bIns="0" rtlCol="0" anchor="t">
+            <a:normAutofit/>
+          </a:bodyPr>
+          <a:lstStyle/>
+          <a:p>
+            <a:pPr marL="0" indent="0" algn="l">
+              <a:buNone/>
+            </a:pPr>
+            <a:r>
+              <a:rPr lang="en-US" sz="820" b="1" dirty="0">
+                <a:solidFill>
+                  <a:srgbClr val="5B6B80"/>
+                </a:solidFill>
+                <a:latin typeface="Arial" pitchFamily="34" charset="0"/>
+                <a:ea typeface="Arial" pitchFamily="34" charset="-122"/>
+                <a:cs typeface="Arial" pitchFamily="34" charset="-120"/>
+              </a:rPr>
+              <a:t>PHỤ LỤC / DỰ PHÒNG</a:t>
+            </a:r>
+            <a:endParaRPr lang="en-US" sz="820" dirty="0"/>
+          </a:p>
+        </p:txBody>
+      </p:sp>
+      <p:sp>
+        <p:nvSpPr>
+          <p:cNvPr id="10" name="Text 8"/>
+          <p:cNvSpPr txBox="1"/>
+          <p:nvPr/>
+        </p:nvSpPr>
+        <p:spPr>
+          <a:xfrm>
+            <a:off x="3794760" y="6583680"/>
+            <a:ext cx="7086600" cy="146304"/>
+          </a:xfrm>
+          <a:prstGeom prst="rect">
+            <a:avLst/>
+          </a:prstGeom>
+          <a:noFill/>
+          <a:ln/>
+        </p:spPr>
+        <p:txBody>
+          <a:bodyPr wrap="square" lIns="0" tIns="0" rIns="0" bIns="0" rtlCol="0" anchor="t">
+            <a:normAutofit/>
+          </a:bodyPr>
+          <a:lstStyle/>
+          <a:p>
+            <a:pPr marL="0" indent="0" algn="ctr">
+              <a:buNone/>
+            </a:pPr>
+            <a:r>
+              <a:rPr lang="en-US" sz="760" dirty="0">
+                <a:solidFill>
+                  <a:srgbClr val="5B6B80"/>
+                </a:solidFill>
+                <a:latin typeface="Arial" pitchFamily="34" charset="0"/>
+                <a:ea typeface="Arial" pitchFamily="34" charset="-122"/>
+                <a:cs typeface="Arial" pitchFamily="34" charset="-120"/>
+              </a:rPr>
+              <a:t>PL-PP-TRA-CUU-DANH-GIA</a:t>
+            </a:r>
+            <a:endParaRPr lang="en-US" sz="760" dirty="0"/>
+          </a:p>
+        </p:txBody>
+      </p:sp>
+      <p:sp>
+        <p:nvSpPr>
+          <p:cNvPr id="11" name="Text 9"/>
+          <p:cNvSpPr txBox="1"/>
+          <p:nvPr/>
+        </p:nvSpPr>
+        <p:spPr>
+          <a:xfrm>
+            <a:off x="11064240" y="6583680"/>
+            <a:ext cx="502920" cy="146304"/>
+          </a:xfrm>
+          <a:prstGeom prst="rect">
+            <a:avLst/>
+          </a:prstGeom>
+          <a:noFill/>
+          <a:ln/>
+        </p:spPr>
+        <p:txBody>
+          <a:bodyPr wrap="square" lIns="0" tIns="0" rIns="0" bIns="0" rtlCol="0" anchor="t">
+            <a:normAutofit/>
+          </a:bodyPr>
+          <a:lstStyle/>
+          <a:p>
+            <a:pPr marL="0" indent="0" algn="r">
+              <a:buNone/>
+            </a:pPr>
+            <a:r>
+              <a:rPr lang="en-US" sz="820" dirty="0">
+                <a:solidFill>
+                  <a:srgbClr val="5B6B80"/>
+                </a:solidFill>
+                <a:latin typeface="Arial" pitchFamily="34" charset="0"/>
+                <a:ea typeface="Arial" pitchFamily="34" charset="-122"/>
+                <a:cs typeface="Arial" pitchFamily="34" charset="-120"/>
+              </a:rPr>
+              <a:t>23</a:t>
+            </a:r>
+            <a:endParaRPr lang="en-US" sz="820" dirty="0"/>
+          </a:p>
+        </p:txBody>
+      </p:sp>
+      <p:sp>
+        <p:nvSpPr>
+          <p:cNvPr id="13" name="Shape 10"/>
+          <p:cNvSpPr/>
+          <p:nvPr/>
+        </p:nvSpPr>
+        <p:spPr>
+          <a:xfrm>
+            <a:off x="658368" y="1993392"/>
+            <a:ext cx="1920240" cy="676656"/>
+          </a:xfrm>
+          <a:prstGeom prst="roundRect">
+            <a:avLst>
+              <a:gd name="adj" fmla="val 5405"/>
+            </a:avLst>
+          </a:prstGeom>
+          <a:solidFill>
+            <a:srgbClr val="FFFFFF"/>
+          </a:solidFill>
+          <a:ln w="12700">
+            <a:solidFill>
+              <a:srgbClr val="15355F"/>
+            </a:solidFill>
+            <a:prstDash val="solid"/>
+          </a:ln>
+        </p:spPr>
+      </p:sp>
+      <p:sp>
+        <p:nvSpPr>
+          <p:cNvPr id="14" name="Text 11"/>
+          <p:cNvSpPr txBox="1"/>
+          <p:nvPr/>
+        </p:nvSpPr>
+        <p:spPr>
+          <a:xfrm>
+            <a:off x="768096" y="2057400"/>
+            <a:ext cx="1700784" cy="548640"/>
+          </a:xfrm>
+          <a:prstGeom prst="rect">
+            <a:avLst/>
+          </a:prstGeom>
+          <a:noFill/>
+          <a:ln/>
+        </p:spPr>
+        <p:txBody>
+          <a:bodyPr wrap="square" lIns="0" tIns="0" rIns="0" bIns="0" rtlCol="0" anchor="ctr">
+            <a:normAutofit/>
+          </a:bodyPr>
+          <a:lstStyle/>
+          <a:p>
+            <a:pPr marL="0" indent="0" algn="ctr">
+              <a:buNone/>
+            </a:pPr>
+            <a:r>
+              <a:rPr lang="en-US" sz="1650" b="1" dirty="0">
+                <a:solidFill>
+                  <a:srgbClr val="07182F"/>
+                </a:solidFill>
+                <a:latin typeface="Arial" pitchFamily="34" charset="0"/>
+                <a:ea typeface="Arial" pitchFamily="34" charset="-122"/>
+                <a:cs typeface="Arial" pitchFamily="34" charset="-120"/>
+              </a:rPr>
+              <a:t>Nội dung, mục tiêu</a:t>
+            </a:r>
+            <a:endParaRPr lang="en-US" sz="1650" dirty="0"/>
+          </a:p>
+        </p:txBody>
+      </p:sp>
+      <p:sp>
+        <p:nvSpPr>
+          <p:cNvPr id="15" name="Shape 12"/>
+          <p:cNvSpPr/>
+          <p:nvPr/>
+        </p:nvSpPr>
+        <p:spPr>
+          <a:xfrm>
+            <a:off x="2642616" y="2331720"/>
+            <a:ext cx="201168" cy="0"/>
+          </a:xfrm>
+          <a:prstGeom prst="line">
+            <a:avLst/>
+          </a:prstGeom>
+          <a:noFill/>
+          <a:ln w="12700">
+            <a:solidFill>
+              <a:srgbClr val="C9963A"/>
+            </a:solidFill>
+            <a:prstDash val="solid"/>
+            <a:tailEnd type="triangle"/>
+          </a:ln>
+        </p:spPr>
+      </p:sp>
+      <p:sp>
+        <p:nvSpPr>
+          <p:cNvPr id="16" name="Shape 13"/>
+          <p:cNvSpPr/>
+          <p:nvPr/>
+        </p:nvSpPr>
+        <p:spPr>
+          <a:xfrm>
+            <a:off x="2907792" y="1993392"/>
+            <a:ext cx="1920240" cy="676656"/>
+          </a:xfrm>
+          <a:prstGeom prst="roundRect">
+            <a:avLst>
+              <a:gd name="adj" fmla="val 5405"/>
+            </a:avLst>
+          </a:prstGeom>
+          <a:solidFill>
+            <a:srgbClr val="FFFFFF"/>
+          </a:solidFill>
+          <a:ln w="12700">
+            <a:solidFill>
+              <a:srgbClr val="15355F"/>
+            </a:solidFill>
+            <a:prstDash val="solid"/>
+          </a:ln>
+        </p:spPr>
+      </p:sp>
+      <p:sp>
+        <p:nvSpPr>
+          <p:cNvPr id="17" name="Text 14"/>
+          <p:cNvSpPr txBox="1"/>
+          <p:nvPr/>
+        </p:nvSpPr>
+        <p:spPr>
+          <a:xfrm>
+            <a:off x="3017520" y="2057400"/>
+            <a:ext cx="1700784" cy="548640"/>
+          </a:xfrm>
+          <a:prstGeom prst="rect">
+            <a:avLst/>
+          </a:prstGeom>
+          <a:noFill/>
+          <a:ln/>
+        </p:spPr>
+        <p:txBody>
+          <a:bodyPr wrap="square" lIns="0" tIns="0" rIns="0" bIns="0" rtlCol="0" anchor="ctr">
+            <a:normAutofit/>
+          </a:bodyPr>
+          <a:lstStyle/>
+          <a:p>
+            <a:pPr marL="0" indent="0" algn="ctr">
+              <a:buNone/>
+            </a:pPr>
+            <a:r>
+              <a:rPr lang="en-US" sz="1650" b="1" dirty="0">
+                <a:solidFill>
+                  <a:srgbClr val="07182F"/>
+                </a:solidFill>
+                <a:latin typeface="Arial" pitchFamily="34" charset="0"/>
+                <a:ea typeface="Arial" pitchFamily="34" charset="-122"/>
+                <a:cs typeface="Arial" pitchFamily="34" charset="-120"/>
+              </a:rPr>
+              <a:t>Chỉ mục / câu hỏi</a:t>
+            </a:r>
+            <a:endParaRPr lang="en-US" sz="1650" dirty="0"/>
+          </a:p>
+        </p:txBody>
+      </p:sp>
+      <p:sp>
+        <p:nvSpPr>
+          <p:cNvPr id="18" name="Shape 15"/>
+          <p:cNvSpPr/>
+          <p:nvPr/>
+        </p:nvSpPr>
+        <p:spPr>
+          <a:xfrm>
+            <a:off x="4892040" y="2331720"/>
+            <a:ext cx="201168" cy="0"/>
+          </a:xfrm>
+          <a:prstGeom prst="line">
+            <a:avLst/>
+          </a:prstGeom>
+          <a:noFill/>
+          <a:ln w="12700">
+            <a:solidFill>
+              <a:srgbClr val="C9963A"/>
+            </a:solidFill>
+            <a:prstDash val="solid"/>
+            <a:tailEnd type="triangle"/>
+          </a:ln>
+        </p:spPr>
+      </p:sp>
+      <p:sp>
+        <p:nvSpPr>
+          <p:cNvPr id="19" name="Shape 16"/>
+          <p:cNvSpPr/>
+          <p:nvPr/>
+        </p:nvSpPr>
+        <p:spPr>
+          <a:xfrm>
+            <a:off x="5157216" y="1993392"/>
+            <a:ext cx="1920240" cy="676656"/>
+          </a:xfrm>
+          <a:prstGeom prst="roundRect">
+            <a:avLst>
+              <a:gd name="adj" fmla="val 5405"/>
+            </a:avLst>
+          </a:prstGeom>
+          <a:solidFill>
+            <a:srgbClr val="FFFFFF"/>
+          </a:solidFill>
+          <a:ln w="12700">
+            <a:solidFill>
+              <a:srgbClr val="15355F"/>
+            </a:solidFill>
+            <a:prstDash val="solid"/>
+          </a:ln>
+        </p:spPr>
+      </p:sp>
+      <p:sp>
+        <p:nvSpPr>
+          <p:cNvPr id="20" name="Text 17"/>
+          <p:cNvSpPr txBox="1"/>
+          <p:nvPr/>
+        </p:nvSpPr>
+        <p:spPr>
+          <a:xfrm>
+            <a:off x="5266944" y="2057400"/>
+            <a:ext cx="1700784" cy="548640"/>
+          </a:xfrm>
+          <a:prstGeom prst="rect">
+            <a:avLst/>
+          </a:prstGeom>
+          <a:noFill/>
+          <a:ln/>
+        </p:spPr>
+        <p:txBody>
+          <a:bodyPr wrap="square" lIns="0" tIns="0" rIns="0" bIns="0" rtlCol="0" anchor="ctr">
+            <a:normAutofit/>
+          </a:bodyPr>
+          <a:lstStyle/>
+          <a:p>
+            <a:pPr marL="0" indent="0" algn="ctr">
+              <a:buNone/>
+            </a:pPr>
+            <a:r>
+              <a:rPr lang="en-US" sz="1650" b="1" dirty="0">
+                <a:solidFill>
+                  <a:srgbClr val="07182F"/>
+                </a:solidFill>
+                <a:latin typeface="Arial" pitchFamily="34" charset="0"/>
+                <a:ea typeface="Arial" pitchFamily="34" charset="-122"/>
+                <a:cs typeface="Arial" pitchFamily="34" charset="-120"/>
+              </a:rPr>
+              <a:t>Tra cứu / trả lời</a:t>
+            </a:r>
+            <a:endParaRPr lang="en-US" sz="1650" dirty="0"/>
+          </a:p>
+        </p:txBody>
+      </p:sp>
+      <p:sp>
+        <p:nvSpPr>
+          <p:cNvPr id="21" name="Shape 18"/>
+          <p:cNvSpPr/>
+          <p:nvPr/>
+        </p:nvSpPr>
+        <p:spPr>
+          <a:xfrm>
+            <a:off x="7141464" y="2331720"/>
+            <a:ext cx="201168" cy="0"/>
+          </a:xfrm>
+          <a:prstGeom prst="line">
+            <a:avLst/>
+          </a:prstGeom>
+          <a:noFill/>
+          <a:ln w="12700">
+            <a:solidFill>
+              <a:srgbClr val="C9963A"/>
+            </a:solidFill>
+            <a:prstDash val="solid"/>
+            <a:tailEnd type="triangle"/>
+          </a:ln>
+        </p:spPr>
+      </p:sp>
+      <p:sp>
+        <p:nvSpPr>
+          <p:cNvPr id="22" name="Shape 19"/>
+          <p:cNvSpPr/>
+          <p:nvPr/>
+        </p:nvSpPr>
+        <p:spPr>
+          <a:xfrm>
+            <a:off x="7406640" y="1993392"/>
+            <a:ext cx="1920240" cy="676656"/>
+          </a:xfrm>
+          <a:prstGeom prst="roundRect">
+            <a:avLst>
+              <a:gd name="adj" fmla="val 5405"/>
+            </a:avLst>
+          </a:prstGeom>
+          <a:solidFill>
+            <a:srgbClr val="FFFFFF"/>
+          </a:solidFill>
+          <a:ln w="12700">
+            <a:solidFill>
+              <a:srgbClr val="15355F"/>
+            </a:solidFill>
+            <a:prstDash val="solid"/>
+          </a:ln>
+        </p:spPr>
+      </p:sp>
+      <p:sp>
+        <p:nvSpPr>
+          <p:cNvPr id="23" name="Text 20"/>
+          <p:cNvSpPr txBox="1"/>
+          <p:nvPr/>
+        </p:nvSpPr>
+        <p:spPr>
+          <a:xfrm>
+            <a:off x="7516368" y="2057400"/>
+            <a:ext cx="1700784" cy="548640"/>
+          </a:xfrm>
+          <a:prstGeom prst="rect">
+            <a:avLst/>
+          </a:prstGeom>
+          <a:noFill/>
+          <a:ln/>
+        </p:spPr>
+        <p:txBody>
+          <a:bodyPr wrap="square" lIns="0" tIns="0" rIns="0" bIns="0" rtlCol="0" anchor="ctr">
+            <a:normAutofit/>
+          </a:bodyPr>
+          <a:lstStyle/>
+          <a:p>
+            <a:pPr marL="0" indent="0" algn="ctr">
+              <a:buNone/>
+            </a:pPr>
+            <a:r>
+              <a:rPr lang="en-US" sz="1650" b="1" dirty="0">
+                <a:solidFill>
+                  <a:srgbClr val="07182F"/>
+                </a:solidFill>
+                <a:latin typeface="Arial" pitchFamily="34" charset="0"/>
+                <a:ea typeface="Arial" pitchFamily="34" charset="-122"/>
+                <a:cs typeface="Arial" pitchFamily="34" charset="-120"/>
+              </a:rPr>
+              <a:t>Trích đoạn / phản hồi</a:t>
+            </a:r>
+            <a:endParaRPr lang="en-US" sz="1650" dirty="0"/>
+          </a:p>
+        </p:txBody>
+      </p:sp>
+      <p:sp>
+        <p:nvSpPr>
+          <p:cNvPr id="24" name="Shape 21"/>
+          <p:cNvSpPr/>
+          <p:nvPr/>
+        </p:nvSpPr>
+        <p:spPr>
+          <a:xfrm>
+            <a:off x="9390888" y="2331720"/>
+            <a:ext cx="201168" cy="0"/>
+          </a:xfrm>
+          <a:prstGeom prst="line">
+            <a:avLst/>
+          </a:prstGeom>
+          <a:noFill/>
+          <a:ln w="12700">
+            <a:solidFill>
+              <a:srgbClr val="C9963A"/>
+            </a:solidFill>
+            <a:prstDash val="solid"/>
+            <a:tailEnd type="triangle"/>
+          </a:ln>
+        </p:spPr>
+      </p:sp>
+      <p:sp>
+        <p:nvSpPr>
+          <p:cNvPr id="25" name="Shape 22"/>
+          <p:cNvSpPr/>
+          <p:nvPr/>
+        </p:nvSpPr>
+        <p:spPr>
+          <a:xfrm>
+            <a:off x="9656064" y="1993392"/>
+            <a:ext cx="1920240" cy="676656"/>
+          </a:xfrm>
+          <a:prstGeom prst="roundRect">
+            <a:avLst>
+              <a:gd name="adj" fmla="val 5405"/>
+            </a:avLst>
+          </a:prstGeom>
+          <a:solidFill>
+            <a:srgbClr val="07182F"/>
+          </a:solidFill>
+          <a:ln w="12700">
+            <a:solidFill>
+              <a:srgbClr val="15355F"/>
+            </a:solidFill>
+            <a:prstDash val="solid"/>
+          </a:ln>
+        </p:spPr>
+      </p:sp>
+      <p:sp>
+        <p:nvSpPr>
+          <p:cNvPr id="26" name="Text 23"/>
+          <p:cNvSpPr txBox="1"/>
+          <p:nvPr/>
+        </p:nvSpPr>
+        <p:spPr>
+          <a:xfrm>
+            <a:off x="9765792" y="2057400"/>
+            <a:ext cx="1700784" cy="548640"/>
+          </a:xfrm>
+          <a:prstGeom prst="rect">
+            <a:avLst/>
+          </a:prstGeom>
+          <a:noFill/>
+          <a:ln/>
+        </p:spPr>
+        <p:txBody>
+          <a:bodyPr wrap="square" lIns="0" tIns="0" rIns="0" bIns="0" rtlCol="0" anchor="ctr">
+            <a:normAutofit/>
+          </a:bodyPr>
+          <a:lstStyle/>
+          <a:p>
+            <a:pPr marL="0" indent="0" algn="ctr">
+              <a:buNone/>
+            </a:pPr>
+            <a:r>
+              <a:rPr lang="en-US" sz="1650" b="1" dirty="0">
+                <a:solidFill>
+                  <a:srgbClr val="FFFFFF"/>
+                </a:solidFill>
+                <a:latin typeface="Arial" pitchFamily="34" charset="0"/>
+                <a:ea typeface="Arial" pitchFamily="34" charset="-122"/>
+                <a:cs typeface="Arial" pitchFamily="34" charset="-120"/>
+              </a:rPr>
+              <a:t>Ôn lại, chỉnh sửa</a:t>
+            </a:r>
+            <a:endParaRPr lang="en-US" sz="1650" dirty="0"/>
+          </a:p>
+        </p:txBody>
+      </p:sp>
+      <p:sp>
+        <p:nvSpPr>
+          <p:cNvPr id="27" name="Shape 24"/>
+          <p:cNvSpPr/>
+          <p:nvPr/>
+        </p:nvSpPr>
+        <p:spPr>
+          <a:xfrm>
+            <a:off x="658368" y="2852928"/>
+            <a:ext cx="5303520" cy="1335024"/>
+          </a:xfrm>
+          <a:prstGeom prst="roundRect">
+            <a:avLst>
+              <a:gd name="adj" fmla="val 2740"/>
+            </a:avLst>
+          </a:prstGeom>
+          <a:solidFill>
+            <a:srgbClr val="FFFFFF"/>
+          </a:solidFill>
+          <a:ln w="12700">
+            <a:solidFill>
+              <a:srgbClr val="2980B9"/>
+            </a:solidFill>
+            <a:prstDash val="solid"/>
+          </a:ln>
+        </p:spPr>
+      </p:sp>
+      <p:sp>
+        <p:nvSpPr>
+          <p:cNvPr id="28" name="Text 25"/>
+          <p:cNvSpPr txBox="1"/>
+          <p:nvPr/>
+        </p:nvSpPr>
+        <p:spPr>
+          <a:xfrm>
+            <a:off x="859536" y="2971800"/>
+            <a:ext cx="4901184" cy="274320"/>
+          </a:xfrm>
+          <a:prstGeom prst="rect">
+            <a:avLst/>
+          </a:prstGeom>
+          <a:noFill/>
+          <a:ln/>
+        </p:spPr>
+        <p:txBody>
+          <a:bodyPr wrap="square" lIns="0" tIns="0" rIns="0" bIns="0" rtlCol="0" anchor="t">
+            <a:normAutofit/>
+          </a:bodyPr>
+          <a:lstStyle/>
+          <a:p>
+            <a:pPr marL="0" indent="0" algn="l">
+              <a:buNone/>
+            </a:pPr>
+            <a:r>
+              <a:rPr lang="en-US" sz="1800" b="1" dirty="0">
+                <a:solidFill>
+                  <a:srgbClr val="07182F"/>
+                </a:solidFill>
+                <a:latin typeface="Georgia" pitchFamily="34" charset="0"/>
+                <a:ea typeface="Georgia" pitchFamily="34" charset="-122"/>
+                <a:cs typeface="Georgia" pitchFamily="34" charset="-120"/>
+              </a:rPr>
+              <a:t>Tìm kiếm văn bản cục bộ</a:t>
+            </a:r>
+            <a:endParaRPr lang="en-US" sz="1800" dirty="0"/>
+          </a:p>
+        </p:txBody>
+      </p:sp>
+      <p:sp>
+        <p:nvSpPr>
+          <p:cNvPr id="29" name="Text 26"/>
+          <p:cNvSpPr txBox="1"/>
+          <p:nvPr/>
+        </p:nvSpPr>
+        <p:spPr>
+          <a:xfrm>
+            <a:off x="859536" y="3328416"/>
+            <a:ext cx="4901184" cy="740664"/>
+          </a:xfrm>
+          <a:prstGeom prst="rect">
+            <a:avLst/>
+          </a:prstGeom>
+          <a:noFill/>
+          <a:ln/>
+        </p:spPr>
+        <p:txBody>
+          <a:bodyPr wrap="square" lIns="0" tIns="0" rIns="0" bIns="0" rtlCol="0" anchor="t">
+            <a:normAutofit/>
+          </a:bodyPr>
+          <a:lstStyle/>
+          <a:p>
+            <a:pPr marL="0" indent="0" algn="l">
+              <a:buNone/>
+            </a:pPr>
+            <a:r>
+              <a:rPr lang="en-US" sz="1600" dirty="0">
+                <a:solidFill>
+                  <a:srgbClr val="243247"/>
+                </a:solidFill>
+                <a:latin typeface="Arial" pitchFamily="34" charset="0"/>
+                <a:ea typeface="Arial" pitchFamily="34" charset="-122"/>
+                <a:cs typeface="Arial" pitchFamily="34" charset="-120"/>
+              </a:rPr>
+              <a:t>Tạo chỉ mục từ bài; hỗ trợ tiếng Việt có dấu/không dấu và đoạn liên quan. Không mặc nhiên tìm công thức ngữ nghĩa hoặc trong PDF.</a:t>
+            </a:r>
+            <a:endParaRPr lang="en-US" sz="1600" dirty="0"/>
+          </a:p>
+        </p:txBody>
+      </p:sp>
+      <p:sp>
+        <p:nvSpPr>
+          <p:cNvPr id="30" name="Shape 27"/>
+          <p:cNvSpPr/>
+          <p:nvPr/>
+        </p:nvSpPr>
+        <p:spPr>
+          <a:xfrm>
+            <a:off x="6236208" y="2852928"/>
+            <a:ext cx="5303520" cy="1335024"/>
+          </a:xfrm>
+          <a:prstGeom prst="roundRect">
+            <a:avLst>
+              <a:gd name="adj" fmla="val 2740"/>
+            </a:avLst>
+          </a:prstGeom>
+          <a:solidFill>
+            <a:srgbClr val="FFFFFF"/>
+          </a:solidFill>
+          <a:ln w="12700">
+            <a:solidFill>
+              <a:srgbClr val="27AE60"/>
+            </a:solidFill>
+            <a:prstDash val="solid"/>
+          </a:ln>
+        </p:spPr>
+      </p:sp>
+      <p:sp>
+        <p:nvSpPr>
+          <p:cNvPr id="31" name="Text 28"/>
+          <p:cNvSpPr txBox="1"/>
+          <p:nvPr/>
+        </p:nvSpPr>
+        <p:spPr>
+          <a:xfrm>
+            <a:off x="6437376" y="2971800"/>
+            <a:ext cx="4901184" cy="274320"/>
+          </a:xfrm>
+          <a:prstGeom prst="rect">
+            <a:avLst/>
+          </a:prstGeom>
+          <a:noFill/>
+          <a:ln/>
+        </p:spPr>
+        <p:txBody>
+          <a:bodyPr wrap="square" lIns="0" tIns="0" rIns="0" bIns="0" rtlCol="0" anchor="t">
+            <a:normAutofit/>
+          </a:bodyPr>
+          <a:lstStyle/>
+          <a:p>
+            <a:pPr marL="0" indent="0" algn="l">
+              <a:buNone/>
+            </a:pPr>
+            <a:r>
+              <a:rPr lang="en-US" sz="1800" b="1" dirty="0">
+                <a:solidFill>
+                  <a:srgbClr val="07182F"/>
+                </a:solidFill>
+                <a:latin typeface="Georgia" pitchFamily="34" charset="0"/>
+                <a:ea typeface="Georgia" pitchFamily="34" charset="-122"/>
+                <a:cs typeface="Georgia" pitchFamily="34" charset="-120"/>
+              </a:rPr>
+              <a:t>Tự kiểm tra trên trình duyệt</a:t>
+            </a:r>
+            <a:endParaRPr lang="en-US" sz="1800" dirty="0"/>
+          </a:p>
+        </p:txBody>
+      </p:sp>
+      <p:sp>
+        <p:nvSpPr>
+          <p:cNvPr id="32" name="Text 29"/>
+          <p:cNvSpPr txBox="1"/>
+          <p:nvPr/>
+        </p:nvSpPr>
+        <p:spPr>
+          <a:xfrm>
+            <a:off x="6437376" y="3328416"/>
+            <a:ext cx="4901184" cy="740664"/>
+          </a:xfrm>
+          <a:prstGeom prst="rect">
+            <a:avLst/>
+          </a:prstGeom>
+          <a:noFill/>
+          <a:ln/>
+        </p:spPr>
+        <p:txBody>
+          <a:bodyPr wrap="square" lIns="0" tIns="0" rIns="0" bIns="0" rtlCol="0" anchor="t">
+            <a:normAutofit/>
+          </a:bodyPr>
+          <a:lstStyle/>
+          <a:p>
+            <a:pPr marL="0" indent="0" algn="l">
+              <a:buNone/>
+            </a:pPr>
+            <a:r>
+              <a:rPr lang="en-US" sz="1600" dirty="0">
+                <a:solidFill>
+                  <a:srgbClr val="243247"/>
+                </a:solidFill>
+                <a:latin typeface="Arial" pitchFamily="34" charset="0"/>
+                <a:ea typeface="Arial" pitchFamily="34" charset="-122"/>
+                <a:cs typeface="Arial" pitchFamily="34" charset="-120"/>
+              </a:rPr>
+              <a:t>300 câu có phản hồi đúng/sai và giải thích; kết quả/tiến độ lưu cục bộ, chưa có danh tính, sổ điểm hoặc đồng bộ LMS.</a:t>
+            </a:r>
+            <a:endParaRPr lang="en-US" sz="1600" dirty="0"/>
+          </a:p>
+        </p:txBody>
+      </p:sp>
+      <p:sp>
+        <p:nvSpPr>
+          <p:cNvPr id="33" name="Shape 30"/>
+          <p:cNvSpPr/>
+          <p:nvPr/>
+        </p:nvSpPr>
+        <p:spPr>
+          <a:xfrm>
+            <a:off x="658368" y="4352544"/>
+            <a:ext cx="5303520" cy="1335024"/>
+          </a:xfrm>
+          <a:prstGeom prst="roundRect">
+            <a:avLst>
+              <a:gd name="adj" fmla="val 2740"/>
+            </a:avLst>
+          </a:prstGeom>
+          <a:solidFill>
+            <a:srgbClr val="FFFFFF"/>
+          </a:solidFill>
+          <a:ln w="12700">
+            <a:solidFill>
+              <a:srgbClr val="8E44AD"/>
+            </a:solidFill>
+            <a:prstDash val="solid"/>
+          </a:ln>
+        </p:spPr>
+      </p:sp>
+      <p:sp>
+        <p:nvSpPr>
+          <p:cNvPr id="34" name="Text 31"/>
+          <p:cNvSpPr txBox="1"/>
+          <p:nvPr/>
+        </p:nvSpPr>
+        <p:spPr>
+          <a:xfrm>
+            <a:off x="859536" y="4471416"/>
+            <a:ext cx="4901184" cy="274320"/>
+          </a:xfrm>
+          <a:prstGeom prst="rect">
+            <a:avLst/>
+          </a:prstGeom>
+          <a:noFill/>
+          <a:ln/>
+        </p:spPr>
+        <p:txBody>
+          <a:bodyPr wrap="square" lIns="0" tIns="0" rIns="0" bIns="0" rtlCol="0" anchor="t">
+            <a:normAutofit/>
+          </a:bodyPr>
+          <a:lstStyle/>
+          <a:p>
+            <a:pPr marL="0" indent="0" algn="l">
+              <a:buNone/>
+            </a:pPr>
+            <a:r>
+              <a:rPr lang="en-US" sz="1800" b="1" dirty="0">
+                <a:solidFill>
+                  <a:srgbClr val="07182F"/>
+                </a:solidFill>
+                <a:latin typeface="Georgia" pitchFamily="34" charset="0"/>
+                <a:ea typeface="Georgia" pitchFamily="34" charset="-122"/>
+                <a:cs typeface="Georgia" pitchFamily="34" charset="-120"/>
+              </a:rPr>
+              <a:t>Biên soạn và rà soát câu hỏi</a:t>
+            </a:r>
+            <a:endParaRPr lang="en-US" sz="1800" dirty="0"/>
+          </a:p>
+        </p:txBody>
+      </p:sp>
+      <p:sp>
+        <p:nvSpPr>
+          <p:cNvPr id="35" name="Text 32"/>
+          <p:cNvSpPr txBox="1"/>
+          <p:nvPr/>
+        </p:nvSpPr>
+        <p:spPr>
+          <a:xfrm>
+            <a:off x="859536" y="4828032"/>
+            <a:ext cx="4901184" cy="740664"/>
+          </a:xfrm>
+          <a:prstGeom prst="rect">
+            <a:avLst/>
+          </a:prstGeom>
+          <a:noFill/>
+          <a:ln/>
+        </p:spPr>
+        <p:txBody>
+          <a:bodyPr wrap="square" lIns="0" tIns="0" rIns="0" bIns="0" rtlCol="0" anchor="t">
+            <a:normAutofit/>
+          </a:bodyPr>
+          <a:lstStyle/>
+          <a:p>
+            <a:pPr marL="0" indent="0" algn="l">
+              <a:buNone/>
+            </a:pPr>
+            <a:r>
+              <a:rPr lang="en-US" sz="1600" dirty="0">
+                <a:solidFill>
+                  <a:srgbClr val="243247"/>
+                </a:solidFill>
+                <a:latin typeface="Arial" pitchFamily="34" charset="0"/>
+                <a:ea typeface="Arial" pitchFamily="34" charset="-122"/>
+                <a:cs typeface="Arial" pitchFamily="34" charset="-120"/>
+              </a:rPr>
+              <a:t>Ma trận mục tiêu–nội dung–mức độ → câu hỏi/đáp án/phản hồi → phản biện → kiểm chấm → thử người học → phân tích, chỉnh sửa.</a:t>
+            </a:r>
+            <a:endParaRPr lang="en-US" sz="1600" dirty="0"/>
+          </a:p>
+        </p:txBody>
+      </p:sp>
+      <p:sp>
+        <p:nvSpPr>
+          <p:cNvPr id="36" name="Shape 33"/>
+          <p:cNvSpPr/>
+          <p:nvPr/>
+        </p:nvSpPr>
+        <p:spPr>
+          <a:xfrm>
+            <a:off x="6236208" y="4352544"/>
+            <a:ext cx="5303520" cy="1335024"/>
+          </a:xfrm>
+          <a:prstGeom prst="roundRect">
+            <a:avLst>
+              <a:gd name="adj" fmla="val 2740"/>
+            </a:avLst>
+          </a:prstGeom>
+          <a:solidFill>
+            <a:srgbClr val="FFFFFF"/>
+          </a:solidFill>
+          <a:ln w="12700">
+            <a:solidFill>
+              <a:srgbClr val="C9963A"/>
+            </a:solidFill>
+            <a:prstDash val="solid"/>
+          </a:ln>
+        </p:spPr>
+      </p:sp>
+      <p:sp>
+        <p:nvSpPr>
+          <p:cNvPr id="37" name="Text 34"/>
+          <p:cNvSpPr txBox="1"/>
+          <p:nvPr/>
+        </p:nvSpPr>
+        <p:spPr>
+          <a:xfrm>
+            <a:off x="6437376" y="4471416"/>
+            <a:ext cx="4901184" cy="274320"/>
+          </a:xfrm>
+          <a:prstGeom prst="rect">
+            <a:avLst/>
+          </a:prstGeom>
+          <a:noFill/>
+          <a:ln/>
+        </p:spPr>
+        <p:txBody>
+          <a:bodyPr wrap="square" lIns="0" tIns="0" rIns="0" bIns="0" rtlCol="0" anchor="t">
+            <a:normAutofit/>
+          </a:bodyPr>
+          <a:lstStyle/>
+          <a:p>
+            <a:pPr marL="0" indent="0" algn="l">
+              <a:buNone/>
+            </a:pPr>
+            <a:r>
+              <a:rPr lang="en-US" sz="1800" b="1" dirty="0">
+                <a:solidFill>
+                  <a:srgbClr val="07182F"/>
+                </a:solidFill>
+                <a:latin typeface="Georgia" pitchFamily="34" charset="0"/>
+                <a:ea typeface="Georgia" pitchFamily="34" charset="-122"/>
+                <a:cs typeface="Georgia" pitchFamily="34" charset="-120"/>
+              </a:rPr>
+              <a:t>Nếu dùng để đánh giá chính thức</a:t>
+            </a:r>
+            <a:endParaRPr lang="en-US" sz="1800" dirty="0"/>
+          </a:p>
+        </p:txBody>
+      </p:sp>
+      <p:sp>
+        <p:nvSpPr>
+          <p:cNvPr id="38" name="Text 35"/>
+          <p:cNvSpPr txBox="1"/>
+          <p:nvPr/>
+        </p:nvSpPr>
+        <p:spPr>
+          <a:xfrm>
+            <a:off x="6437376" y="4828032"/>
+            <a:ext cx="4901184" cy="740664"/>
+          </a:xfrm>
+          <a:prstGeom prst="rect">
+            <a:avLst/>
+          </a:prstGeom>
+          <a:noFill/>
+          <a:ln/>
+        </p:spPr>
+        <p:txBody>
+          <a:bodyPr wrap="square" lIns="0" tIns="0" rIns="0" bIns="0" rtlCol="0" anchor="t">
+            <a:normAutofit/>
+          </a:bodyPr>
+          <a:lstStyle/>
+          <a:p>
+            <a:pPr marL="0" indent="0" algn="l">
+              <a:buNone/>
+            </a:pPr>
+            <a:r>
+              <a:rPr lang="en-US" sz="1600" dirty="0">
+                <a:solidFill>
+                  <a:srgbClr val="243247"/>
+                </a:solidFill>
+                <a:latin typeface="Arial" pitchFamily="34" charset="0"/>
+                <a:ea typeface="Arial" pitchFamily="34" charset="-122"/>
+                <a:cs typeface="Arial" pitchFamily="34" charset="-120"/>
+              </a:rPr>
+              <a:t>Cần danh tính, lưu kết quả tin cậy, phân quyền và bảo vệ dữ liệu. Bài mô phỏng cho điểm cần rubric giảng viên duyệt, chưa tự chấm thao tác.</a:t>
+            </a:r>
+            <a:endParaRPr lang="en-US" sz="1600" dirty="0"/>
+          </a:p>
+        </p:txBody>
+      </p:sp>
+      <p:sp>
+        <p:nvSpPr>
+          <p:cNvPr id="39" name="Shape 36"/>
+          <p:cNvSpPr/>
+          <p:nvPr/>
+        </p:nvSpPr>
+        <p:spPr>
+          <a:xfrm>
+            <a:off x="658368" y="5852160"/>
+            <a:ext cx="10881360" cy="365760"/>
+          </a:xfrm>
+          <a:prstGeom prst="roundRect">
+            <a:avLst>
+              <a:gd name="adj" fmla="val 10000"/>
+            </a:avLst>
+          </a:prstGeom>
+          <a:solidFill>
+            <a:srgbClr val="FFF4E8"/>
+          </a:solidFill>
+          <a:ln w="12700">
+            <a:solidFill>
+              <a:srgbClr val="9A5B00"/>
+            </a:solidFill>
+            <a:prstDash val="solid"/>
+          </a:ln>
+        </p:spPr>
+      </p:sp>
+      <p:sp>
+        <p:nvSpPr>
+          <p:cNvPr id="40" name="Text 37"/>
+          <p:cNvSpPr txBox="1"/>
+          <p:nvPr/>
+        </p:nvSpPr>
+        <p:spPr>
+          <a:xfrm>
+            <a:off x="859536" y="5925312"/>
+            <a:ext cx="10479024" cy="219456"/>
+          </a:xfrm>
+          <a:prstGeom prst="rect">
+            <a:avLst/>
+          </a:prstGeom>
+          <a:noFill/>
+          <a:ln/>
+        </p:spPr>
+        <p:txBody>
+          <a:bodyPr wrap="square" lIns="0" tIns="0" rIns="0" bIns="0" rtlCol="0" anchor="t">
+            <a:normAutofit/>
+          </a:bodyPr>
+          <a:lstStyle/>
+          <a:p>
+            <a:pPr marL="0" indent="0" algn="ctr">
+              <a:buNone/>
+            </a:pPr>
+            <a:r>
+              <a:rPr lang="en-US" sz="1400" b="1" dirty="0">
+                <a:solidFill>
+                  <a:srgbClr val="9A5B00"/>
+                </a:solidFill>
+                <a:latin typeface="Arial" pitchFamily="34" charset="0"/>
+                <a:ea typeface="Arial" pitchFamily="34" charset="-122"/>
+                <a:cs typeface="Arial" pitchFamily="34" charset="-120"/>
+              </a:rPr>
+              <a:t>Số câu, lượt đọc không chứng minh đạt đầu ra hay hiệu quả học tập; thử người học chưa được xác nhận.</a:t>
+            </a:r>
+            <a:endParaRPr lang="en-US" sz="1400" dirty="0"/>
           </a:p>
         </p:txBody>
       </p:sp>
@@ -19539,7 +24893,7 @@
               <a:buNone/>
             </a:pPr>
             <a:r>
-              <a:rPr lang="en-US" sz="2800" b="1" dirty="0">
+              <a:rPr lang="en-US" sz="3400" b="1" dirty="0">
                 <a:solidFill>
                   <a:srgbClr val="07182F"/>
                 </a:solidFill>
@@ -19547,7 +24901,7 @@
                 <a:ea typeface="Georgia" pitchFamily="34" charset="-122"/>
                 <a:cs typeface="Georgia" pitchFamily="34" charset="-120"/>
               </a:rPr>
-              <a:t>Kết quả tổng thể: học liệu số cho ba mạch kiến thức</a:t>
+              <a:t>Một học liệu số cho ba mạch kiến thức</a:t>
             </a:r>
             <a:endParaRPr lang="en-US" sz="3600" dirty="0"/>
           </a:p>
@@ -19654,7 +25008,7 @@
                 <a:ea typeface="Arial" pitchFamily="34" charset="-122"/>
                 <a:cs typeface="Arial" pitchFamily="34" charset="-120"/>
               </a:rPr>
-              <a:t>Tĩnh học, Động học và Động lực học đã được tổ chức thành nội dung số có hình, công thức, mô phỏng và câu tự kiểm tra.</a:t>
+              <a:t>Số liệu mô tả phạm vi hiện vật: Tĩnh học, Động học, Động lực học; không tự chứng minh chất lượng hay hiệu quả học tập.</a:t>
             </a:r>
             <a:endParaRPr lang="en-US" sz="1700" dirty="0"/>
           </a:p>
@@ -20018,7 +25372,7 @@
                 <a:ea typeface="Arial" pitchFamily="34" charset="-122"/>
                 <a:cs typeface="Arial" pitchFamily="34" charset="-120"/>
               </a:rPr>
-              <a:t>tham chiếu hình</a:t>
+              <a:t>tham chiếu hình duy nhất</a:t>
             </a:r>
             <a:endParaRPr lang="en-US" sz="1200" dirty="0"/>
           </a:p>
